--- a/01 Elementi Razvoja Softvera/02 Prezentacije/PPTX/00 Основне информације о предмету и пројекту.pptx
+++ b/01 Elementi Razvoja Softvera/02 Prezentacije/PPTX/00 Основне информације о предмету и пројекту.pptx
@@ -1085,7 +1085,7 @@
 </file>
 
 <file path=ppt/notesSlides/notesSlide4.xml><?xml version="1.0" encoding="utf-8"?>
-<p:notes xmlns:a="http://schemas.openxmlformats.org/drawingml/2006/main" xmlns:r="http://schemas.openxmlformats.org/officeDocument/2006/relationships" xmlns:p="http://schemas.openxmlformats.org/presentationml/2006/main">
+<p:notes xmlns:p="http://schemas.openxmlformats.org/presentationml/2006/main">
   <p:cSld>
     <p:spTree>
       <p:nvGrpSpPr>
@@ -1094,21 +1094,16 @@
         <p:nvPr/>
       </p:nvGrpSpPr>
       <p:grpSpPr>
-        <a:xfrm>
-          <a:off x="0" y="0"/>
-          <a:ext cx="0" cy="0"/>
-          <a:chOff x="0" y="0"/>
-          <a:chExt cx="0" cy="0"/>
-        </a:xfrm>
+        <a:xfrm xmlns:a="http://schemas.openxmlformats.org/drawingml/2006/main"/>
       </p:grpSpPr>
       <p:sp>
         <p:nvSpPr>
           <p:cNvPr id="2" name="Slide Image Placeholder 1"/>
           <p:cNvSpPr>
-            <a:spLocks noGrp="1" noRot="1" noChangeAspect="1"/>
+            <a:spLocks xmlns:a="http://schemas.openxmlformats.org/drawingml/2006/main" noGrp="1"/>
           </p:cNvSpPr>
           <p:nvPr>
-            <p:ph type="sldImg"/>
+            <p:ph type="sldImg" idx="0"/>
           </p:nvPr>
         </p:nvSpPr>
         <p:spPr/>
@@ -1117,7 +1112,7 @@
         <p:nvSpPr>
           <p:cNvPr id="3" name="Notes Placeholder 2"/>
           <p:cNvSpPr>
-            <a:spLocks noGrp="1"/>
+            <a:spLocks xmlns:a="http://schemas.openxmlformats.org/drawingml/2006/main" noGrp="1"/>
           </p:cNvSpPr>
           <p:nvPr>
             <p:ph type="body" idx="1"/>
@@ -1125,14 +1120,13 @@
         </p:nvSpPr>
         <p:spPr/>
         <p:txBody>
-          <a:bodyPr/>
-          <a:lstStyle/>
-          <a:p>
-            <a:r>
-              <a:rPr lang="en-US" dirty="0"/>
-              <a:t>Максималан резултат на пројектном делу износи 71 поен. Основне обавезе обухватају рад у алату Tapiz Boards уз Agile и Scrum, SOLID принципе и Clean Architecture, пословну логику са аутоматизованим тестирањем и прве две контролне тачке, укупно 37 поена. Провере и интеграција обухватају интероперабилност, контролисану употребу AI алата и контролне тачке три и четири, укупно 34 поена.</a:t>
-            </a:r>
-            <a:endParaRPr lang="en-US" dirty="0"/>
+          <a:bodyPr xmlns:a="http://schemas.openxmlformats.org/drawingml/2006/main"/>
+          <a:lstStyle xmlns:a="http://schemas.openxmlformats.org/drawingml/2006/main"/>
+          <a:p xmlns:a="http://schemas.openxmlformats.org/drawingml/2006/main">
+            <a:r>
+              <a:t>Максималан резултат на пројектном делу износи 71 поен. Основне обавезе обухватају Tapiz Boards, Agile и Scrum са 10 поена, SOLID принципе и Clean Architecture са 16 поена, пословну логику и аутоматизовано тестирање са 5 поена и КТ1 у термину 4. вежбе са 10 поена, укупно 41 поен. Интероперабилност и усклађеност уговорних страна, правилна и контролисана употреба AI алата и КТ2 у термину 8. вежбе носе по 10 поена, укупно 30. Контролне тачке су већ укључене у максималних 71 поен.</a:t>
+            </a:r>
+            <a:endParaRPr/>
           </a:p>
         </p:txBody>
       </p:sp>
@@ -1140,40 +1134,29 @@
         <p:nvSpPr>
           <p:cNvPr id="4" name="Slide Number Placeholder 3"/>
           <p:cNvSpPr>
-            <a:spLocks noGrp="1"/>
+            <a:spLocks xmlns:a="http://schemas.openxmlformats.org/drawingml/2006/main" noGrp="1"/>
           </p:cNvSpPr>
           <p:nvPr>
-            <p:ph type="sldNum" sz="quarter" idx="10"/>
+            <p:ph type="sldNum" idx="5"/>
           </p:nvPr>
         </p:nvSpPr>
         <p:spPr/>
         <p:txBody>
-          <a:bodyPr/>
-          <a:lstStyle/>
-          <a:p>
-            <a:fld id="{F7021451-1387-4CA6-816F-3879F97B5CBC}" type="slidenum">
-              <a:rPr lang="en-US"/>
-              <a:t>4</a:t>
-            </a:fld>
-            <a:endParaRPr lang="en-US"/>
-          </a:p>
+          <a:bodyPr xmlns:a="http://schemas.openxmlformats.org/drawingml/2006/main"/>
+          <a:lstStyle xmlns:a="http://schemas.openxmlformats.org/drawingml/2006/main"/>
+          <a:p xmlns:a="http://schemas.openxmlformats.org/drawingml/2006/main"/>
         </p:txBody>
       </p:sp>
     </p:spTree>
-    <p:extLst>
-      <p:ext uri="{BB962C8B-B14F-4D97-AF65-F5344CB8AC3E}">
-        <p14:creationId xmlns:p14="http://schemas.microsoft.com/office/powerpoint/2010/main" val="1024086991"/>
-      </p:ext>
-    </p:extLst>
   </p:cSld>
   <p:clrMapOvr>
-    <a:masterClrMapping/>
+    <a:masterClrMapping xmlns:a="http://schemas.openxmlformats.org/drawingml/2006/main"/>
   </p:clrMapOvr>
 </p:notes>
 </file>
 
 <file path=ppt/notesSlides/notesSlide5.xml><?xml version="1.0" encoding="utf-8"?>
-<p:notes xmlns:a="http://schemas.openxmlformats.org/drawingml/2006/main" xmlns:r="http://schemas.openxmlformats.org/officeDocument/2006/relationships" xmlns:p="http://schemas.openxmlformats.org/presentationml/2006/main">
+<p:notes xmlns:p="http://schemas.openxmlformats.org/presentationml/2006/main">
   <p:cSld>
     <p:spTree>
       <p:nvGrpSpPr>
@@ -1182,21 +1165,16 @@
         <p:nvPr/>
       </p:nvGrpSpPr>
       <p:grpSpPr>
-        <a:xfrm>
-          <a:off x="0" y="0"/>
-          <a:ext cx="0" cy="0"/>
-          <a:chOff x="0" y="0"/>
-          <a:chExt cx="0" cy="0"/>
-        </a:xfrm>
+        <a:xfrm xmlns:a="http://schemas.openxmlformats.org/drawingml/2006/main"/>
       </p:grpSpPr>
       <p:sp>
         <p:nvSpPr>
           <p:cNvPr id="2" name="Slide Image Placeholder 1"/>
           <p:cNvSpPr>
-            <a:spLocks noGrp="1" noRot="1" noChangeAspect="1"/>
+            <a:spLocks xmlns:a="http://schemas.openxmlformats.org/drawingml/2006/main" noGrp="1"/>
           </p:cNvSpPr>
           <p:nvPr>
-            <p:ph type="sldImg"/>
+            <p:ph type="sldImg" idx="0"/>
           </p:nvPr>
         </p:nvSpPr>
         <p:spPr/>
@@ -1205,7 +1183,7 @@
         <p:nvSpPr>
           <p:cNvPr id="3" name="Notes Placeholder 2"/>
           <p:cNvSpPr>
-            <a:spLocks noGrp="1"/>
+            <a:spLocks xmlns:a="http://schemas.openxmlformats.org/drawingml/2006/main" noGrp="1"/>
           </p:cNvSpPr>
           <p:nvPr>
             <p:ph type="body" idx="1"/>
@@ -1213,14 +1191,13 @@
         </p:nvSpPr>
         <p:spPr/>
         <p:txBody>
-          <a:bodyPr/>
-          <a:lstStyle/>
-          <a:p>
-            <a:r>
-              <a:rPr lang="en-US" dirty="0"/>
-              <a:t>Током семестра постоје четири контролне тачке. Прва проверава дефиницију проблема, backlog и развојни ток, друга архитектуру и функционално језгро, трећа тестирање и стабилну верзију језгра, а четврта развојни ток уз AI алате и завршну одбрану. Заједно носе 20 поена. Студент може остварити и до пет додатних поена за активност на настави, али укупан пројектни резултат не може прећи 71 поен.</a:t>
-            </a:r>
-            <a:endParaRPr lang="en-US" dirty="0"/>
+          <a:bodyPr xmlns:a="http://schemas.openxmlformats.org/drawingml/2006/main"/>
+          <a:lstStyle xmlns:a="http://schemas.openxmlformats.org/drawingml/2006/main"/>
+          <a:p xmlns:a="http://schemas.openxmlformats.org/drawingml/2006/main">
+            <a:r>
+              <a:t>Током семестра реализују се две контролне тачке, свака са највише 10 поена. КТ1, основна имплементација, одржава се у термину 4. вежбе и проверава репозиторијум, покретање, Tapiz backlog, поделу рада, доменски модел, пословна правила и API/contract границе свих додељених целина. Потребни су најмање један извршив функционални ток и аутоматизовани тест значајног правила, уз договор са зависним тимовима или контролисани stub. КТ2, завршна демонстрација, одржава се у термину 8. вежбе. Обухвата обавезне случајеве употребе, позитивне и негативне тестове, интеграцију, build/CI, прегледане Pull Request-ове и поновљиво покретање са demo подацима. Проверавају се власништво над подацима, права приступа и tenant изолација где је применљиво. Укупних 20 поена већ је укључено у максимум од 71 пројектног поена. Контролне тачке и термини одбране пројекта су одвојене обавезе. До пет додатних поена за активност допуњује пројектни резултат до максималних 71 поен.</a:t>
+            </a:r>
+            <a:endParaRPr/>
           </a:p>
         </p:txBody>
       </p:sp>
@@ -1228,34 +1205,23 @@
         <p:nvSpPr>
           <p:cNvPr id="4" name="Slide Number Placeholder 3"/>
           <p:cNvSpPr>
-            <a:spLocks noGrp="1"/>
+            <a:spLocks xmlns:a="http://schemas.openxmlformats.org/drawingml/2006/main" noGrp="1"/>
           </p:cNvSpPr>
           <p:nvPr>
-            <p:ph type="sldNum" sz="quarter" idx="10"/>
+            <p:ph type="sldNum" idx="5"/>
           </p:nvPr>
         </p:nvSpPr>
         <p:spPr/>
         <p:txBody>
-          <a:bodyPr/>
-          <a:lstStyle/>
-          <a:p>
-            <a:fld id="{F7021451-1387-4CA6-816F-3879F97B5CBC}" type="slidenum">
-              <a:rPr lang="en-US"/>
-              <a:t>5</a:t>
-            </a:fld>
-            <a:endParaRPr lang="en-US"/>
-          </a:p>
+          <a:bodyPr xmlns:a="http://schemas.openxmlformats.org/drawingml/2006/main"/>
+          <a:lstStyle xmlns:a="http://schemas.openxmlformats.org/drawingml/2006/main"/>
+          <a:p xmlns:a="http://schemas.openxmlformats.org/drawingml/2006/main"/>
         </p:txBody>
       </p:sp>
     </p:spTree>
-    <p:extLst>
-      <p:ext uri="{BB962C8B-B14F-4D97-AF65-F5344CB8AC3E}">
-        <p14:creationId xmlns:p14="http://schemas.microsoft.com/office/powerpoint/2010/main" val="1024086991"/>
-      </p:ext>
-    </p:extLst>
   </p:cSld>
   <p:clrMapOvr>
-    <a:masterClrMapping/>
+    <a:masterClrMapping xmlns:a="http://schemas.openxmlformats.org/drawingml/2006/main"/>
   </p:clrMapOvr>
 </p:notes>
 </file>
@@ -6647,7 +6613,7 @@
                 <a:ea typeface="IBM Plex Sans" pitchFamily="34" charset="-122"/>
                 <a:cs typeface="IBM Plex Sans" pitchFamily="34" charset="-120"/>
               </a:rPr>
-              <a:t>Подаци за академскуm годину</a:t>
+              <a:t>Подаци за академску годину</a:t>
             </a:r>
             <a:endParaRPr lang="en-US" sz="1400" dirty="0"/>
           </a:p>
@@ -9366,11 +9332,11 @@
 </file>
 
 <file path=ppt/slides/slide4.xml><?xml version="1.0" encoding="utf-8"?>
-<p:sld xmlns:a="http://schemas.openxmlformats.org/drawingml/2006/main" xmlns:r="http://schemas.openxmlformats.org/officeDocument/2006/relationships" xmlns:p="http://schemas.openxmlformats.org/presentationml/2006/main">
-  <p:cSld name="Slide 4">
+<p:sld xmlns:p="http://schemas.openxmlformats.org/presentationml/2006/main">
+  <p:cSld>
     <p:bg>
       <p:bgPr>
-        <a:solidFill>
+        <a:solidFill xmlns:a="http://schemas.openxmlformats.org/drawingml/2006/main">
           <a:srgbClr val="F6F7F5"/>
         </a:solidFill>
       </p:bgPr>
@@ -9382,233 +9348,271 @@
         <p:nvPr/>
       </p:nvGrpSpPr>
       <p:grpSpPr>
-        <a:xfrm>
-          <a:off x="0" y="0"/>
-          <a:ext cx="0" cy="0"/>
-          <a:chOff x="0" y="0"/>
-          <a:chExt cx="0" cy="0"/>
-        </a:xfrm>
+        <a:xfrm xmlns:a="http://schemas.openxmlformats.org/drawingml/2006/main"/>
       </p:grpSpPr>
       <p:sp>
         <p:nvSpPr>
-          <p:cNvPr id="2" name="Shape 0"/>
-          <p:cNvSpPr/>
-          <p:nvPr/>
-        </p:nvSpPr>
-        <p:spPr>
-          <a:xfrm>
+          <p:cNvPr id="2" name="Shape 0">
+            <a:extLst xmlns:a="http://schemas.openxmlformats.org/drawingml/2006/main">
+              <a:ext uri="{FF2B5EF4-FFF2-40B4-BE49-F238E27FC236}">
+                <a16:creationId xmlns:a16="http://schemas.microsoft.com/office/drawing/2014/main" id="{75CD358D-6DF2-477E-A1F8-398C6EEC7FC6}"/>
+              </a:ext>
+            </a:extLst>
+          </p:cNvPr>
+          <p:cNvSpPr>
+            <a:spLocks xmlns:a="http://schemas.openxmlformats.org/drawingml/2006/main" noGrp="1"/>
+          </p:cNvSpPr>
+          <p:nvPr/>
+        </p:nvSpPr>
+        <p:spPr>
+          <a:xfrm xmlns:a="http://schemas.openxmlformats.org/drawingml/2006/main">
             <a:off x="812800" y="457200"/>
             <a:ext cx="457200" cy="38100"/>
           </a:xfrm>
-          <a:prstGeom prst="roundRect">
+          <a:prstGeom xmlns:a="http://schemas.openxmlformats.org/drawingml/2006/main" prst="roundRect">
             <a:avLst>
               <a:gd name="adj" fmla="val 50000"/>
             </a:avLst>
           </a:prstGeom>
-          <a:solidFill>
+          <a:solidFill xmlns:a="http://schemas.openxmlformats.org/drawingml/2006/main">
             <a:srgbClr val="0A5CA8"/>
           </a:solidFill>
-          <a:ln/>
-        </p:spPr>
-      </p:sp>
-      <p:sp>
-        <p:nvSpPr>
-          <p:cNvPr id="3" name="Text 1"/>
-          <p:cNvSpPr/>
-          <p:nvPr/>
-        </p:nvSpPr>
-        <p:spPr>
-          <a:xfrm>
+        </p:spPr>
+      </p:sp>
+      <p:sp>
+        <p:nvSpPr>
+          <p:cNvPr id="3" name="Text 1">
+            <a:extLst xmlns:a="http://schemas.openxmlformats.org/drawingml/2006/main">
+              <a:ext uri="{FF2B5EF4-FFF2-40B4-BE49-F238E27FC236}">
+                <a16:creationId xmlns:a16="http://schemas.microsoft.com/office/drawing/2014/main" id="{C6A0785D-E8E9-4FEF-BD53-A265518D859A}"/>
+              </a:ext>
+            </a:extLst>
+          </p:cNvPr>
+          <p:cNvSpPr>
+            <a:spLocks xmlns:a="http://schemas.openxmlformats.org/drawingml/2006/main" noGrp="1"/>
+          </p:cNvSpPr>
+          <p:nvPr/>
+        </p:nvSpPr>
+        <p:spPr>
+          <a:xfrm xmlns:a="http://schemas.openxmlformats.org/drawingml/2006/main">
             <a:off x="812800" y="711200"/>
             <a:ext cx="10883392" cy="238720"/>
           </a:xfrm>
-          <a:prstGeom prst="rect">
-            <a:avLst/>
-          </a:prstGeom>
-          <a:noFill/>
-          <a:ln/>
-        </p:spPr>
-        <p:txBody>
-          <a:bodyPr wrap="square" lIns="0" tIns="0" rIns="0" bIns="0" rtlCol="0" anchor="t">
-            <a:normAutofit/>
-          </a:bodyPr>
-          <a:lstStyle/>
-          <a:p>
-            <a:pPr algn="l" indent="0" marL="0">
+          <a:prstGeom xmlns:a="http://schemas.openxmlformats.org/drawingml/2006/main" prst="rect">
+            <a:avLst/>
+          </a:prstGeom>
+          <a:noFill xmlns:a="http://schemas.openxmlformats.org/drawingml/2006/main"/>
+        </p:spPr>
+        <p:txBody>
+          <a:bodyPr xmlns:a="http://schemas.openxmlformats.org/drawingml/2006/main" wrap="square" lIns="0" tIns="0" rIns="0" bIns="0" anchor="t">
+            <a:normAutofit/>
+          </a:bodyPr>
+          <a:lstStyle xmlns:a="http://schemas.openxmlformats.org/drawingml/2006/main"/>
+          <a:p xmlns:a="http://schemas.openxmlformats.org/drawingml/2006/main">
+            <a:pPr marL="0" indent="0" algn="l">
               <a:lnSpc>
                 <a:spcPts val="1680"/>
               </a:lnSpc>
               <a:buNone/>
             </a:pPr>
             <a:r>
-              <a:rPr lang="en-US" sz="1200" spc="100" kern="0" dirty="0">
+              <a:rPr sz="1200" spc="100">
                 <a:solidFill>
                   <a:srgbClr val="0A5CA8"/>
                 </a:solidFill>
-                <a:latin typeface="IBM Plex Mono" pitchFamily="49" charset="0"/>
-                <a:ea typeface="IBM Plex Mono" pitchFamily="49" charset="-122"/>
-                <a:cs typeface="IBM Plex Mono" pitchFamily="49" charset="-120"/>
+                <a:latin typeface="IBM Plex Mono"/>
+                <a:ea typeface="IBM Plex Mono"/>
+                <a:cs typeface="IBM Plex Mono"/>
               </a:rPr>
               <a:t>02 · ОЦЕЊИВАЊЕ</a:t>
             </a:r>
-            <a:endParaRPr lang="en-US" sz="1200" dirty="0"/>
-          </a:p>
-        </p:txBody>
-      </p:sp>
-      <p:sp>
-        <p:nvSpPr>
-          <p:cNvPr id="4" name="Text 2"/>
-          <p:cNvSpPr/>
+            <a:endParaRPr sz="1200"/>
+          </a:p>
+        </p:txBody>
+      </p:sp>
+      <p:sp>
+        <p:nvSpPr>
+          <p:cNvPr id="4" name="Text 2">
+            <a:extLst xmlns:a="http://schemas.openxmlformats.org/drawingml/2006/main">
+              <a:ext uri="{FF2B5EF4-FFF2-40B4-BE49-F238E27FC236}">
+                <a16:creationId xmlns:a16="http://schemas.microsoft.com/office/drawing/2014/main" id="{93FB578E-CA2B-4807-9847-053F8667D448}"/>
+              </a:ext>
+            </a:extLst>
+          </p:cNvPr>
+          <p:cNvSpPr>
+            <a:spLocks xmlns:a="http://schemas.openxmlformats.org/drawingml/2006/main" noGrp="1"/>
+          </p:cNvSpPr>
           <p:nvPr>
-            <p:ph type="title"/>
+            <p:ph type="title" idx="0"/>
           </p:nvPr>
         </p:nvSpPr>
         <p:spPr>
-          <a:xfrm>
+          <a:xfrm xmlns:a="http://schemas.openxmlformats.org/drawingml/2006/main">
             <a:off x="812800" y="1000720"/>
             <a:ext cx="10883392" cy="444500"/>
           </a:xfrm>
-          <a:prstGeom prst="rect">
-            <a:avLst/>
-          </a:prstGeom>
-          <a:noFill/>
-          <a:ln/>
-        </p:spPr>
-        <p:txBody>
-          <a:bodyPr wrap="square" lIns="0" tIns="0" rIns="0" bIns="0" rtlCol="0" anchor="t">
-            <a:normAutofit/>
-          </a:bodyPr>
-          <a:lstStyle/>
-          <a:p>
-            <a:pPr algn="l" indent="0" marL="0">
+          <a:prstGeom xmlns:a="http://schemas.openxmlformats.org/drawingml/2006/main" prst="rect">
+            <a:avLst/>
+          </a:prstGeom>
+          <a:noFill xmlns:a="http://schemas.openxmlformats.org/drawingml/2006/main"/>
+        </p:spPr>
+        <p:txBody>
+          <a:bodyPr xmlns:a="http://schemas.openxmlformats.org/drawingml/2006/main" wrap="square" lIns="0" tIns="0" rIns="0" bIns="0" anchor="t">
+            <a:normAutofit/>
+          </a:bodyPr>
+          <a:lstStyle xmlns:a="http://schemas.openxmlformats.org/drawingml/2006/main"/>
+          <a:p xmlns:a="http://schemas.openxmlformats.org/drawingml/2006/main">
+            <a:pPr marL="0" indent="0" algn="l">
               <a:lnSpc>
                 <a:spcPts val="3300"/>
               </a:lnSpc>
               <a:buNone/>
             </a:pPr>
             <a:r>
-              <a:rPr lang="en-US" sz="3000" b="1" i="0" spc="-50" kern="0" dirty="0">
+              <a:rPr sz="3000" b="1" i="0" spc="-50">
                 <a:solidFill>
                   <a:srgbClr val="13202D"/>
                 </a:solidFill>
-                <a:latin typeface="IBM Plex Sans" pitchFamily="34" charset="0"/>
-                <a:ea typeface="IBM Plex Sans" pitchFamily="34" charset="-122"/>
-                <a:cs typeface="IBM Plex Sans" pitchFamily="34" charset="-120"/>
+                <a:latin typeface="IBM Plex Sans"/>
+                <a:ea typeface="IBM Plex Sans"/>
+                <a:cs typeface="IBM Plex Sans"/>
               </a:rPr>
               <a:t>Пројектне обавезе и расподела поена</a:t>
             </a:r>
-            <a:endParaRPr lang="en-US" sz="3000" dirty="0"/>
-          </a:p>
-        </p:txBody>
-      </p:sp>
-      <p:sp>
-        <p:nvSpPr>
-          <p:cNvPr id="5" name="Text 3"/>
-          <p:cNvSpPr/>
-          <p:nvPr/>
-        </p:nvSpPr>
-        <p:spPr>
-          <a:xfrm>
+            <a:endParaRPr sz="3000"/>
+          </a:p>
+        </p:txBody>
+      </p:sp>
+      <p:sp>
+        <p:nvSpPr>
+          <p:cNvPr id="5" name="Text 3">
+            <a:extLst xmlns:a="http://schemas.openxmlformats.org/drawingml/2006/main">
+              <a:ext uri="{FF2B5EF4-FFF2-40B4-BE49-F238E27FC236}">
+                <a16:creationId xmlns:a16="http://schemas.microsoft.com/office/drawing/2014/main" id="{99D89944-03FA-4D20-8790-0E3320A4920B}"/>
+              </a:ext>
+            </a:extLst>
+          </p:cNvPr>
+          <p:cNvSpPr>
+            <a:spLocks xmlns:a="http://schemas.openxmlformats.org/drawingml/2006/main" noGrp="1"/>
+          </p:cNvSpPr>
+          <p:nvPr/>
+        </p:nvSpPr>
+        <p:spPr>
+          <a:xfrm xmlns:a="http://schemas.openxmlformats.org/drawingml/2006/main">
             <a:off x="838200" y="1623020"/>
             <a:ext cx="1874520" cy="238720"/>
           </a:xfrm>
-          <a:prstGeom prst="rect">
-            <a:avLst/>
-          </a:prstGeom>
-          <a:noFill/>
-          <a:ln/>
-        </p:spPr>
-        <p:txBody>
-          <a:bodyPr wrap="square" lIns="0" tIns="0" rIns="0" bIns="0" rtlCol="0" anchor="t">
-            <a:normAutofit/>
-          </a:bodyPr>
-          <a:lstStyle/>
-          <a:p>
-            <a:pPr algn="l" indent="0" marL="0">
+          <a:prstGeom xmlns:a="http://schemas.openxmlformats.org/drawingml/2006/main" prst="rect">
+            <a:avLst/>
+          </a:prstGeom>
+          <a:noFill xmlns:a="http://schemas.openxmlformats.org/drawingml/2006/main"/>
+        </p:spPr>
+        <p:txBody>
+          <a:bodyPr xmlns:a="http://schemas.openxmlformats.org/drawingml/2006/main" wrap="square" lIns="0" tIns="0" rIns="0" bIns="0" anchor="t">
+            <a:normAutofit/>
+          </a:bodyPr>
+          <a:lstStyle xmlns:a="http://schemas.openxmlformats.org/drawingml/2006/main"/>
+          <a:p xmlns:a="http://schemas.openxmlformats.org/drawingml/2006/main">
+            <a:pPr marL="0" indent="0" algn="l">
               <a:lnSpc>
                 <a:spcPts val="1680"/>
               </a:lnSpc>
               <a:buNone/>
             </a:pPr>
             <a:r>
-              <a:rPr lang="en-US" sz="1200" b="1" spc="100" kern="0" dirty="0">
+              <a:rPr sz="1200" b="1" spc="100">
                 <a:solidFill>
                   <a:srgbClr val="13202D"/>
                 </a:solidFill>
-                <a:latin typeface="IBM Plex Mono" pitchFamily="49" charset="0"/>
-                <a:ea typeface="IBM Plex Mono" pitchFamily="49" charset="-122"/>
-                <a:cs typeface="IBM Plex Mono" pitchFamily="49" charset="-120"/>
+                <a:latin typeface="IBM Plex Mono"/>
+                <a:ea typeface="IBM Plex Mono"/>
+                <a:cs typeface="IBM Plex Mono"/>
               </a:rPr>
               <a:t>ОСНОВНЕ ОБАВЕЗЕ</a:t>
             </a:r>
-            <a:endParaRPr lang="en-US" sz="1200" dirty="0"/>
-          </a:p>
-        </p:txBody>
-      </p:sp>
-      <p:sp>
-        <p:nvSpPr>
-          <p:cNvPr id="6" name="Text 4"/>
-          <p:cNvSpPr/>
-          <p:nvPr/>
-        </p:nvSpPr>
-        <p:spPr>
-          <a:xfrm>
+            <a:endParaRPr sz="1200"/>
+          </a:p>
+        </p:txBody>
+      </p:sp>
+      <p:sp>
+        <p:nvSpPr>
+          <p:cNvPr id="6" name="Text 4">
+            <a:extLst xmlns:a="http://schemas.openxmlformats.org/drawingml/2006/main">
+              <a:ext uri="{FF2B5EF4-FFF2-40B4-BE49-F238E27FC236}">
+                <a16:creationId xmlns:a16="http://schemas.microsoft.com/office/drawing/2014/main" id="{4542B768-8AD1-4504-9C2A-C1AF42FD6F4C}"/>
+              </a:ext>
+            </a:extLst>
+          </p:cNvPr>
+          <p:cNvSpPr>
+            <a:spLocks xmlns:a="http://schemas.openxmlformats.org/drawingml/2006/main" noGrp="1"/>
+          </p:cNvSpPr>
+          <p:nvPr/>
+        </p:nvSpPr>
+        <p:spPr>
+          <a:xfrm xmlns:a="http://schemas.openxmlformats.org/drawingml/2006/main">
             <a:off x="5040352" y="1623020"/>
             <a:ext cx="877848" cy="238720"/>
           </a:xfrm>
-          <a:prstGeom prst="rect">
-            <a:avLst/>
-          </a:prstGeom>
-          <a:noFill/>
-          <a:ln/>
-        </p:spPr>
-        <p:txBody>
-          <a:bodyPr wrap="square" lIns="0" tIns="0" rIns="0" bIns="0" rtlCol="0" anchor="t">
-            <a:normAutofit/>
-          </a:bodyPr>
-          <a:lstStyle/>
-          <a:p>
-            <a:pPr algn="r" indent="0" marL="0">
+          <a:prstGeom xmlns:a="http://schemas.openxmlformats.org/drawingml/2006/main" prst="rect">
+            <a:avLst/>
+          </a:prstGeom>
+          <a:noFill xmlns:a="http://schemas.openxmlformats.org/drawingml/2006/main"/>
+        </p:spPr>
+        <p:txBody>
+          <a:bodyPr xmlns:a="http://schemas.openxmlformats.org/drawingml/2006/main" wrap="square" lIns="0" tIns="0" rIns="0" bIns="0" anchor="t">
+            <a:normAutofit fontScale="100000"/>
+          </a:bodyPr>
+          <a:lstStyle xmlns:a="http://schemas.openxmlformats.org/drawingml/2006/main"/>
+          <a:p xmlns:a="http://schemas.openxmlformats.org/drawingml/2006/main">
+            <a:pPr marL="0" indent="0" algn="r">
               <a:lnSpc>
                 <a:spcPts val="1680"/>
               </a:lnSpc>
               <a:buNone/>
             </a:pPr>
             <a:r>
-              <a:rPr lang="en-US" sz="1200" dirty="0">
+              <a:rPr sz="1200">
                 <a:solidFill>
                   <a:srgbClr val="5E6975"/>
                 </a:solidFill>
-                <a:latin typeface="IBM Plex Mono" pitchFamily="49" charset="0"/>
-                <a:ea typeface="IBM Plex Mono" pitchFamily="49" charset="-122"/>
-                <a:cs typeface="IBM Plex Mono" pitchFamily="49" charset="-120"/>
-              </a:rPr>
-              <a:t>37 поена</a:t>
-            </a:r>
-            <a:endParaRPr lang="en-US" sz="1200" dirty="0"/>
-          </a:p>
-        </p:txBody>
-      </p:sp>
-      <p:sp>
-        <p:nvSpPr>
-          <p:cNvPr id="7" name="Shape 5"/>
-          <p:cNvSpPr/>
-          <p:nvPr/>
-        </p:nvSpPr>
-        <p:spPr>
-          <a:xfrm>
+                <a:latin typeface="IBM Plex Mono"/>
+                <a:ea typeface="IBM Plex Mono"/>
+                <a:cs typeface="IBM Plex Mono"/>
+              </a:rPr>
+              <a:t>41 поен</a:t>
+            </a:r>
+            <a:endParaRPr sz="1200"/>
+          </a:p>
+        </p:txBody>
+      </p:sp>
+      <p:sp>
+        <p:nvSpPr>
+          <p:cNvPr id="7" name="Shape 5">
+            <a:extLst xmlns:a="http://schemas.openxmlformats.org/drawingml/2006/main">
+              <a:ext uri="{FF2B5EF4-FFF2-40B4-BE49-F238E27FC236}">
+                <a16:creationId xmlns:a16="http://schemas.microsoft.com/office/drawing/2014/main" id="{F9CB1DAC-930F-4A28-B429-593D7ED1DFA4}"/>
+              </a:ext>
+            </a:extLst>
+          </p:cNvPr>
+          <p:cNvSpPr>
+            <a:spLocks xmlns:a="http://schemas.openxmlformats.org/drawingml/2006/main" noGrp="1"/>
+          </p:cNvSpPr>
+          <p:nvPr/>
+        </p:nvSpPr>
+        <p:spPr>
+          <a:xfrm xmlns:a="http://schemas.openxmlformats.org/drawingml/2006/main">
             <a:off x="815975" y="1941116"/>
             <a:ext cx="5124450" cy="468610"/>
           </a:xfrm>
-          <a:prstGeom prst="roundRect">
+          <a:prstGeom xmlns:a="http://schemas.openxmlformats.org/drawingml/2006/main" prst="roundRect">
             <a:avLst>
               <a:gd name="adj" fmla="val 15583"/>
             </a:avLst>
           </a:prstGeom>
-          <a:solidFill>
+          <a:solidFill xmlns:a="http://schemas.openxmlformats.org/drawingml/2006/main">
             <a:srgbClr val="FCFCFB"/>
           </a:solidFill>
-          <a:ln w="6350">
+          <a:ln xmlns:a="http://schemas.openxmlformats.org/drawingml/2006/main" w="6350">
             <a:solidFill>
               <a:srgbClr val="D3DAE1"/>
             </a:solidFill>
@@ -9618,112 +9622,134 @@
       </p:sp>
       <p:sp>
         <p:nvSpPr>
-          <p:cNvPr id="8" name="Text 6"/>
-          <p:cNvSpPr/>
-          <p:nvPr/>
-        </p:nvSpPr>
-        <p:spPr>
-          <a:xfrm>
+          <p:cNvPr id="8" name="Text 6">
+            <a:extLst xmlns:a="http://schemas.openxmlformats.org/drawingml/2006/main">
+              <a:ext uri="{FF2B5EF4-FFF2-40B4-BE49-F238E27FC236}">
+                <a16:creationId xmlns:a16="http://schemas.microsoft.com/office/drawing/2014/main" id="{0B849309-8D8F-42E8-B3C5-8B06588FC1CC}"/>
+              </a:ext>
+            </a:extLst>
+          </p:cNvPr>
+          <p:cNvSpPr>
+            <a:spLocks xmlns:a="http://schemas.openxmlformats.org/drawingml/2006/main" noGrp="1"/>
+          </p:cNvSpPr>
+          <p:nvPr/>
+        </p:nvSpPr>
+        <p:spPr>
+          <a:xfrm xmlns:a="http://schemas.openxmlformats.org/drawingml/2006/main">
             <a:off x="971550" y="2068116"/>
             <a:ext cx="4447540" cy="240010"/>
           </a:xfrm>
-          <a:prstGeom prst="rect">
-            <a:avLst/>
-          </a:prstGeom>
-          <a:noFill/>
-          <a:ln/>
-        </p:spPr>
-        <p:txBody>
-          <a:bodyPr wrap="square" lIns="0" tIns="0" rIns="0" bIns="0" rtlCol="0" anchor="t">
-            <a:normAutofit/>
-          </a:bodyPr>
-          <a:lstStyle/>
-          <a:p>
-            <a:pPr algn="l" indent="0" marL="0">
+          <a:prstGeom xmlns:a="http://schemas.openxmlformats.org/drawingml/2006/main" prst="rect">
+            <a:avLst/>
+          </a:prstGeom>
+          <a:noFill xmlns:a="http://schemas.openxmlformats.org/drawingml/2006/main"/>
+        </p:spPr>
+        <p:txBody>
+          <a:bodyPr xmlns:a="http://schemas.openxmlformats.org/drawingml/2006/main" wrap="square" lIns="0" tIns="0" rIns="0" bIns="0" anchor="t">
+            <a:normAutofit/>
+          </a:bodyPr>
+          <a:lstStyle xmlns:a="http://schemas.openxmlformats.org/drawingml/2006/main"/>
+          <a:p xmlns:a="http://schemas.openxmlformats.org/drawingml/2006/main">
+            <a:pPr marL="0" indent="0" algn="l">
               <a:lnSpc>
                 <a:spcPts val="1690"/>
               </a:lnSpc>
               <a:buNone/>
             </a:pPr>
             <a:r>
-              <a:rPr lang="en-US" sz="1300" dirty="0">
+              <a:rPr sz="1300">
                 <a:solidFill>
                   <a:srgbClr val="13202D"/>
                 </a:solidFill>
-                <a:latin typeface="IBM Plex Sans" pitchFamily="34" charset="0"/>
-                <a:ea typeface="IBM Plex Sans" pitchFamily="34" charset="-122"/>
-                <a:cs typeface="IBM Plex Sans" pitchFamily="34" charset="-120"/>
+                <a:latin typeface="IBM Plex Sans"/>
+                <a:ea typeface="IBM Plex Sans"/>
+                <a:cs typeface="IBM Plex Sans"/>
               </a:rPr>
               <a:t>Tapiz Boards, Agile и Scrum</a:t>
             </a:r>
-            <a:endParaRPr lang="en-US" sz="1300" dirty="0"/>
-          </a:p>
-        </p:txBody>
-      </p:sp>
-      <p:sp>
-        <p:nvSpPr>
-          <p:cNvPr id="9" name="Text 7"/>
-          <p:cNvSpPr/>
-          <p:nvPr/>
-        </p:nvSpPr>
-        <p:spPr>
-          <a:xfrm>
+            <a:endParaRPr sz="1300"/>
+          </a:p>
+        </p:txBody>
+      </p:sp>
+      <p:sp>
+        <p:nvSpPr>
+          <p:cNvPr id="9" name="Text 7">
+            <a:extLst xmlns:a="http://schemas.openxmlformats.org/drawingml/2006/main">
+              <a:ext uri="{FF2B5EF4-FFF2-40B4-BE49-F238E27FC236}">
+                <a16:creationId xmlns:a16="http://schemas.microsoft.com/office/drawing/2014/main" id="{B31DC19B-9B6D-4657-94A9-84C2B7B513B3}"/>
+              </a:ext>
+            </a:extLst>
+          </p:cNvPr>
+          <p:cNvSpPr>
+            <a:spLocks xmlns:a="http://schemas.openxmlformats.org/drawingml/2006/main" noGrp="1"/>
+          </p:cNvSpPr>
+          <p:nvPr/>
+        </p:nvSpPr>
+        <p:spPr>
+          <a:xfrm xmlns:a="http://schemas.openxmlformats.org/drawingml/2006/main">
             <a:off x="5353050" y="2033191"/>
             <a:ext cx="431800" cy="309860"/>
           </a:xfrm>
-          <a:prstGeom prst="rect">
-            <a:avLst/>
-          </a:prstGeom>
-          <a:noFill/>
-          <a:ln/>
-        </p:spPr>
-        <p:txBody>
-          <a:bodyPr wrap="square" lIns="0" tIns="0" rIns="0" bIns="0" rtlCol="0" anchor="t">
-            <a:normAutofit/>
-          </a:bodyPr>
-          <a:lstStyle/>
-          <a:p>
-            <a:pPr algn="r" indent="0" marL="0">
+          <a:prstGeom xmlns:a="http://schemas.openxmlformats.org/drawingml/2006/main" prst="rect">
+            <a:avLst/>
+          </a:prstGeom>
+          <a:noFill xmlns:a="http://schemas.openxmlformats.org/drawingml/2006/main"/>
+        </p:spPr>
+        <p:txBody>
+          <a:bodyPr xmlns:a="http://schemas.openxmlformats.org/drawingml/2006/main" wrap="square" lIns="0" tIns="0" rIns="0" bIns="0" anchor="t">
+            <a:normAutofit/>
+          </a:bodyPr>
+          <a:lstStyle xmlns:a="http://schemas.openxmlformats.org/drawingml/2006/main"/>
+          <a:p xmlns:a="http://schemas.openxmlformats.org/drawingml/2006/main">
+            <a:pPr marL="0" indent="0" algn="r">
               <a:lnSpc>
                 <a:spcPts val="2240"/>
               </a:lnSpc>
               <a:buNone/>
             </a:pPr>
             <a:r>
-              <a:rPr lang="en-US" sz="1600" b="1" dirty="0">
+              <a:rPr sz="1600" b="1">
                 <a:solidFill>
                   <a:srgbClr val="0A5CA8"/>
                 </a:solidFill>
-                <a:latin typeface="IBM Plex Mono" pitchFamily="49" charset="0"/>
-                <a:ea typeface="IBM Plex Mono" pitchFamily="49" charset="-122"/>
-                <a:cs typeface="IBM Plex Mono" pitchFamily="49" charset="-120"/>
+                <a:latin typeface="IBM Plex Mono"/>
+                <a:ea typeface="IBM Plex Mono"/>
+                <a:cs typeface="IBM Plex Mono"/>
               </a:rPr>
               <a:t>10</a:t>
             </a:r>
-            <a:endParaRPr lang="en-US" sz="1600" dirty="0"/>
-          </a:p>
-        </p:txBody>
-      </p:sp>
-      <p:sp>
-        <p:nvSpPr>
-          <p:cNvPr id="10" name="Shape 8"/>
-          <p:cNvSpPr/>
-          <p:nvPr/>
-        </p:nvSpPr>
-        <p:spPr>
-          <a:xfrm>
-            <a:off x="815975" y="2479576"/>
+            <a:endParaRPr sz="1600"/>
+          </a:p>
+        </p:txBody>
+      </p:sp>
+      <p:sp>
+        <p:nvSpPr>
+          <p:cNvPr id="14" name="Shape 12">
+            <a:extLst xmlns:a="http://schemas.openxmlformats.org/drawingml/2006/main">
+              <a:ext uri="{FF2B5EF4-FFF2-40B4-BE49-F238E27FC236}">
+                <a16:creationId xmlns:a16="http://schemas.microsoft.com/office/drawing/2014/main" id="{891E13DF-1356-4818-8754-A02D210F56B9}"/>
+              </a:ext>
+            </a:extLst>
+          </p:cNvPr>
+          <p:cNvSpPr>
+            <a:spLocks xmlns:a="http://schemas.openxmlformats.org/drawingml/2006/main" noGrp="1"/>
+          </p:cNvSpPr>
+          <p:nvPr/>
+        </p:nvSpPr>
+        <p:spPr>
+          <a:xfrm xmlns:a="http://schemas.openxmlformats.org/drawingml/2006/main">
+            <a:off x="815975" y="2479588"/>
             <a:ext cx="5124450" cy="468610"/>
           </a:xfrm>
-          <a:prstGeom prst="roundRect">
+          <a:prstGeom xmlns:a="http://schemas.openxmlformats.org/drawingml/2006/main" prst="roundRect">
             <a:avLst>
               <a:gd name="adj" fmla="val 15583"/>
             </a:avLst>
           </a:prstGeom>
-          <a:solidFill>
+          <a:solidFill xmlns:a="http://schemas.openxmlformats.org/drawingml/2006/main">
             <a:srgbClr val="FCFCFB"/>
           </a:solidFill>
-          <a:ln w="6350">
+          <a:ln xmlns:a="http://schemas.openxmlformats.org/drawingml/2006/main" w="6350">
             <a:solidFill>
               <a:srgbClr val="D3DAE1"/>
             </a:solidFill>
@@ -9733,160 +9759,134 @@
       </p:sp>
       <p:sp>
         <p:nvSpPr>
-          <p:cNvPr id="11" name="Text 9"/>
-          <p:cNvSpPr/>
-          <p:nvPr/>
-        </p:nvSpPr>
-        <p:spPr>
-          <a:xfrm>
-            <a:off x="971550" y="2594471"/>
-            <a:ext cx="401340" cy="238720"/>
-          </a:xfrm>
-          <a:prstGeom prst="roundRect">
-            <a:avLst>
-              <a:gd name="adj" fmla="val 15960"/>
-            </a:avLst>
-          </a:prstGeom>
-          <a:solidFill>
-            <a:srgbClr val="FBF1E6"/>
-          </a:solidFill>
-          <a:ln/>
-        </p:spPr>
-        <p:txBody>
-          <a:bodyPr wrap="none" lIns="0" tIns="0" rIns="0" bIns="0" rtlCol="0" anchor="ctr">
-            <a:normAutofit/>
-          </a:bodyPr>
-          <a:lstStyle/>
-          <a:p>
-            <a:pPr algn="ctr" indent="0" marL="0">
-              <a:lnSpc>
-                <a:spcPts val="1680"/>
-              </a:lnSpc>
-              <a:buNone/>
-            </a:pPr>
-            <a:r>
-              <a:rPr lang="en-US" sz="1200" b="1" dirty="0">
-                <a:solidFill>
-                  <a:srgbClr val="A8520A"/>
-                </a:solidFill>
-                <a:latin typeface="IBM Plex Mono" pitchFamily="49" charset="0"/>
-                <a:ea typeface="IBM Plex Mono" pitchFamily="49" charset="-122"/>
-                <a:cs typeface="IBM Plex Mono" pitchFamily="49" charset="-120"/>
-              </a:rPr>
-              <a:t>КТ1</a:t>
-            </a:r>
-            <a:endParaRPr lang="en-US" sz="1200" dirty="0"/>
-          </a:p>
-        </p:txBody>
-      </p:sp>
-      <p:sp>
-        <p:nvSpPr>
-          <p:cNvPr id="12" name="Text 10"/>
-          <p:cNvSpPr/>
-          <p:nvPr/>
-        </p:nvSpPr>
-        <p:spPr>
-          <a:xfrm>
-            <a:off x="1487190" y="2606576"/>
-            <a:ext cx="3916431" cy="240010"/>
-          </a:xfrm>
-          <a:prstGeom prst="rect">
-            <a:avLst/>
-          </a:prstGeom>
-          <a:noFill/>
-          <a:ln/>
-        </p:spPr>
-        <p:txBody>
-          <a:bodyPr wrap="square" lIns="0" tIns="0" rIns="0" bIns="0" rtlCol="0" anchor="t">
-            <a:normAutofit/>
-          </a:bodyPr>
-          <a:lstStyle/>
-          <a:p>
-            <a:pPr algn="l" indent="0" marL="0">
+          <p:cNvPr id="15" name="Text 13">
+            <a:extLst xmlns:a="http://schemas.openxmlformats.org/drawingml/2006/main">
+              <a:ext uri="{FF2B5EF4-FFF2-40B4-BE49-F238E27FC236}">
+                <a16:creationId xmlns:a16="http://schemas.microsoft.com/office/drawing/2014/main" id="{C65DE9D6-2282-4EAF-986E-EBDC772C8DEC}"/>
+              </a:ext>
+            </a:extLst>
+          </p:cNvPr>
+          <p:cNvSpPr>
+            <a:spLocks xmlns:a="http://schemas.openxmlformats.org/drawingml/2006/main" noGrp="1"/>
+          </p:cNvSpPr>
+          <p:nvPr/>
+        </p:nvSpPr>
+        <p:spPr>
+          <a:xfrm xmlns:a="http://schemas.openxmlformats.org/drawingml/2006/main">
+            <a:off x="971550" y="2606588"/>
+            <a:ext cx="4447540" cy="240010"/>
+          </a:xfrm>
+          <a:prstGeom xmlns:a="http://schemas.openxmlformats.org/drawingml/2006/main" prst="rect">
+            <a:avLst/>
+          </a:prstGeom>
+          <a:noFill xmlns:a="http://schemas.openxmlformats.org/drawingml/2006/main"/>
+        </p:spPr>
+        <p:txBody>
+          <a:bodyPr xmlns:a="http://schemas.openxmlformats.org/drawingml/2006/main" wrap="square" lIns="0" tIns="0" rIns="0" bIns="0" anchor="t">
+            <a:normAutofit fontScale="100000"/>
+          </a:bodyPr>
+          <a:lstStyle xmlns:a="http://schemas.openxmlformats.org/drawingml/2006/main"/>
+          <a:p xmlns:a="http://schemas.openxmlformats.org/drawingml/2006/main">
+            <a:pPr marL="0" indent="0" algn="l">
               <a:lnSpc>
                 <a:spcPts val="1690"/>
               </a:lnSpc>
               <a:buNone/>
             </a:pPr>
             <a:r>
-              <a:rPr lang="en-US" sz="1300" dirty="0">
+              <a:rPr sz="1300">
                 <a:solidFill>
                   <a:srgbClr val="13202D"/>
                 </a:solidFill>
-                <a:latin typeface="IBM Plex Sans" pitchFamily="34" charset="0"/>
-                <a:ea typeface="IBM Plex Sans" pitchFamily="34" charset="-122"/>
-                <a:cs typeface="IBM Plex Sans" pitchFamily="34" charset="-120"/>
-              </a:rPr>
-              <a:t>Проблем, backlog и развојни ток</a:t>
-            </a:r>
-            <a:endParaRPr lang="en-US" sz="1300" dirty="0"/>
-          </a:p>
-        </p:txBody>
-      </p:sp>
-      <p:sp>
-        <p:nvSpPr>
-          <p:cNvPr id="13" name="Text 11"/>
-          <p:cNvSpPr/>
-          <p:nvPr/>
-        </p:nvSpPr>
-        <p:spPr>
-          <a:xfrm>
-            <a:off x="5353050" y="2571651"/>
+                <a:latin typeface="IBM Plex Sans"/>
+                <a:ea typeface="IBM Plex Sans"/>
+                <a:cs typeface="IBM Plex Sans"/>
+              </a:rPr>
+              <a:t>SOLID принципи и Clean Architecture</a:t>
+            </a:r>
+            <a:endParaRPr sz="1300"/>
+          </a:p>
+        </p:txBody>
+      </p:sp>
+      <p:sp>
+        <p:nvSpPr>
+          <p:cNvPr id="16" name="Text 14">
+            <a:extLst xmlns:a="http://schemas.openxmlformats.org/drawingml/2006/main">
+              <a:ext uri="{FF2B5EF4-FFF2-40B4-BE49-F238E27FC236}">
+                <a16:creationId xmlns:a16="http://schemas.microsoft.com/office/drawing/2014/main" id="{068643A2-D3AA-4787-92D3-A2BBE025C9AB}"/>
+              </a:ext>
+            </a:extLst>
+          </p:cNvPr>
+          <p:cNvSpPr>
+            <a:spLocks xmlns:a="http://schemas.openxmlformats.org/drawingml/2006/main" noGrp="1"/>
+          </p:cNvSpPr>
+          <p:nvPr/>
+        </p:nvSpPr>
+        <p:spPr>
+          <a:xfrm xmlns:a="http://schemas.openxmlformats.org/drawingml/2006/main">
+            <a:off x="5353050" y="2571663"/>
             <a:ext cx="431800" cy="309860"/>
           </a:xfrm>
-          <a:prstGeom prst="rect">
-            <a:avLst/>
-          </a:prstGeom>
-          <a:noFill/>
-          <a:ln/>
-        </p:spPr>
-        <p:txBody>
-          <a:bodyPr wrap="square" lIns="0" tIns="0" rIns="0" bIns="0" rtlCol="0" anchor="t">
-            <a:normAutofit/>
-          </a:bodyPr>
-          <a:lstStyle/>
-          <a:p>
-            <a:pPr algn="r" indent="0" marL="0">
+          <a:prstGeom xmlns:a="http://schemas.openxmlformats.org/drawingml/2006/main" prst="rect">
+            <a:avLst/>
+          </a:prstGeom>
+          <a:noFill xmlns:a="http://schemas.openxmlformats.org/drawingml/2006/main"/>
+        </p:spPr>
+        <p:txBody>
+          <a:bodyPr xmlns:a="http://schemas.openxmlformats.org/drawingml/2006/main" wrap="square" lIns="0" tIns="0" rIns="0" bIns="0" anchor="t">
+            <a:normAutofit fontScale="100000"/>
+          </a:bodyPr>
+          <a:lstStyle xmlns:a="http://schemas.openxmlformats.org/drawingml/2006/main"/>
+          <a:p xmlns:a="http://schemas.openxmlformats.org/drawingml/2006/main">
+            <a:pPr marL="0" indent="0" algn="r">
               <a:lnSpc>
                 <a:spcPts val="2240"/>
               </a:lnSpc>
               <a:buNone/>
             </a:pPr>
             <a:r>
-              <a:rPr lang="en-US" sz="1600" b="1" dirty="0">
+              <a:rPr sz="1600" b="1">
                 <a:solidFill>
                   <a:srgbClr val="0A5CA8"/>
                 </a:solidFill>
-                <a:latin typeface="IBM Plex Mono" pitchFamily="49" charset="0"/>
-                <a:ea typeface="IBM Plex Mono" pitchFamily="49" charset="-122"/>
-                <a:cs typeface="IBM Plex Mono" pitchFamily="49" charset="-120"/>
-              </a:rPr>
-              <a:t>3</a:t>
-            </a:r>
-            <a:endParaRPr lang="en-US" sz="1600" dirty="0"/>
-          </a:p>
-        </p:txBody>
-      </p:sp>
-      <p:sp>
-        <p:nvSpPr>
-          <p:cNvPr id="14" name="Shape 12"/>
-          <p:cNvSpPr/>
-          <p:nvPr/>
-        </p:nvSpPr>
-        <p:spPr>
-          <a:xfrm>
-            <a:off x="815975" y="3018036"/>
+                <a:latin typeface="IBM Plex Mono"/>
+                <a:ea typeface="IBM Plex Mono"/>
+                <a:cs typeface="IBM Plex Mono"/>
+              </a:rPr>
+              <a:t>16</a:t>
+            </a:r>
+            <a:endParaRPr sz="1600"/>
+          </a:p>
+        </p:txBody>
+      </p:sp>
+      <p:sp>
+        <p:nvSpPr>
+          <p:cNvPr id="17" name="Shape 15">
+            <a:extLst xmlns:a="http://schemas.openxmlformats.org/drawingml/2006/main">
+              <a:ext uri="{FF2B5EF4-FFF2-40B4-BE49-F238E27FC236}">
+                <a16:creationId xmlns:a16="http://schemas.microsoft.com/office/drawing/2014/main" id="{922F5EDF-892F-41A1-94A2-824781283027}"/>
+              </a:ext>
+            </a:extLst>
+          </p:cNvPr>
+          <p:cNvSpPr>
+            <a:spLocks xmlns:a="http://schemas.openxmlformats.org/drawingml/2006/main" noGrp="1"/>
+          </p:cNvSpPr>
+          <p:nvPr/>
+        </p:nvSpPr>
+        <p:spPr>
+          <a:xfrm xmlns:a="http://schemas.openxmlformats.org/drawingml/2006/main">
+            <a:off x="815975" y="3556496"/>
             <a:ext cx="5124450" cy="468610"/>
           </a:xfrm>
-          <a:prstGeom prst="roundRect">
+          <a:prstGeom xmlns:a="http://schemas.openxmlformats.org/drawingml/2006/main" prst="roundRect">
             <a:avLst>
               <a:gd name="adj" fmla="val 15583"/>
             </a:avLst>
           </a:prstGeom>
-          <a:solidFill>
+          <a:solidFill xmlns:a="http://schemas.openxmlformats.org/drawingml/2006/main">
             <a:srgbClr val="FCFCFB"/>
           </a:solidFill>
-          <a:ln w="6350">
+          <a:ln xmlns:a="http://schemas.openxmlformats.org/drawingml/2006/main" w="6350">
             <a:solidFill>
               <a:srgbClr val="D3DAE1"/>
             </a:solidFill>
@@ -9896,112 +9896,189 @@
       </p:sp>
       <p:sp>
         <p:nvSpPr>
-          <p:cNvPr id="15" name="Text 13"/>
-          <p:cNvSpPr/>
-          <p:nvPr/>
-        </p:nvSpPr>
-        <p:spPr>
-          <a:xfrm>
-            <a:off x="971550" y="3145036"/>
-            <a:ext cx="4447540" cy="240010"/>
-          </a:xfrm>
-          <a:prstGeom prst="rect">
-            <a:avLst/>
-          </a:prstGeom>
-          <a:noFill/>
-          <a:ln/>
-        </p:spPr>
-        <p:txBody>
-          <a:bodyPr wrap="square" lIns="0" tIns="0" rIns="0" bIns="0" rtlCol="0" anchor="t">
-            <a:normAutofit/>
-          </a:bodyPr>
-          <a:lstStyle/>
-          <a:p>
-            <a:pPr algn="l" indent="0" marL="0">
+          <p:cNvPr id="18" name="Text 16">
+            <a:extLst xmlns:a="http://schemas.openxmlformats.org/drawingml/2006/main">
+              <a:ext uri="{FF2B5EF4-FFF2-40B4-BE49-F238E27FC236}">
+                <a16:creationId xmlns:a16="http://schemas.microsoft.com/office/drawing/2014/main" id="{F049D23A-239F-40D5-B541-6D66512CB23E}"/>
+              </a:ext>
+            </a:extLst>
+          </p:cNvPr>
+          <p:cNvSpPr>
+            <a:spLocks xmlns:a="http://schemas.openxmlformats.org/drawingml/2006/main" noGrp="1"/>
+          </p:cNvSpPr>
+          <p:nvPr/>
+        </p:nvSpPr>
+        <p:spPr>
+          <a:xfrm xmlns:a="http://schemas.openxmlformats.org/drawingml/2006/main">
+            <a:off x="971550" y="3671391"/>
+            <a:ext cx="401340" cy="238720"/>
+          </a:xfrm>
+          <a:prstGeom xmlns:a="http://schemas.openxmlformats.org/drawingml/2006/main" prst="roundRect">
+            <a:avLst>
+              <a:gd name="adj" fmla="val 15960"/>
+            </a:avLst>
+          </a:prstGeom>
+          <a:solidFill xmlns:a="http://schemas.openxmlformats.org/drawingml/2006/main">
+            <a:srgbClr val="FBF1E6"/>
+          </a:solidFill>
+        </p:spPr>
+        <p:txBody>
+          <a:bodyPr xmlns:a="http://schemas.openxmlformats.org/drawingml/2006/main" wrap="none" lIns="0" tIns="0" rIns="0" bIns="0" anchor="ctr">
+            <a:normAutofit fontScale="100000"/>
+          </a:bodyPr>
+          <a:lstStyle xmlns:a="http://schemas.openxmlformats.org/drawingml/2006/main"/>
+          <a:p xmlns:a="http://schemas.openxmlformats.org/drawingml/2006/main">
+            <a:pPr marL="0" indent="0" algn="ctr">
+              <a:lnSpc>
+                <a:spcPts val="1680"/>
+              </a:lnSpc>
+              <a:buNone/>
+            </a:pPr>
+            <a:r>
+              <a:rPr sz="1200" b="1">
+                <a:solidFill>
+                  <a:srgbClr val="A8520A"/>
+                </a:solidFill>
+                <a:latin typeface="IBM Plex Mono"/>
+                <a:ea typeface="IBM Plex Mono"/>
+                <a:cs typeface="IBM Plex Mono"/>
+              </a:rPr>
+              <a:t>КТ1</a:t>
+            </a:r>
+            <a:endParaRPr sz="1200"/>
+          </a:p>
+        </p:txBody>
+      </p:sp>
+      <p:sp>
+        <p:nvSpPr>
+          <p:cNvPr id="19" name="Text 17">
+            <a:extLst xmlns:a="http://schemas.openxmlformats.org/drawingml/2006/main">
+              <a:ext uri="{FF2B5EF4-FFF2-40B4-BE49-F238E27FC236}">
+                <a16:creationId xmlns:a16="http://schemas.microsoft.com/office/drawing/2014/main" id="{01B17CED-5FA0-4127-BC1D-896664996A87}"/>
+              </a:ext>
+            </a:extLst>
+          </p:cNvPr>
+          <p:cNvSpPr>
+            <a:spLocks xmlns:a="http://schemas.openxmlformats.org/drawingml/2006/main" noGrp="1"/>
+          </p:cNvSpPr>
+          <p:nvPr/>
+        </p:nvSpPr>
+        <p:spPr>
+          <a:xfrm xmlns:a="http://schemas.openxmlformats.org/drawingml/2006/main">
+            <a:off x="1487190" y="3683496"/>
+            <a:ext cx="3916431" cy="240010"/>
+          </a:xfrm>
+          <a:prstGeom xmlns:a="http://schemas.openxmlformats.org/drawingml/2006/main" prst="rect">
+            <a:avLst/>
+          </a:prstGeom>
+          <a:noFill xmlns:a="http://schemas.openxmlformats.org/drawingml/2006/main"/>
+        </p:spPr>
+        <p:txBody>
+          <a:bodyPr xmlns:a="http://schemas.openxmlformats.org/drawingml/2006/main" wrap="square" lIns="0" tIns="0" rIns="0" bIns="0" anchor="t">
+            <a:normAutofit fontScale="100000"/>
+          </a:bodyPr>
+          <a:lstStyle xmlns:a="http://schemas.openxmlformats.org/drawingml/2006/main"/>
+          <a:p xmlns:a="http://schemas.openxmlformats.org/drawingml/2006/main">
+            <a:pPr marL="0" indent="0" algn="l">
               <a:lnSpc>
                 <a:spcPts val="1690"/>
               </a:lnSpc>
               <a:buNone/>
             </a:pPr>
             <a:r>
-              <a:rPr lang="en-US" sz="1300" dirty="0">
+              <a:rPr sz="1300">
                 <a:solidFill>
                   <a:srgbClr val="13202D"/>
                 </a:solidFill>
-                <a:latin typeface="IBM Plex Sans" pitchFamily="34" charset="0"/>
-                <a:ea typeface="IBM Plex Sans" pitchFamily="34" charset="-122"/>
-                <a:cs typeface="IBM Plex Sans" pitchFamily="34" charset="-120"/>
-              </a:rPr>
-              <a:t>SOLID принципи и Clean Architecture</a:t>
-            </a:r>
-            <a:endParaRPr lang="en-US" sz="1300" dirty="0"/>
-          </a:p>
-        </p:txBody>
-      </p:sp>
-      <p:sp>
-        <p:nvSpPr>
-          <p:cNvPr id="16" name="Text 14"/>
-          <p:cNvSpPr/>
-          <p:nvPr/>
-        </p:nvSpPr>
-        <p:spPr>
-          <a:xfrm>
-            <a:off x="5353050" y="3110111"/>
+                <a:latin typeface="IBM Plex Sans"/>
+                <a:ea typeface="IBM Plex Sans"/>
+                <a:cs typeface="IBM Plex Sans"/>
+              </a:rPr>
+              <a:t>Основна имплементација · 4. вежба</a:t>
+            </a:r>
+            <a:endParaRPr sz="1300"/>
+          </a:p>
+        </p:txBody>
+      </p:sp>
+      <p:sp>
+        <p:nvSpPr>
+          <p:cNvPr id="20" name="Text 18">
+            <a:extLst xmlns:a="http://schemas.openxmlformats.org/drawingml/2006/main">
+              <a:ext uri="{FF2B5EF4-FFF2-40B4-BE49-F238E27FC236}">
+                <a16:creationId xmlns:a16="http://schemas.microsoft.com/office/drawing/2014/main" id="{A90DB6C1-5B92-4296-BA66-56D822A7450B}"/>
+              </a:ext>
+            </a:extLst>
+          </p:cNvPr>
+          <p:cNvSpPr>
+            <a:spLocks xmlns:a="http://schemas.openxmlformats.org/drawingml/2006/main" noGrp="1"/>
+          </p:cNvSpPr>
+          <p:nvPr/>
+        </p:nvSpPr>
+        <p:spPr>
+          <a:xfrm xmlns:a="http://schemas.openxmlformats.org/drawingml/2006/main">
+            <a:off x="5353050" y="3648571"/>
             <a:ext cx="431800" cy="309860"/>
           </a:xfrm>
-          <a:prstGeom prst="rect">
-            <a:avLst/>
-          </a:prstGeom>
-          <a:noFill/>
-          <a:ln/>
-        </p:spPr>
-        <p:txBody>
-          <a:bodyPr wrap="square" lIns="0" tIns="0" rIns="0" bIns="0" rtlCol="0" anchor="t">
-            <a:normAutofit/>
-          </a:bodyPr>
-          <a:lstStyle/>
-          <a:p>
-            <a:pPr algn="r" indent="0" marL="0">
+          <a:prstGeom xmlns:a="http://schemas.openxmlformats.org/drawingml/2006/main" prst="rect">
+            <a:avLst/>
+          </a:prstGeom>
+          <a:noFill xmlns:a="http://schemas.openxmlformats.org/drawingml/2006/main"/>
+        </p:spPr>
+        <p:txBody>
+          <a:bodyPr xmlns:a="http://schemas.openxmlformats.org/drawingml/2006/main" wrap="square" lIns="0" tIns="0" rIns="0" bIns="0" anchor="t">
+            <a:normAutofit fontScale="100000"/>
+          </a:bodyPr>
+          <a:lstStyle xmlns:a="http://schemas.openxmlformats.org/drawingml/2006/main"/>
+          <a:p xmlns:a="http://schemas.openxmlformats.org/drawingml/2006/main">
+            <a:pPr marL="0" indent="0" algn="r">
               <a:lnSpc>
                 <a:spcPts val="2240"/>
               </a:lnSpc>
               <a:buNone/>
             </a:pPr>
             <a:r>
-              <a:rPr lang="en-US" sz="1600" b="1" dirty="0">
+              <a:rPr sz="1600" b="1">
                 <a:solidFill>
                   <a:srgbClr val="0A5CA8"/>
                 </a:solidFill>
-                <a:latin typeface="IBM Plex Mono" pitchFamily="49" charset="0"/>
-                <a:ea typeface="IBM Plex Mono" pitchFamily="49" charset="-122"/>
-                <a:cs typeface="IBM Plex Mono" pitchFamily="49" charset="-120"/>
-              </a:rPr>
-              <a:t>16</a:t>
-            </a:r>
-            <a:endParaRPr lang="en-US" sz="1600" dirty="0"/>
-          </a:p>
-        </p:txBody>
-      </p:sp>
-      <p:sp>
-        <p:nvSpPr>
-          <p:cNvPr id="17" name="Shape 15"/>
-          <p:cNvSpPr/>
-          <p:nvPr/>
-        </p:nvSpPr>
-        <p:spPr>
-          <a:xfrm>
-            <a:off x="815975" y="3556496"/>
+                <a:latin typeface="IBM Plex Mono"/>
+                <a:ea typeface="IBM Plex Mono"/>
+                <a:cs typeface="IBM Plex Mono"/>
+              </a:rPr>
+              <a:t>10</a:t>
+            </a:r>
+            <a:endParaRPr sz="1600"/>
+          </a:p>
+        </p:txBody>
+      </p:sp>
+      <p:sp>
+        <p:nvSpPr>
+          <p:cNvPr id="21" name="Shape 19">
+            <a:extLst xmlns:a="http://schemas.openxmlformats.org/drawingml/2006/main">
+              <a:ext uri="{FF2B5EF4-FFF2-40B4-BE49-F238E27FC236}">
+                <a16:creationId xmlns:a16="http://schemas.microsoft.com/office/drawing/2014/main" id="{4CFDD64F-7271-4A63-9FB9-C0452135E814}"/>
+              </a:ext>
+            </a:extLst>
+          </p:cNvPr>
+          <p:cNvSpPr>
+            <a:spLocks xmlns:a="http://schemas.openxmlformats.org/drawingml/2006/main" noGrp="1"/>
+          </p:cNvSpPr>
+          <p:nvPr/>
+        </p:nvSpPr>
+        <p:spPr>
+          <a:xfrm xmlns:a="http://schemas.openxmlformats.org/drawingml/2006/main">
+            <a:off x="815975" y="3017964"/>
             <a:ext cx="5124450" cy="468610"/>
           </a:xfrm>
-          <a:prstGeom prst="roundRect">
+          <a:prstGeom xmlns:a="http://schemas.openxmlformats.org/drawingml/2006/main" prst="roundRect">
             <a:avLst>
               <a:gd name="adj" fmla="val 15583"/>
             </a:avLst>
           </a:prstGeom>
-          <a:solidFill>
+          <a:solidFill xmlns:a="http://schemas.openxmlformats.org/drawingml/2006/main">
             <a:srgbClr val="FCFCFB"/>
           </a:solidFill>
-          <a:ln w="6350">
+          <a:ln xmlns:a="http://schemas.openxmlformats.org/drawingml/2006/main" w="6350">
             <a:solidFill>
               <a:srgbClr val="D3DAE1"/>
             </a:solidFill>
@@ -10011,160 +10088,236 @@
       </p:sp>
       <p:sp>
         <p:nvSpPr>
-          <p:cNvPr id="18" name="Text 16"/>
-          <p:cNvSpPr/>
-          <p:nvPr/>
-        </p:nvSpPr>
-        <p:spPr>
-          <a:xfrm>
-            <a:off x="971550" y="3671391"/>
-            <a:ext cx="401340" cy="238720"/>
-          </a:xfrm>
-          <a:prstGeom prst="roundRect">
-            <a:avLst>
-              <a:gd name="adj" fmla="val 15960"/>
-            </a:avLst>
-          </a:prstGeom>
-          <a:solidFill>
-            <a:srgbClr val="FBF1E6"/>
-          </a:solidFill>
-          <a:ln/>
-        </p:spPr>
-        <p:txBody>
-          <a:bodyPr wrap="none" lIns="0" tIns="0" rIns="0" bIns="0" rtlCol="0" anchor="ctr">
-            <a:normAutofit/>
-          </a:bodyPr>
-          <a:lstStyle/>
-          <a:p>
-            <a:pPr algn="ctr" indent="0" marL="0">
+          <p:cNvPr id="22" name="Text 20">
+            <a:extLst xmlns:a="http://schemas.openxmlformats.org/drawingml/2006/main">
+              <a:ext uri="{FF2B5EF4-FFF2-40B4-BE49-F238E27FC236}">
+                <a16:creationId xmlns:a16="http://schemas.microsoft.com/office/drawing/2014/main" id="{84675BC0-451F-4596-8BD7-5D70BEEF0B42}"/>
+              </a:ext>
+            </a:extLst>
+          </p:cNvPr>
+          <p:cNvSpPr>
+            <a:spLocks xmlns:a="http://schemas.openxmlformats.org/drawingml/2006/main" noGrp="1"/>
+          </p:cNvSpPr>
+          <p:nvPr/>
+        </p:nvSpPr>
+        <p:spPr>
+          <a:xfrm xmlns:a="http://schemas.openxmlformats.org/drawingml/2006/main">
+            <a:off x="971550" y="3144964"/>
+            <a:ext cx="4447540" cy="240010"/>
+          </a:xfrm>
+          <a:prstGeom xmlns:a="http://schemas.openxmlformats.org/drawingml/2006/main" prst="rect">
+            <a:avLst/>
+          </a:prstGeom>
+          <a:noFill xmlns:a="http://schemas.openxmlformats.org/drawingml/2006/main"/>
+        </p:spPr>
+        <p:txBody>
+          <a:bodyPr xmlns:a="http://schemas.openxmlformats.org/drawingml/2006/main" wrap="square" lIns="0" tIns="0" rIns="0" bIns="0" anchor="t">
+            <a:normAutofit fontScale="100000"/>
+          </a:bodyPr>
+          <a:lstStyle xmlns:a="http://schemas.openxmlformats.org/drawingml/2006/main"/>
+          <a:p xmlns:a="http://schemas.openxmlformats.org/drawingml/2006/main">
+            <a:pPr marL="0" indent="0" algn="l">
+              <a:lnSpc>
+                <a:spcPts val="1690"/>
+              </a:lnSpc>
+              <a:buNone/>
+            </a:pPr>
+            <a:r>
+              <a:rPr sz="1300">
+                <a:solidFill>
+                  <a:srgbClr val="13202D"/>
+                </a:solidFill>
+                <a:latin typeface="IBM Plex Sans"/>
+                <a:ea typeface="IBM Plex Sans"/>
+                <a:cs typeface="IBM Plex Sans"/>
+              </a:rPr>
+              <a:t>Пословна логика и аутоматизовано тестирање</a:t>
+            </a:r>
+            <a:endParaRPr sz="1300"/>
+          </a:p>
+        </p:txBody>
+      </p:sp>
+      <p:sp>
+        <p:nvSpPr>
+          <p:cNvPr id="23" name="Text 21">
+            <a:extLst xmlns:a="http://schemas.openxmlformats.org/drawingml/2006/main">
+              <a:ext uri="{FF2B5EF4-FFF2-40B4-BE49-F238E27FC236}">
+                <a16:creationId xmlns:a16="http://schemas.microsoft.com/office/drawing/2014/main" id="{B6CB62F3-BF0E-4655-B804-4F76033693B0}"/>
+              </a:ext>
+            </a:extLst>
+          </p:cNvPr>
+          <p:cNvSpPr>
+            <a:spLocks xmlns:a="http://schemas.openxmlformats.org/drawingml/2006/main" noGrp="1"/>
+          </p:cNvSpPr>
+          <p:nvPr/>
+        </p:nvSpPr>
+        <p:spPr>
+          <a:xfrm xmlns:a="http://schemas.openxmlformats.org/drawingml/2006/main">
+            <a:off x="5353050" y="3110039"/>
+            <a:ext cx="431800" cy="309860"/>
+          </a:xfrm>
+          <a:prstGeom xmlns:a="http://schemas.openxmlformats.org/drawingml/2006/main" prst="rect">
+            <a:avLst/>
+          </a:prstGeom>
+          <a:noFill xmlns:a="http://schemas.openxmlformats.org/drawingml/2006/main"/>
+        </p:spPr>
+        <p:txBody>
+          <a:bodyPr xmlns:a="http://schemas.openxmlformats.org/drawingml/2006/main" wrap="square" lIns="0" tIns="0" rIns="0" bIns="0" anchor="t">
+            <a:normAutofit fontScale="100000"/>
+          </a:bodyPr>
+          <a:lstStyle xmlns:a="http://schemas.openxmlformats.org/drawingml/2006/main"/>
+          <a:p xmlns:a="http://schemas.openxmlformats.org/drawingml/2006/main">
+            <a:pPr marL="0" indent="0" algn="r">
+              <a:lnSpc>
+                <a:spcPts val="2240"/>
+              </a:lnSpc>
+              <a:buNone/>
+            </a:pPr>
+            <a:r>
+              <a:rPr sz="1600" b="1">
+                <a:solidFill>
+                  <a:srgbClr val="0A5CA8"/>
+                </a:solidFill>
+                <a:latin typeface="IBM Plex Mono"/>
+                <a:ea typeface="IBM Plex Mono"/>
+                <a:cs typeface="IBM Plex Mono"/>
+              </a:rPr>
+              <a:t>5</a:t>
+            </a:r>
+            <a:endParaRPr sz="1600"/>
+          </a:p>
+        </p:txBody>
+      </p:sp>
+      <p:sp>
+        <p:nvSpPr>
+          <p:cNvPr id="24" name="Text 22">
+            <a:extLst xmlns:a="http://schemas.openxmlformats.org/drawingml/2006/main">
+              <a:ext uri="{FF2B5EF4-FFF2-40B4-BE49-F238E27FC236}">
+                <a16:creationId xmlns:a16="http://schemas.microsoft.com/office/drawing/2014/main" id="{2E96E830-4858-4388-945A-187347A6C010}"/>
+              </a:ext>
+            </a:extLst>
+          </p:cNvPr>
+          <p:cNvSpPr>
+            <a:spLocks xmlns:a="http://schemas.openxmlformats.org/drawingml/2006/main" noGrp="1"/>
+          </p:cNvSpPr>
+          <p:nvPr/>
+        </p:nvSpPr>
+        <p:spPr>
+          <a:xfrm xmlns:a="http://schemas.openxmlformats.org/drawingml/2006/main">
+            <a:off x="6273800" y="1623020"/>
+            <a:ext cx="2624376" cy="238720"/>
+          </a:xfrm>
+          <a:prstGeom xmlns:a="http://schemas.openxmlformats.org/drawingml/2006/main" prst="rect">
+            <a:avLst/>
+          </a:prstGeom>
+          <a:noFill xmlns:a="http://schemas.openxmlformats.org/drawingml/2006/main"/>
+        </p:spPr>
+        <p:txBody>
+          <a:bodyPr xmlns:a="http://schemas.openxmlformats.org/drawingml/2006/main" wrap="square" lIns="0" tIns="0" rIns="0" bIns="0" anchor="t">
+            <a:normAutofit/>
+          </a:bodyPr>
+          <a:lstStyle xmlns:a="http://schemas.openxmlformats.org/drawingml/2006/main"/>
+          <a:p xmlns:a="http://schemas.openxmlformats.org/drawingml/2006/main">
+            <a:pPr marL="0" indent="0" algn="l">
               <a:lnSpc>
                 <a:spcPts val="1680"/>
               </a:lnSpc>
               <a:buNone/>
             </a:pPr>
             <a:r>
-              <a:rPr lang="en-US" sz="1200" b="1" dirty="0">
-                <a:solidFill>
-                  <a:srgbClr val="A8520A"/>
-                </a:solidFill>
-                <a:latin typeface="IBM Plex Mono" pitchFamily="49" charset="0"/>
-                <a:ea typeface="IBM Plex Mono" pitchFamily="49" charset="-122"/>
-                <a:cs typeface="IBM Plex Mono" pitchFamily="49" charset="-120"/>
-              </a:rPr>
-              <a:t>КТ2</a:t>
-            </a:r>
-            <a:endParaRPr lang="en-US" sz="1200" dirty="0"/>
-          </a:p>
-        </p:txBody>
-      </p:sp>
-      <p:sp>
-        <p:nvSpPr>
-          <p:cNvPr id="19" name="Text 17"/>
-          <p:cNvSpPr/>
-          <p:nvPr/>
-        </p:nvSpPr>
-        <p:spPr>
-          <a:xfrm>
-            <a:off x="1487190" y="3683496"/>
-            <a:ext cx="3916431" cy="240010"/>
-          </a:xfrm>
-          <a:prstGeom prst="rect">
-            <a:avLst/>
-          </a:prstGeom>
-          <a:noFill/>
-          <a:ln/>
-        </p:spPr>
-        <p:txBody>
-          <a:bodyPr wrap="square" lIns="0" tIns="0" rIns="0" bIns="0" rtlCol="0" anchor="t">
-            <a:normAutofit/>
-          </a:bodyPr>
-          <a:lstStyle/>
-          <a:p>
-            <a:pPr algn="l" indent="0" marL="0">
-              <a:lnSpc>
-                <a:spcPts val="1690"/>
-              </a:lnSpc>
-              <a:buNone/>
-            </a:pPr>
-            <a:r>
-              <a:rPr lang="en-US" sz="1300" dirty="0">
+              <a:rPr sz="1200" b="1" spc="100">
                 <a:solidFill>
                   <a:srgbClr val="13202D"/>
                 </a:solidFill>
-                <a:latin typeface="IBM Plex Sans" pitchFamily="34" charset="0"/>
-                <a:ea typeface="IBM Plex Sans" pitchFamily="34" charset="-122"/>
-                <a:cs typeface="IBM Plex Sans" pitchFamily="34" charset="-120"/>
-              </a:rPr>
-              <a:t>Архитектура и функционално језгро</a:t>
-            </a:r>
-            <a:endParaRPr lang="en-US" sz="1300" dirty="0"/>
-          </a:p>
-        </p:txBody>
-      </p:sp>
-      <p:sp>
-        <p:nvSpPr>
-          <p:cNvPr id="20" name="Text 18"/>
-          <p:cNvSpPr/>
-          <p:nvPr/>
-        </p:nvSpPr>
-        <p:spPr>
-          <a:xfrm>
-            <a:off x="5353050" y="3648571"/>
-            <a:ext cx="431800" cy="309860"/>
-          </a:xfrm>
-          <a:prstGeom prst="rect">
-            <a:avLst/>
-          </a:prstGeom>
-          <a:noFill/>
-          <a:ln/>
-        </p:spPr>
-        <p:txBody>
-          <a:bodyPr wrap="square" lIns="0" tIns="0" rIns="0" bIns="0" rtlCol="0" anchor="t">
-            <a:normAutofit/>
-          </a:bodyPr>
-          <a:lstStyle/>
-          <a:p>
-            <a:pPr algn="r" indent="0" marL="0">
-              <a:lnSpc>
-                <a:spcPts val="2240"/>
-              </a:lnSpc>
-              <a:buNone/>
-            </a:pPr>
-            <a:r>
-              <a:rPr lang="en-US" sz="1600" b="1" dirty="0">
-                <a:solidFill>
-                  <a:srgbClr val="0A5CA8"/>
-                </a:solidFill>
-                <a:latin typeface="IBM Plex Mono" pitchFamily="49" charset="0"/>
-                <a:ea typeface="IBM Plex Mono" pitchFamily="49" charset="-122"/>
-                <a:cs typeface="IBM Plex Mono" pitchFamily="49" charset="-120"/>
-              </a:rPr>
-              <a:t>3</a:t>
-            </a:r>
-            <a:endParaRPr lang="en-US" sz="1600" dirty="0"/>
-          </a:p>
-        </p:txBody>
-      </p:sp>
-      <p:sp>
-        <p:nvSpPr>
-          <p:cNvPr id="21" name="Shape 19"/>
-          <p:cNvSpPr/>
-          <p:nvPr/>
-        </p:nvSpPr>
-        <p:spPr>
-          <a:xfrm>
-            <a:off x="815975" y="4094956"/>
+                <a:latin typeface="IBM Plex Mono"/>
+                <a:ea typeface="IBM Plex Mono"/>
+                <a:cs typeface="IBM Plex Mono"/>
+              </a:rPr>
+              <a:t>ПРОВЕРЕ И ИНТЕГРАЦИЈА</a:t>
+            </a:r>
+            <a:endParaRPr sz="1200"/>
+          </a:p>
+        </p:txBody>
+      </p:sp>
+      <p:sp>
+        <p:nvSpPr>
+          <p:cNvPr id="25" name="Text 23">
+            <a:extLst xmlns:a="http://schemas.openxmlformats.org/drawingml/2006/main">
+              <a:ext uri="{FF2B5EF4-FFF2-40B4-BE49-F238E27FC236}">
+                <a16:creationId xmlns:a16="http://schemas.microsoft.com/office/drawing/2014/main" id="{ED77F10C-1D42-49CE-90FF-FFF946449AB2}"/>
+              </a:ext>
+            </a:extLst>
+          </p:cNvPr>
+          <p:cNvSpPr>
+            <a:spLocks xmlns:a="http://schemas.openxmlformats.org/drawingml/2006/main" noGrp="1"/>
+          </p:cNvSpPr>
+          <p:nvPr/>
+        </p:nvSpPr>
+        <p:spPr>
+          <a:xfrm xmlns:a="http://schemas.openxmlformats.org/drawingml/2006/main">
+            <a:off x="10475952" y="1623020"/>
+            <a:ext cx="877848" cy="238720"/>
+          </a:xfrm>
+          <a:prstGeom xmlns:a="http://schemas.openxmlformats.org/drawingml/2006/main" prst="rect">
+            <a:avLst/>
+          </a:prstGeom>
+          <a:noFill xmlns:a="http://schemas.openxmlformats.org/drawingml/2006/main"/>
+        </p:spPr>
+        <p:txBody>
+          <a:bodyPr xmlns:a="http://schemas.openxmlformats.org/drawingml/2006/main" wrap="square" lIns="0" tIns="0" rIns="0" bIns="0" anchor="t">
+            <a:normAutofit fontScale="100000"/>
+          </a:bodyPr>
+          <a:lstStyle xmlns:a="http://schemas.openxmlformats.org/drawingml/2006/main"/>
+          <a:p xmlns:a="http://schemas.openxmlformats.org/drawingml/2006/main">
+            <a:pPr marL="0" indent="0" algn="r">
+              <a:lnSpc>
+                <a:spcPts val="1680"/>
+              </a:lnSpc>
+              <a:buNone/>
+            </a:pPr>
+            <a:r>
+              <a:rPr sz="1200">
+                <a:solidFill>
+                  <a:srgbClr val="5E6975"/>
+                </a:solidFill>
+                <a:latin typeface="IBM Plex Mono"/>
+                <a:ea typeface="IBM Plex Mono"/>
+                <a:cs typeface="IBM Plex Mono"/>
+              </a:rPr>
+              <a:t>30 поена</a:t>
+            </a:r>
+            <a:endParaRPr sz="1200"/>
+          </a:p>
+        </p:txBody>
+      </p:sp>
+      <p:sp>
+        <p:nvSpPr>
+          <p:cNvPr id="30" name="Shape 28">
+            <a:extLst xmlns:a="http://schemas.openxmlformats.org/drawingml/2006/main">
+              <a:ext uri="{FF2B5EF4-FFF2-40B4-BE49-F238E27FC236}">
+                <a16:creationId xmlns:a16="http://schemas.microsoft.com/office/drawing/2014/main" id="{ECA62934-DC98-484E-90C5-1235416C8047}"/>
+              </a:ext>
+            </a:extLst>
+          </p:cNvPr>
+          <p:cNvSpPr>
+            <a:spLocks xmlns:a="http://schemas.openxmlformats.org/drawingml/2006/main" noGrp="1"/>
+          </p:cNvSpPr>
+          <p:nvPr/>
+        </p:nvSpPr>
+        <p:spPr>
+          <a:xfrm xmlns:a="http://schemas.openxmlformats.org/drawingml/2006/main">
+            <a:off x="6251575" y="1941128"/>
             <a:ext cx="5124450" cy="468610"/>
           </a:xfrm>
-          <a:prstGeom prst="roundRect">
+          <a:prstGeom xmlns:a="http://schemas.openxmlformats.org/drawingml/2006/main" prst="roundRect">
             <a:avLst>
               <a:gd name="adj" fmla="val 15583"/>
             </a:avLst>
           </a:prstGeom>
-          <a:solidFill>
+          <a:solidFill xmlns:a="http://schemas.openxmlformats.org/drawingml/2006/main">
             <a:srgbClr val="FCFCFB"/>
           </a:solidFill>
-          <a:ln w="6350">
+          <a:ln xmlns:a="http://schemas.openxmlformats.org/drawingml/2006/main" w="6350">
             <a:solidFill>
               <a:srgbClr val="D3DAE1"/>
             </a:solidFill>
@@ -10174,200 +10327,134 @@
       </p:sp>
       <p:sp>
         <p:nvSpPr>
-          <p:cNvPr id="22" name="Text 20"/>
-          <p:cNvSpPr/>
-          <p:nvPr/>
-        </p:nvSpPr>
-        <p:spPr>
-          <a:xfrm>
-            <a:off x="971550" y="4221956"/>
+          <p:cNvPr id="31" name="Text 29">
+            <a:extLst xmlns:a="http://schemas.openxmlformats.org/drawingml/2006/main">
+              <a:ext uri="{FF2B5EF4-FFF2-40B4-BE49-F238E27FC236}">
+                <a16:creationId xmlns:a16="http://schemas.microsoft.com/office/drawing/2014/main" id="{42C6095D-D7B1-4011-9F46-D24EF97BE50E}"/>
+              </a:ext>
+            </a:extLst>
+          </p:cNvPr>
+          <p:cNvSpPr>
+            <a:spLocks xmlns:a="http://schemas.openxmlformats.org/drawingml/2006/main" noGrp="1"/>
+          </p:cNvSpPr>
+          <p:nvPr/>
+        </p:nvSpPr>
+        <p:spPr>
+          <a:xfrm xmlns:a="http://schemas.openxmlformats.org/drawingml/2006/main">
+            <a:off x="6407150" y="2068128"/>
             <a:ext cx="4447540" cy="240010"/>
           </a:xfrm>
-          <a:prstGeom prst="rect">
-            <a:avLst/>
-          </a:prstGeom>
-          <a:noFill/>
-          <a:ln/>
-        </p:spPr>
-        <p:txBody>
-          <a:bodyPr wrap="square" lIns="0" tIns="0" rIns="0" bIns="0" rtlCol="0" anchor="t">
-            <a:normAutofit/>
-          </a:bodyPr>
-          <a:lstStyle/>
-          <a:p>
-            <a:pPr algn="l" indent="0" marL="0">
+          <a:prstGeom xmlns:a="http://schemas.openxmlformats.org/drawingml/2006/main" prst="rect">
+            <a:avLst/>
+          </a:prstGeom>
+          <a:noFill xmlns:a="http://schemas.openxmlformats.org/drawingml/2006/main"/>
+        </p:spPr>
+        <p:txBody>
+          <a:bodyPr xmlns:a="http://schemas.openxmlformats.org/drawingml/2006/main" wrap="square" lIns="0" tIns="0" rIns="0" bIns="0" anchor="t">
+            <a:normAutofit fontScale="100000"/>
+          </a:bodyPr>
+          <a:lstStyle xmlns:a="http://schemas.openxmlformats.org/drawingml/2006/main"/>
+          <a:p xmlns:a="http://schemas.openxmlformats.org/drawingml/2006/main">
+            <a:pPr marL="0" indent="0" algn="l">
               <a:lnSpc>
                 <a:spcPts val="1690"/>
               </a:lnSpc>
               <a:buNone/>
             </a:pPr>
             <a:r>
-              <a:rPr lang="en-US" sz="1300" dirty="0">
+              <a:rPr sz="1300">
                 <a:solidFill>
                   <a:srgbClr val="13202D"/>
                 </a:solidFill>
-                <a:latin typeface="IBM Plex Sans" pitchFamily="34" charset="0"/>
-                <a:ea typeface="IBM Plex Sans" pitchFamily="34" charset="-122"/>
-                <a:cs typeface="IBM Plex Sans" pitchFamily="34" charset="-120"/>
-              </a:rPr>
-              <a:t>Пословна логика и аутоматизовано тестирање</a:t>
-            </a:r>
-            <a:endParaRPr lang="en-US" sz="1300" dirty="0"/>
-          </a:p>
-        </p:txBody>
-      </p:sp>
-      <p:sp>
-        <p:nvSpPr>
-          <p:cNvPr id="23" name="Text 21"/>
-          <p:cNvSpPr/>
-          <p:nvPr/>
-        </p:nvSpPr>
-        <p:spPr>
-          <a:xfrm>
-            <a:off x="5353050" y="4187031"/>
+                <a:latin typeface="IBM Plex Sans"/>
+                <a:ea typeface="IBM Plex Sans"/>
+                <a:cs typeface="IBM Plex Sans"/>
+              </a:rPr>
+              <a:t>Интероперабилност и усклађеност уговорних страна</a:t>
+            </a:r>
+            <a:endParaRPr sz="1300"/>
+          </a:p>
+        </p:txBody>
+      </p:sp>
+      <p:sp>
+        <p:nvSpPr>
+          <p:cNvPr id="32" name="Text 30">
+            <a:extLst xmlns:a="http://schemas.openxmlformats.org/drawingml/2006/main">
+              <a:ext uri="{FF2B5EF4-FFF2-40B4-BE49-F238E27FC236}">
+                <a16:creationId xmlns:a16="http://schemas.microsoft.com/office/drawing/2014/main" id="{11B8AF77-3B8F-4B08-A8B0-25F32973766C}"/>
+              </a:ext>
+            </a:extLst>
+          </p:cNvPr>
+          <p:cNvSpPr>
+            <a:spLocks xmlns:a="http://schemas.openxmlformats.org/drawingml/2006/main" noGrp="1"/>
+          </p:cNvSpPr>
+          <p:nvPr/>
+        </p:nvSpPr>
+        <p:spPr>
+          <a:xfrm xmlns:a="http://schemas.openxmlformats.org/drawingml/2006/main">
+            <a:off x="10788650" y="2033203"/>
             <a:ext cx="431800" cy="309860"/>
           </a:xfrm>
-          <a:prstGeom prst="rect">
-            <a:avLst/>
-          </a:prstGeom>
-          <a:noFill/>
-          <a:ln/>
-        </p:spPr>
-        <p:txBody>
-          <a:bodyPr wrap="square" lIns="0" tIns="0" rIns="0" bIns="0" rtlCol="0" anchor="t">
-            <a:normAutofit/>
-          </a:bodyPr>
-          <a:lstStyle/>
-          <a:p>
-            <a:pPr algn="r" indent="0" marL="0">
+          <a:prstGeom xmlns:a="http://schemas.openxmlformats.org/drawingml/2006/main" prst="rect">
+            <a:avLst/>
+          </a:prstGeom>
+          <a:noFill xmlns:a="http://schemas.openxmlformats.org/drawingml/2006/main"/>
+        </p:spPr>
+        <p:txBody>
+          <a:bodyPr xmlns:a="http://schemas.openxmlformats.org/drawingml/2006/main" wrap="square" lIns="0" tIns="0" rIns="0" bIns="0" anchor="t">
+            <a:normAutofit fontScale="100000"/>
+          </a:bodyPr>
+          <a:lstStyle xmlns:a="http://schemas.openxmlformats.org/drawingml/2006/main"/>
+          <a:p xmlns:a="http://schemas.openxmlformats.org/drawingml/2006/main">
+            <a:pPr marL="0" indent="0" algn="r">
               <a:lnSpc>
                 <a:spcPts val="2240"/>
               </a:lnSpc>
               <a:buNone/>
             </a:pPr>
             <a:r>
-              <a:rPr lang="en-US" sz="1600" b="1" dirty="0">
+              <a:rPr sz="1600" b="1">
                 <a:solidFill>
                   <a:srgbClr val="0A5CA8"/>
                 </a:solidFill>
-                <a:latin typeface="IBM Plex Mono" pitchFamily="49" charset="0"/>
-                <a:ea typeface="IBM Plex Mono" pitchFamily="49" charset="-122"/>
-                <a:cs typeface="IBM Plex Mono" pitchFamily="49" charset="-120"/>
-              </a:rPr>
-              <a:t>5</a:t>
-            </a:r>
-            <a:endParaRPr lang="en-US" sz="1600" dirty="0"/>
-          </a:p>
-        </p:txBody>
-      </p:sp>
-      <p:sp>
-        <p:nvSpPr>
-          <p:cNvPr id="24" name="Text 22"/>
-          <p:cNvSpPr/>
-          <p:nvPr/>
-        </p:nvSpPr>
-        <p:spPr>
-          <a:xfrm>
-            <a:off x="6273800" y="1623020"/>
-            <a:ext cx="2624376" cy="238720"/>
-          </a:xfrm>
-          <a:prstGeom prst="rect">
-            <a:avLst/>
-          </a:prstGeom>
-          <a:noFill/>
-          <a:ln/>
-        </p:spPr>
-        <p:txBody>
-          <a:bodyPr wrap="square" lIns="0" tIns="0" rIns="0" bIns="0" rtlCol="0" anchor="t">
-            <a:normAutofit/>
-          </a:bodyPr>
-          <a:lstStyle/>
-          <a:p>
-            <a:pPr algn="l" indent="0" marL="0">
-              <a:lnSpc>
-                <a:spcPts val="1680"/>
-              </a:lnSpc>
-              <a:buNone/>
-            </a:pPr>
-            <a:r>
-              <a:rPr lang="en-US" sz="1200" b="1" spc="100" kern="0" dirty="0">
-                <a:solidFill>
-                  <a:srgbClr val="13202D"/>
-                </a:solidFill>
-                <a:latin typeface="IBM Plex Mono" pitchFamily="49" charset="0"/>
-                <a:ea typeface="IBM Plex Mono" pitchFamily="49" charset="-122"/>
-                <a:cs typeface="IBM Plex Mono" pitchFamily="49" charset="-120"/>
-              </a:rPr>
-              <a:t>ПРОВЕРЕ И ИНТЕГРАЦИЈА</a:t>
-            </a:r>
-            <a:endParaRPr lang="en-US" sz="1200" dirty="0"/>
-          </a:p>
-        </p:txBody>
-      </p:sp>
-      <p:sp>
-        <p:nvSpPr>
-          <p:cNvPr id="25" name="Text 23"/>
-          <p:cNvSpPr/>
-          <p:nvPr/>
-        </p:nvSpPr>
-        <p:spPr>
-          <a:xfrm>
-            <a:off x="10475952" y="1623020"/>
-            <a:ext cx="877848" cy="238720"/>
-          </a:xfrm>
-          <a:prstGeom prst="rect">
-            <a:avLst/>
-          </a:prstGeom>
-          <a:noFill/>
-          <a:ln/>
-        </p:spPr>
-        <p:txBody>
-          <a:bodyPr wrap="square" lIns="0" tIns="0" rIns="0" bIns="0" rtlCol="0" anchor="t">
-            <a:normAutofit/>
-          </a:bodyPr>
-          <a:lstStyle/>
-          <a:p>
-            <a:pPr algn="r" indent="0" marL="0">
-              <a:lnSpc>
-                <a:spcPts val="1680"/>
-              </a:lnSpc>
-              <a:buNone/>
-            </a:pPr>
-            <a:r>
-              <a:rPr lang="en-US" sz="1200" dirty="0">
-                <a:solidFill>
-                  <a:srgbClr val="5E6975"/>
-                </a:solidFill>
-                <a:latin typeface="IBM Plex Mono" pitchFamily="49" charset="0"/>
-                <a:ea typeface="IBM Plex Mono" pitchFamily="49" charset="-122"/>
-                <a:cs typeface="IBM Plex Mono" pitchFamily="49" charset="-120"/>
-              </a:rPr>
-              <a:t>34 поена</a:t>
-            </a:r>
-            <a:endParaRPr lang="en-US" sz="1200" dirty="0"/>
-          </a:p>
-        </p:txBody>
-      </p:sp>
-      <p:sp>
-        <p:nvSpPr>
-          <p:cNvPr id="26" name="Shape 24"/>
-          <p:cNvSpPr/>
-          <p:nvPr/>
-        </p:nvSpPr>
-        <p:spPr>
-          <a:xfrm>
-            <a:off x="6251575" y="1941116"/>
+                <a:latin typeface="IBM Plex Mono"/>
+                <a:ea typeface="IBM Plex Mono"/>
+                <a:cs typeface="IBM Plex Mono"/>
+              </a:rPr>
+              <a:t>10</a:t>
+            </a:r>
+            <a:endParaRPr sz="1600"/>
+          </a:p>
+        </p:txBody>
+      </p:sp>
+      <p:sp>
+        <p:nvSpPr>
+          <p:cNvPr id="33" name="Shape 31">
+            <a:extLst xmlns:a="http://schemas.openxmlformats.org/drawingml/2006/main">
+              <a:ext uri="{FF2B5EF4-FFF2-40B4-BE49-F238E27FC236}">
+                <a16:creationId xmlns:a16="http://schemas.microsoft.com/office/drawing/2014/main" id="{C2D19E19-704B-4903-9AEA-0A41660E11A1}"/>
+              </a:ext>
+            </a:extLst>
+          </p:cNvPr>
+          <p:cNvSpPr>
+            <a:spLocks xmlns:a="http://schemas.openxmlformats.org/drawingml/2006/main" noGrp="1"/>
+          </p:cNvSpPr>
+          <p:nvPr/>
+        </p:nvSpPr>
+        <p:spPr>
+          <a:xfrm xmlns:a="http://schemas.openxmlformats.org/drawingml/2006/main">
+            <a:off x="6251575" y="2479588"/>
             <a:ext cx="5124450" cy="468610"/>
           </a:xfrm>
-          <a:prstGeom prst="roundRect">
+          <a:prstGeom xmlns:a="http://schemas.openxmlformats.org/drawingml/2006/main" prst="roundRect">
             <a:avLst>
               <a:gd name="adj" fmla="val 15583"/>
             </a:avLst>
           </a:prstGeom>
-          <a:solidFill>
+          <a:solidFill xmlns:a="http://schemas.openxmlformats.org/drawingml/2006/main">
             <a:srgbClr val="FCFCFB"/>
           </a:solidFill>
-          <a:ln w="6350">
+          <a:ln xmlns:a="http://schemas.openxmlformats.org/drawingml/2006/main" w="6350">
             <a:solidFill>
               <a:srgbClr val="D3DAE1"/>
             </a:solidFill>
@@ -10377,160 +10464,134 @@
       </p:sp>
       <p:sp>
         <p:nvSpPr>
-          <p:cNvPr id="27" name="Text 25"/>
-          <p:cNvSpPr/>
-          <p:nvPr/>
-        </p:nvSpPr>
-        <p:spPr>
-          <a:xfrm>
-            <a:off x="6407150" y="2056011"/>
-            <a:ext cx="401340" cy="238720"/>
-          </a:xfrm>
-          <a:prstGeom prst="roundRect">
-            <a:avLst>
-              <a:gd name="adj" fmla="val 15960"/>
-            </a:avLst>
-          </a:prstGeom>
-          <a:solidFill>
-            <a:srgbClr val="FBF1E6"/>
-          </a:solidFill>
-          <a:ln/>
-        </p:spPr>
-        <p:txBody>
-          <a:bodyPr wrap="none" lIns="0" tIns="0" rIns="0" bIns="0" rtlCol="0" anchor="ctr">
-            <a:normAutofit/>
-          </a:bodyPr>
-          <a:lstStyle/>
-          <a:p>
-            <a:pPr algn="ctr" indent="0" marL="0">
-              <a:lnSpc>
-                <a:spcPts val="1680"/>
-              </a:lnSpc>
-              <a:buNone/>
-            </a:pPr>
-            <a:r>
-              <a:rPr lang="en-US" sz="1200" b="1" dirty="0">
-                <a:solidFill>
-                  <a:srgbClr val="A8520A"/>
-                </a:solidFill>
-                <a:latin typeface="IBM Plex Mono" pitchFamily="49" charset="0"/>
-                <a:ea typeface="IBM Plex Mono" pitchFamily="49" charset="-122"/>
-                <a:cs typeface="IBM Plex Mono" pitchFamily="49" charset="-120"/>
-              </a:rPr>
-              <a:t>КТ3</a:t>
-            </a:r>
-            <a:endParaRPr lang="en-US" sz="1200" dirty="0"/>
-          </a:p>
-        </p:txBody>
-      </p:sp>
-      <p:sp>
-        <p:nvSpPr>
-          <p:cNvPr id="28" name="Text 26"/>
-          <p:cNvSpPr/>
-          <p:nvPr/>
-        </p:nvSpPr>
-        <p:spPr>
-          <a:xfrm>
-            <a:off x="6922790" y="2068116"/>
-            <a:ext cx="3916431" cy="240010"/>
-          </a:xfrm>
-          <a:prstGeom prst="rect">
-            <a:avLst/>
-          </a:prstGeom>
-          <a:noFill/>
-          <a:ln/>
-        </p:spPr>
-        <p:txBody>
-          <a:bodyPr wrap="square" lIns="0" tIns="0" rIns="0" bIns="0" rtlCol="0" anchor="t">
-            <a:normAutofit/>
-          </a:bodyPr>
-          <a:lstStyle/>
-          <a:p>
-            <a:pPr algn="l" indent="0" marL="0">
+          <p:cNvPr id="34" name="Text 32">
+            <a:extLst xmlns:a="http://schemas.openxmlformats.org/drawingml/2006/main">
+              <a:ext uri="{FF2B5EF4-FFF2-40B4-BE49-F238E27FC236}">
+                <a16:creationId xmlns:a16="http://schemas.microsoft.com/office/drawing/2014/main" id="{12896409-CBEB-4C62-8EFB-EF60B9BBD2EE}"/>
+              </a:ext>
+            </a:extLst>
+          </p:cNvPr>
+          <p:cNvSpPr>
+            <a:spLocks xmlns:a="http://schemas.openxmlformats.org/drawingml/2006/main" noGrp="1"/>
+          </p:cNvSpPr>
+          <p:nvPr/>
+        </p:nvSpPr>
+        <p:spPr>
+          <a:xfrm xmlns:a="http://schemas.openxmlformats.org/drawingml/2006/main">
+            <a:off x="6407150" y="2606588"/>
+            <a:ext cx="4447540" cy="240010"/>
+          </a:xfrm>
+          <a:prstGeom xmlns:a="http://schemas.openxmlformats.org/drawingml/2006/main" prst="rect">
+            <a:avLst/>
+          </a:prstGeom>
+          <a:noFill xmlns:a="http://schemas.openxmlformats.org/drawingml/2006/main"/>
+        </p:spPr>
+        <p:txBody>
+          <a:bodyPr xmlns:a="http://schemas.openxmlformats.org/drawingml/2006/main" wrap="square" lIns="0" tIns="0" rIns="0" bIns="0" anchor="t">
+            <a:normAutofit fontScale="100000"/>
+          </a:bodyPr>
+          <a:lstStyle xmlns:a="http://schemas.openxmlformats.org/drawingml/2006/main"/>
+          <a:p xmlns:a="http://schemas.openxmlformats.org/drawingml/2006/main">
+            <a:pPr marL="0" indent="0" algn="l">
               <a:lnSpc>
                 <a:spcPts val="1690"/>
               </a:lnSpc>
               <a:buNone/>
             </a:pPr>
             <a:r>
-              <a:rPr lang="en-US" sz="1300" dirty="0">
+              <a:rPr sz="1300">
                 <a:solidFill>
                   <a:srgbClr val="13202D"/>
                 </a:solidFill>
-                <a:latin typeface="IBM Plex Sans" pitchFamily="34" charset="0"/>
-                <a:ea typeface="IBM Plex Sans" pitchFamily="34" charset="-122"/>
-                <a:cs typeface="IBM Plex Sans" pitchFamily="34" charset="-120"/>
-              </a:rPr>
-              <a:t>Тестирање и стабилна верзија функц. језгра</a:t>
-            </a:r>
-            <a:endParaRPr lang="en-US" sz="1300" dirty="0"/>
-          </a:p>
-        </p:txBody>
-      </p:sp>
-      <p:sp>
-        <p:nvSpPr>
-          <p:cNvPr id="29" name="Text 27"/>
-          <p:cNvSpPr/>
-          <p:nvPr/>
-        </p:nvSpPr>
-        <p:spPr>
-          <a:xfrm>
-            <a:off x="10788650" y="2033191"/>
+                <a:latin typeface="IBM Plex Sans"/>
+                <a:ea typeface="IBM Plex Sans"/>
+                <a:cs typeface="IBM Plex Sans"/>
+              </a:rPr>
+              <a:t>Правилна и контролисана употреба AI алата</a:t>
+            </a:r>
+            <a:endParaRPr sz="1300"/>
+          </a:p>
+        </p:txBody>
+      </p:sp>
+      <p:sp>
+        <p:nvSpPr>
+          <p:cNvPr id="35" name="Text 33">
+            <a:extLst xmlns:a="http://schemas.openxmlformats.org/drawingml/2006/main">
+              <a:ext uri="{FF2B5EF4-FFF2-40B4-BE49-F238E27FC236}">
+                <a16:creationId xmlns:a16="http://schemas.microsoft.com/office/drawing/2014/main" id="{9F9E9CFF-9C20-405A-943B-15046A7B80EF}"/>
+              </a:ext>
+            </a:extLst>
+          </p:cNvPr>
+          <p:cNvSpPr>
+            <a:spLocks xmlns:a="http://schemas.openxmlformats.org/drawingml/2006/main" noGrp="1"/>
+          </p:cNvSpPr>
+          <p:nvPr/>
+        </p:nvSpPr>
+        <p:spPr>
+          <a:xfrm xmlns:a="http://schemas.openxmlformats.org/drawingml/2006/main">
+            <a:off x="10788650" y="2571663"/>
             <a:ext cx="431800" cy="309860"/>
           </a:xfrm>
-          <a:prstGeom prst="rect">
-            <a:avLst/>
-          </a:prstGeom>
-          <a:noFill/>
-          <a:ln/>
-        </p:spPr>
-        <p:txBody>
-          <a:bodyPr wrap="square" lIns="0" tIns="0" rIns="0" bIns="0" rtlCol="0" anchor="t">
-            <a:normAutofit/>
-          </a:bodyPr>
-          <a:lstStyle/>
-          <a:p>
-            <a:pPr algn="r" indent="0" marL="0">
+          <a:prstGeom xmlns:a="http://schemas.openxmlformats.org/drawingml/2006/main" prst="rect">
+            <a:avLst/>
+          </a:prstGeom>
+          <a:noFill xmlns:a="http://schemas.openxmlformats.org/drawingml/2006/main"/>
+        </p:spPr>
+        <p:txBody>
+          <a:bodyPr xmlns:a="http://schemas.openxmlformats.org/drawingml/2006/main" wrap="square" lIns="0" tIns="0" rIns="0" bIns="0" anchor="t">
+            <a:normAutofit fontScale="100000"/>
+          </a:bodyPr>
+          <a:lstStyle xmlns:a="http://schemas.openxmlformats.org/drawingml/2006/main"/>
+          <a:p xmlns:a="http://schemas.openxmlformats.org/drawingml/2006/main">
+            <a:pPr marL="0" indent="0" algn="r">
               <a:lnSpc>
                 <a:spcPts val="2240"/>
               </a:lnSpc>
               <a:buNone/>
             </a:pPr>
             <a:r>
-              <a:rPr lang="en-US" sz="1600" b="1" dirty="0">
+              <a:rPr sz="1600" b="1">
                 <a:solidFill>
                   <a:srgbClr val="0A5CA8"/>
                 </a:solidFill>
-                <a:latin typeface="IBM Plex Mono" pitchFamily="49" charset="0"/>
-                <a:ea typeface="IBM Plex Mono" pitchFamily="49" charset="-122"/>
-                <a:cs typeface="IBM Plex Mono" pitchFamily="49" charset="-120"/>
-              </a:rPr>
-              <a:t>6</a:t>
-            </a:r>
-            <a:endParaRPr lang="en-US" sz="1600" dirty="0"/>
-          </a:p>
-        </p:txBody>
-      </p:sp>
-      <p:sp>
-        <p:nvSpPr>
-          <p:cNvPr id="30" name="Shape 28"/>
-          <p:cNvSpPr/>
-          <p:nvPr/>
-        </p:nvSpPr>
-        <p:spPr>
-          <a:xfrm>
-            <a:off x="6251575" y="2479576"/>
+                <a:latin typeface="IBM Plex Mono"/>
+                <a:ea typeface="IBM Plex Mono"/>
+                <a:cs typeface="IBM Plex Mono"/>
+              </a:rPr>
+              <a:t>10</a:t>
+            </a:r>
+            <a:endParaRPr sz="1600"/>
+          </a:p>
+        </p:txBody>
+      </p:sp>
+      <p:sp>
+        <p:nvSpPr>
+          <p:cNvPr id="36" name="Shape 34">
+            <a:extLst xmlns:a="http://schemas.openxmlformats.org/drawingml/2006/main">
+              <a:ext uri="{FF2B5EF4-FFF2-40B4-BE49-F238E27FC236}">
+                <a16:creationId xmlns:a16="http://schemas.microsoft.com/office/drawing/2014/main" id="{D61362B0-A3D0-4C1E-903C-D395DB6F28EA}"/>
+              </a:ext>
+            </a:extLst>
+          </p:cNvPr>
+          <p:cNvSpPr>
+            <a:spLocks xmlns:a="http://schemas.openxmlformats.org/drawingml/2006/main" noGrp="1"/>
+          </p:cNvSpPr>
+          <p:nvPr/>
+        </p:nvSpPr>
+        <p:spPr>
+          <a:xfrm xmlns:a="http://schemas.openxmlformats.org/drawingml/2006/main">
+            <a:off x="6251575" y="3018048"/>
             <a:ext cx="5124450" cy="468610"/>
           </a:xfrm>
-          <a:prstGeom prst="roundRect">
+          <a:prstGeom xmlns:a="http://schemas.openxmlformats.org/drawingml/2006/main" prst="roundRect">
             <a:avLst>
               <a:gd name="adj" fmla="val 15583"/>
             </a:avLst>
           </a:prstGeom>
-          <a:solidFill>
+          <a:solidFill xmlns:a="http://schemas.openxmlformats.org/drawingml/2006/main">
             <a:srgbClr val="FCFCFB"/>
           </a:solidFill>
-          <a:ln w="6350">
+          <a:ln xmlns:a="http://schemas.openxmlformats.org/drawingml/2006/main" w="6350">
             <a:solidFill>
               <a:srgbClr val="D3DAE1"/>
             </a:solidFill>
@@ -10540,112 +10601,316 @@
       </p:sp>
       <p:sp>
         <p:nvSpPr>
-          <p:cNvPr id="31" name="Text 29"/>
-          <p:cNvSpPr/>
-          <p:nvPr/>
-        </p:nvSpPr>
-        <p:spPr>
-          <a:xfrm>
-            <a:off x="6407150" y="2606576"/>
-            <a:ext cx="4447540" cy="240010"/>
-          </a:xfrm>
-          <a:prstGeom prst="rect">
-            <a:avLst/>
-          </a:prstGeom>
-          <a:noFill/>
-          <a:ln/>
-        </p:spPr>
-        <p:txBody>
-          <a:bodyPr wrap="square" lIns="0" tIns="0" rIns="0" bIns="0" rtlCol="0" anchor="t">
-            <a:normAutofit/>
-          </a:bodyPr>
-          <a:lstStyle/>
-          <a:p>
-            <a:pPr algn="l" indent="0" marL="0">
+          <p:cNvPr id="37" name="Text 35">
+            <a:extLst xmlns:a="http://schemas.openxmlformats.org/drawingml/2006/main">
+              <a:ext uri="{FF2B5EF4-FFF2-40B4-BE49-F238E27FC236}">
+                <a16:creationId xmlns:a16="http://schemas.microsoft.com/office/drawing/2014/main" id="{F3ABFD99-7F33-44B6-97C8-EFE6BA4C2F6D}"/>
+              </a:ext>
+            </a:extLst>
+          </p:cNvPr>
+          <p:cNvSpPr>
+            <a:spLocks xmlns:a="http://schemas.openxmlformats.org/drawingml/2006/main" noGrp="1"/>
+          </p:cNvSpPr>
+          <p:nvPr/>
+        </p:nvSpPr>
+        <p:spPr>
+          <a:xfrm xmlns:a="http://schemas.openxmlformats.org/drawingml/2006/main">
+            <a:off x="6407150" y="3132943"/>
+            <a:ext cx="401340" cy="238720"/>
+          </a:xfrm>
+          <a:prstGeom xmlns:a="http://schemas.openxmlformats.org/drawingml/2006/main" prst="roundRect">
+            <a:avLst>
+              <a:gd name="adj" fmla="val 15960"/>
+            </a:avLst>
+          </a:prstGeom>
+          <a:solidFill xmlns:a="http://schemas.openxmlformats.org/drawingml/2006/main">
+            <a:srgbClr val="FBF1E6"/>
+          </a:solidFill>
+        </p:spPr>
+        <p:txBody>
+          <a:bodyPr xmlns:a="http://schemas.openxmlformats.org/drawingml/2006/main" wrap="none" lIns="0" tIns="0" rIns="0" bIns="0" anchor="ctr">
+            <a:normAutofit fontScale="100000"/>
+          </a:bodyPr>
+          <a:lstStyle xmlns:a="http://schemas.openxmlformats.org/drawingml/2006/main"/>
+          <a:p xmlns:a="http://schemas.openxmlformats.org/drawingml/2006/main">
+            <a:pPr marL="0" indent="0" algn="ctr">
+              <a:lnSpc>
+                <a:spcPts val="1680"/>
+              </a:lnSpc>
+              <a:buNone/>
+            </a:pPr>
+            <a:r>
+              <a:rPr sz="1200" b="1">
+                <a:solidFill>
+                  <a:srgbClr val="A8520A"/>
+                </a:solidFill>
+                <a:latin typeface="IBM Plex Mono"/>
+                <a:ea typeface="IBM Plex Mono"/>
+                <a:cs typeface="IBM Plex Mono"/>
+              </a:rPr>
+              <a:t>КТ2</a:t>
+            </a:r>
+            <a:endParaRPr sz="1200"/>
+          </a:p>
+        </p:txBody>
+      </p:sp>
+      <p:sp>
+        <p:nvSpPr>
+          <p:cNvPr id="38" name="Text 36">
+            <a:extLst xmlns:a="http://schemas.openxmlformats.org/drawingml/2006/main">
+              <a:ext uri="{FF2B5EF4-FFF2-40B4-BE49-F238E27FC236}">
+                <a16:creationId xmlns:a16="http://schemas.microsoft.com/office/drawing/2014/main" id="{EF869B15-B61E-48C2-B1C4-28A8F13B827B}"/>
+              </a:ext>
+            </a:extLst>
+          </p:cNvPr>
+          <p:cNvSpPr>
+            <a:spLocks xmlns:a="http://schemas.openxmlformats.org/drawingml/2006/main" noGrp="1"/>
+          </p:cNvSpPr>
+          <p:nvPr/>
+        </p:nvSpPr>
+        <p:spPr>
+          <a:xfrm xmlns:a="http://schemas.openxmlformats.org/drawingml/2006/main">
+            <a:off x="6922790" y="3145048"/>
+            <a:ext cx="3916431" cy="240010"/>
+          </a:xfrm>
+          <a:prstGeom xmlns:a="http://schemas.openxmlformats.org/drawingml/2006/main" prst="rect">
+            <a:avLst/>
+          </a:prstGeom>
+          <a:noFill xmlns:a="http://schemas.openxmlformats.org/drawingml/2006/main"/>
+        </p:spPr>
+        <p:txBody>
+          <a:bodyPr xmlns:a="http://schemas.openxmlformats.org/drawingml/2006/main" wrap="square" lIns="0" tIns="0" rIns="0" bIns="0" anchor="t">
+            <a:normAutofit fontScale="100000"/>
+          </a:bodyPr>
+          <a:lstStyle xmlns:a="http://schemas.openxmlformats.org/drawingml/2006/main"/>
+          <a:p xmlns:a="http://schemas.openxmlformats.org/drawingml/2006/main">
+            <a:pPr marL="0" indent="0" algn="l">
               <a:lnSpc>
                 <a:spcPts val="1690"/>
               </a:lnSpc>
               <a:buNone/>
             </a:pPr>
             <a:r>
-              <a:rPr lang="en-US" sz="1300" dirty="0">
+              <a:rPr sz="1300">
                 <a:solidFill>
                   <a:srgbClr val="13202D"/>
                 </a:solidFill>
-                <a:latin typeface="IBM Plex Sans" pitchFamily="34" charset="0"/>
-                <a:ea typeface="IBM Plex Sans" pitchFamily="34" charset="-122"/>
-                <a:cs typeface="IBM Plex Sans" pitchFamily="34" charset="-120"/>
-              </a:rPr>
-              <a:t>Интероперабилност и усклађеност уговорних страна</a:t>
-            </a:r>
-            <a:endParaRPr lang="en-US" sz="1300" dirty="0"/>
-          </a:p>
-        </p:txBody>
-      </p:sp>
-      <p:sp>
-        <p:nvSpPr>
-          <p:cNvPr id="32" name="Text 30"/>
-          <p:cNvSpPr/>
-          <p:nvPr/>
-        </p:nvSpPr>
-        <p:spPr>
-          <a:xfrm>
-            <a:off x="10788650" y="2571651"/>
+                <a:latin typeface="IBM Plex Sans"/>
+                <a:ea typeface="IBM Plex Sans"/>
+                <a:cs typeface="IBM Plex Sans"/>
+              </a:rPr>
+              <a:t>Завршна демонстрација · 8. вежба</a:t>
+            </a:r>
+            <a:endParaRPr sz="1300"/>
+          </a:p>
+        </p:txBody>
+      </p:sp>
+      <p:sp>
+        <p:nvSpPr>
+          <p:cNvPr id="39" name="Text 37">
+            <a:extLst xmlns:a="http://schemas.openxmlformats.org/drawingml/2006/main">
+              <a:ext uri="{FF2B5EF4-FFF2-40B4-BE49-F238E27FC236}">
+                <a16:creationId xmlns:a16="http://schemas.microsoft.com/office/drawing/2014/main" id="{FBE913F6-A370-4710-8FCD-2FD6A5139988}"/>
+              </a:ext>
+            </a:extLst>
+          </p:cNvPr>
+          <p:cNvSpPr>
+            <a:spLocks xmlns:a="http://schemas.openxmlformats.org/drawingml/2006/main" noGrp="1"/>
+          </p:cNvSpPr>
+          <p:nvPr/>
+        </p:nvSpPr>
+        <p:spPr>
+          <a:xfrm xmlns:a="http://schemas.openxmlformats.org/drawingml/2006/main">
+            <a:off x="10788650" y="3110123"/>
             <a:ext cx="431800" cy="309860"/>
           </a:xfrm>
-          <a:prstGeom prst="rect">
-            <a:avLst/>
-          </a:prstGeom>
-          <a:noFill/>
-          <a:ln/>
-        </p:spPr>
-        <p:txBody>
-          <a:bodyPr wrap="square" lIns="0" tIns="0" rIns="0" bIns="0" rtlCol="0" anchor="t">
-            <a:normAutofit/>
-          </a:bodyPr>
-          <a:lstStyle/>
-          <a:p>
-            <a:pPr algn="r" indent="0" marL="0">
+          <a:prstGeom xmlns:a="http://schemas.openxmlformats.org/drawingml/2006/main" prst="rect">
+            <a:avLst/>
+          </a:prstGeom>
+          <a:noFill xmlns:a="http://schemas.openxmlformats.org/drawingml/2006/main"/>
+        </p:spPr>
+        <p:txBody>
+          <a:bodyPr xmlns:a="http://schemas.openxmlformats.org/drawingml/2006/main" wrap="square" lIns="0" tIns="0" rIns="0" bIns="0" anchor="t">
+            <a:normAutofit fontScale="100000"/>
+          </a:bodyPr>
+          <a:lstStyle xmlns:a="http://schemas.openxmlformats.org/drawingml/2006/main"/>
+          <a:p xmlns:a="http://schemas.openxmlformats.org/drawingml/2006/main">
+            <a:pPr marL="0" indent="0" algn="r">
               <a:lnSpc>
                 <a:spcPts val="2240"/>
               </a:lnSpc>
               <a:buNone/>
             </a:pPr>
             <a:r>
-              <a:rPr lang="en-US" sz="1600" b="1" dirty="0">
+              <a:rPr sz="1600" b="1">
                 <a:solidFill>
                   <a:srgbClr val="0A5CA8"/>
                 </a:solidFill>
-                <a:latin typeface="IBM Plex Mono" pitchFamily="49" charset="0"/>
-                <a:ea typeface="IBM Plex Mono" pitchFamily="49" charset="-122"/>
-                <a:cs typeface="IBM Plex Mono" pitchFamily="49" charset="-120"/>
+                <a:latin typeface="IBM Plex Mono"/>
+                <a:ea typeface="IBM Plex Mono"/>
+                <a:cs typeface="IBM Plex Mono"/>
               </a:rPr>
               <a:t>10</a:t>
             </a:r>
-            <a:endParaRPr lang="en-US" sz="1600" dirty="0"/>
-          </a:p>
-        </p:txBody>
-      </p:sp>
-      <p:sp>
-        <p:nvSpPr>
-          <p:cNvPr id="33" name="Shape 31"/>
-          <p:cNvSpPr/>
-          <p:nvPr/>
-        </p:nvSpPr>
-        <p:spPr>
-          <a:xfrm>
-            <a:off x="6251575" y="3018036"/>
-            <a:ext cx="5124450" cy="468610"/>
-          </a:xfrm>
-          <a:prstGeom prst="roundRect">
+            <a:endParaRPr sz="1600"/>
+          </a:p>
+        </p:txBody>
+      </p:sp>
+      <p:sp>
+        <p:nvSpPr>
+          <p:cNvPr id="40" name="Shape 38">
+            <a:extLst xmlns:a="http://schemas.openxmlformats.org/drawingml/2006/main">
+              <a:ext uri="{FF2B5EF4-FFF2-40B4-BE49-F238E27FC236}">
+                <a16:creationId xmlns:a16="http://schemas.microsoft.com/office/drawing/2014/main" id="{813143FD-8259-4239-A03F-26CF3F7D7D02}"/>
+              </a:ext>
+            </a:extLst>
+          </p:cNvPr>
+          <p:cNvSpPr>
+            <a:spLocks xmlns:a="http://schemas.openxmlformats.org/drawingml/2006/main" noGrp="1"/>
+          </p:cNvSpPr>
+          <p:nvPr/>
+        </p:nvSpPr>
+        <p:spPr>
+          <a:xfrm xmlns:a="http://schemas.openxmlformats.org/drawingml/2006/main">
+            <a:off x="812800" y="4769941"/>
+            <a:ext cx="10566400" cy="548580"/>
+          </a:xfrm>
+          <a:prstGeom xmlns:a="http://schemas.openxmlformats.org/drawingml/2006/main" prst="roundRect">
             <a:avLst>
-              <a:gd name="adj" fmla="val 15583"/>
+              <a:gd name="adj" fmla="val 16205"/>
             </a:avLst>
           </a:prstGeom>
-          <a:solidFill>
-            <a:srgbClr val="FCFCFB"/>
+          <a:solidFill xmlns:a="http://schemas.openxmlformats.org/drawingml/2006/main">
+            <a:srgbClr val="0A5CA8"/>
           </a:solidFill>
-          <a:ln w="6350">
+        </p:spPr>
+      </p:sp>
+      <p:sp>
+        <p:nvSpPr>
+          <p:cNvPr id="41" name="Text 39">
+            <a:extLst xmlns:a="http://schemas.openxmlformats.org/drawingml/2006/main">
+              <a:ext uri="{FF2B5EF4-FFF2-40B4-BE49-F238E27FC236}">
+                <a16:creationId xmlns:a16="http://schemas.microsoft.com/office/drawing/2014/main" id="{8EA19F18-76B2-45A3-B3D9-150B562F22CF}"/>
+              </a:ext>
+            </a:extLst>
+          </p:cNvPr>
+          <p:cNvSpPr>
+            <a:spLocks xmlns:a="http://schemas.openxmlformats.org/drawingml/2006/main" noGrp="1"/>
+          </p:cNvSpPr>
+          <p:nvPr/>
+        </p:nvSpPr>
+        <p:spPr>
+          <a:xfrm xmlns:a="http://schemas.openxmlformats.org/drawingml/2006/main">
+            <a:off x="1016000" y="4928691"/>
+            <a:ext cx="2950488" cy="256480"/>
+          </a:xfrm>
+          <a:prstGeom xmlns:a="http://schemas.openxmlformats.org/drawingml/2006/main" prst="rect">
+            <a:avLst/>
+          </a:prstGeom>
+          <a:noFill xmlns:a="http://schemas.openxmlformats.org/drawingml/2006/main"/>
+        </p:spPr>
+        <p:txBody>
+          <a:bodyPr xmlns:a="http://schemas.openxmlformats.org/drawingml/2006/main" wrap="square" lIns="0" tIns="0" rIns="0" bIns="0" anchor="t">
+            <a:normAutofit/>
+          </a:bodyPr>
+          <a:lstStyle xmlns:a="http://schemas.openxmlformats.org/drawingml/2006/main"/>
+          <a:p xmlns:a="http://schemas.openxmlformats.org/drawingml/2006/main">
+            <a:pPr marL="0" indent="0" algn="l">
+              <a:lnSpc>
+                <a:spcPts val="1820"/>
+              </a:lnSpc>
+              <a:buNone/>
+            </a:pPr>
+            <a:r>
+              <a:rPr sz="1300" b="1" spc="100">
+                <a:solidFill>
+                  <a:srgbClr val="DCE8F4"/>
+                </a:solidFill>
+                <a:latin typeface="IBM Plex Mono"/>
+                <a:ea typeface="IBM Plex Mono"/>
+                <a:cs typeface="IBM Plex Mono"/>
+              </a:rPr>
+              <a:t>УКУПНО · ПРОЈЕКТНИ ДЕО</a:t>
+            </a:r>
+            <a:endParaRPr sz="1300"/>
+          </a:p>
+        </p:txBody>
+      </p:sp>
+      <p:sp>
+        <p:nvSpPr>
+          <p:cNvPr id="42" name="Text 40">
+            <a:extLst xmlns:a="http://schemas.openxmlformats.org/drawingml/2006/main">
+              <a:ext uri="{FF2B5EF4-FFF2-40B4-BE49-F238E27FC236}">
+                <a16:creationId xmlns:a16="http://schemas.microsoft.com/office/drawing/2014/main" id="{80FDA29E-FDA3-414B-9840-7C8EC3F026FA}"/>
+              </a:ext>
+            </a:extLst>
+          </p:cNvPr>
+          <p:cNvSpPr>
+            <a:spLocks xmlns:a="http://schemas.openxmlformats.org/drawingml/2006/main" noGrp="1"/>
+          </p:cNvSpPr>
+          <p:nvPr/>
+        </p:nvSpPr>
+        <p:spPr>
+          <a:xfrm xmlns:a="http://schemas.openxmlformats.org/drawingml/2006/main">
+            <a:off x="10023832" y="4884241"/>
+            <a:ext cx="1152168" cy="345380"/>
+          </a:xfrm>
+          <a:prstGeom xmlns:a="http://schemas.openxmlformats.org/drawingml/2006/main" prst="rect">
+            <a:avLst/>
+          </a:prstGeom>
+          <a:noFill xmlns:a="http://schemas.openxmlformats.org/drawingml/2006/main"/>
+        </p:spPr>
+        <p:txBody>
+          <a:bodyPr xmlns:a="http://schemas.openxmlformats.org/drawingml/2006/main" wrap="square" lIns="0" tIns="0" rIns="0" bIns="0" anchor="t">
+            <a:normAutofit/>
+          </a:bodyPr>
+          <a:lstStyle xmlns:a="http://schemas.openxmlformats.org/drawingml/2006/main"/>
+          <a:p xmlns:a="http://schemas.openxmlformats.org/drawingml/2006/main">
+            <a:pPr marL="0" indent="0" algn="r">
+              <a:lnSpc>
+                <a:spcPts val="2520"/>
+              </a:lnSpc>
+              <a:buNone/>
+            </a:pPr>
+            <a:r>
+              <a:rPr sz="1800" b="1">
+                <a:solidFill>
+                  <a:srgbClr val="FCFCFB"/>
+                </a:solidFill>
+                <a:latin typeface="IBM Plex Mono"/>
+                <a:ea typeface="IBM Plex Mono"/>
+                <a:cs typeface="IBM Plex Mono"/>
+              </a:rPr>
+              <a:t>71 поен</a:t>
+            </a:r>
+            <a:endParaRPr sz="1800"/>
+          </a:p>
+        </p:txBody>
+      </p:sp>
+      <p:sp>
+        <p:nvSpPr>
+          <p:cNvPr id="43" name="Shape 41">
+            <a:extLst xmlns:a="http://schemas.openxmlformats.org/drawingml/2006/main">
+              <a:ext uri="{FF2B5EF4-FFF2-40B4-BE49-F238E27FC236}">
+                <a16:creationId xmlns:a16="http://schemas.microsoft.com/office/drawing/2014/main" id="{9115DBFF-2752-416B-965C-F3A93A633FEF}"/>
+              </a:ext>
+            </a:extLst>
+          </p:cNvPr>
+          <p:cNvSpPr>
+            <a:spLocks xmlns:a="http://schemas.openxmlformats.org/drawingml/2006/main" noGrp="1"/>
+          </p:cNvSpPr>
+          <p:nvPr/>
+        </p:nvSpPr>
+        <p:spPr>
+          <a:xfrm xmlns:a="http://schemas.openxmlformats.org/drawingml/2006/main">
+            <a:off x="812800" y="6209705"/>
+            <a:ext cx="10566400" cy="0"/>
+          </a:xfrm>
+          <a:prstGeom xmlns:a="http://schemas.openxmlformats.org/drawingml/2006/main" prst="line">
+            <a:avLst/>
+          </a:prstGeom>
+          <a:noFill xmlns:a="http://schemas.openxmlformats.org/drawingml/2006/main"/>
+          <a:ln xmlns:a="http://schemas.openxmlformats.org/drawingml/2006/main" w="6350">
             <a:solidFill>
               <a:srgbClr val="D3DAE1"/>
             </a:solidFill>
@@ -10655,490 +10920,122 @@
       </p:sp>
       <p:sp>
         <p:nvSpPr>
-          <p:cNvPr id="34" name="Text 32"/>
-          <p:cNvSpPr/>
-          <p:nvPr/>
-        </p:nvSpPr>
-        <p:spPr>
-          <a:xfrm>
-            <a:off x="6407150" y="3145036"/>
-            <a:ext cx="4447540" cy="240010"/>
-          </a:xfrm>
-          <a:prstGeom prst="rect">
-            <a:avLst/>
-          </a:prstGeom>
-          <a:noFill/>
-          <a:ln/>
-        </p:spPr>
-        <p:txBody>
-          <a:bodyPr wrap="square" lIns="0" tIns="0" rIns="0" bIns="0" rtlCol="0" anchor="t">
-            <a:normAutofit/>
-          </a:bodyPr>
-          <a:lstStyle/>
-          <a:p>
-            <a:pPr algn="l" indent="0" marL="0">
-              <a:lnSpc>
-                <a:spcPts val="1690"/>
-              </a:lnSpc>
-              <a:buNone/>
-            </a:pPr>
-            <a:r>
-              <a:rPr lang="en-US" sz="1300" dirty="0">
-                <a:solidFill>
-                  <a:srgbClr val="13202D"/>
-                </a:solidFill>
-                <a:latin typeface="IBM Plex Sans" pitchFamily="34" charset="0"/>
-                <a:ea typeface="IBM Plex Sans" pitchFamily="34" charset="-122"/>
-                <a:cs typeface="IBM Plex Sans" pitchFamily="34" charset="-120"/>
-              </a:rPr>
-              <a:t>Правилна и контролисана употреба AI алата</a:t>
-            </a:r>
-            <a:endParaRPr lang="en-US" sz="1300" dirty="0"/>
-          </a:p>
-        </p:txBody>
-      </p:sp>
-      <p:sp>
-        <p:nvSpPr>
-          <p:cNvPr id="35" name="Text 33"/>
-          <p:cNvSpPr/>
-          <p:nvPr/>
-        </p:nvSpPr>
-        <p:spPr>
-          <a:xfrm>
-            <a:off x="10788650" y="3110111"/>
-            <a:ext cx="431800" cy="309860"/>
-          </a:xfrm>
-          <a:prstGeom prst="rect">
-            <a:avLst/>
-          </a:prstGeom>
-          <a:noFill/>
-          <a:ln/>
-        </p:spPr>
-        <p:txBody>
-          <a:bodyPr wrap="square" lIns="0" tIns="0" rIns="0" bIns="0" rtlCol="0" anchor="t">
-            <a:normAutofit/>
-          </a:bodyPr>
-          <a:lstStyle/>
-          <a:p>
-            <a:pPr algn="r" indent="0" marL="0">
-              <a:lnSpc>
-                <a:spcPts val="2240"/>
-              </a:lnSpc>
-              <a:buNone/>
-            </a:pPr>
-            <a:r>
-              <a:rPr lang="en-US" sz="1600" b="1" dirty="0">
-                <a:solidFill>
-                  <a:srgbClr val="0A5CA8"/>
-                </a:solidFill>
-                <a:latin typeface="IBM Plex Mono" pitchFamily="49" charset="0"/>
-                <a:ea typeface="IBM Plex Mono" pitchFamily="49" charset="-122"/>
-                <a:cs typeface="IBM Plex Mono" pitchFamily="49" charset="-120"/>
-              </a:rPr>
-              <a:t>10</a:t>
-            </a:r>
-            <a:endParaRPr lang="en-US" sz="1600" dirty="0"/>
-          </a:p>
-        </p:txBody>
-      </p:sp>
-      <p:sp>
-        <p:nvSpPr>
-          <p:cNvPr id="36" name="Shape 34"/>
-          <p:cNvSpPr/>
-          <p:nvPr/>
-        </p:nvSpPr>
-        <p:spPr>
-          <a:xfrm>
-            <a:off x="6251575" y="3556496"/>
-            <a:ext cx="5124450" cy="468610"/>
-          </a:xfrm>
-          <a:prstGeom prst="roundRect">
-            <a:avLst>
-              <a:gd name="adj" fmla="val 15583"/>
-            </a:avLst>
-          </a:prstGeom>
-          <a:solidFill>
-            <a:srgbClr val="FCFCFB"/>
-          </a:solidFill>
-          <a:ln w="6350">
-            <a:solidFill>
-              <a:srgbClr val="D3DAE1"/>
-            </a:solidFill>
-            <a:prstDash val="solid"/>
-          </a:ln>
-        </p:spPr>
-      </p:sp>
-      <p:sp>
-        <p:nvSpPr>
-          <p:cNvPr id="37" name="Text 35"/>
-          <p:cNvSpPr/>
-          <p:nvPr/>
-        </p:nvSpPr>
-        <p:spPr>
-          <a:xfrm>
-            <a:off x="6407150" y="3671391"/>
-            <a:ext cx="401340" cy="238720"/>
-          </a:xfrm>
-          <a:prstGeom prst="roundRect">
-            <a:avLst>
-              <a:gd name="adj" fmla="val 15960"/>
-            </a:avLst>
-          </a:prstGeom>
-          <a:solidFill>
-            <a:srgbClr val="FBF1E6"/>
-          </a:solidFill>
-          <a:ln/>
-        </p:spPr>
-        <p:txBody>
-          <a:bodyPr wrap="none" lIns="0" tIns="0" rIns="0" bIns="0" rtlCol="0" anchor="ctr">
-            <a:normAutofit/>
-          </a:bodyPr>
-          <a:lstStyle/>
-          <a:p>
-            <a:pPr algn="ctr" indent="0" marL="0">
-              <a:lnSpc>
-                <a:spcPts val="1680"/>
-              </a:lnSpc>
-              <a:buNone/>
-            </a:pPr>
-            <a:r>
-              <a:rPr lang="en-US" sz="1200" b="1" dirty="0">
-                <a:solidFill>
-                  <a:srgbClr val="A8520A"/>
-                </a:solidFill>
-                <a:latin typeface="IBM Plex Mono" pitchFamily="49" charset="0"/>
-                <a:ea typeface="IBM Plex Mono" pitchFamily="49" charset="-122"/>
-                <a:cs typeface="IBM Plex Mono" pitchFamily="49" charset="-120"/>
-              </a:rPr>
-              <a:t>КТ4</a:t>
-            </a:r>
-            <a:endParaRPr lang="en-US" sz="1200" dirty="0"/>
-          </a:p>
-        </p:txBody>
-      </p:sp>
-      <p:sp>
-        <p:nvSpPr>
-          <p:cNvPr id="38" name="Text 36"/>
-          <p:cNvSpPr/>
-          <p:nvPr/>
-        </p:nvSpPr>
-        <p:spPr>
-          <a:xfrm>
-            <a:off x="6922790" y="3683496"/>
-            <a:ext cx="3916431" cy="240010"/>
-          </a:xfrm>
-          <a:prstGeom prst="rect">
-            <a:avLst/>
-          </a:prstGeom>
-          <a:noFill/>
-          <a:ln/>
-        </p:spPr>
-        <p:txBody>
-          <a:bodyPr wrap="square" lIns="0" tIns="0" rIns="0" bIns="0" rtlCol="0" anchor="t">
-            <a:normAutofit/>
-          </a:bodyPr>
-          <a:lstStyle/>
-          <a:p>
-            <a:pPr algn="l" indent="0" marL="0">
-              <a:lnSpc>
-                <a:spcPts val="1690"/>
-              </a:lnSpc>
-              <a:buNone/>
-            </a:pPr>
-            <a:r>
-              <a:rPr lang="en-US" sz="1300" dirty="0">
-                <a:solidFill>
-                  <a:srgbClr val="13202D"/>
-                </a:solidFill>
-                <a:latin typeface="IBM Plex Sans" pitchFamily="34" charset="0"/>
-                <a:ea typeface="IBM Plex Sans" pitchFamily="34" charset="-122"/>
-                <a:cs typeface="IBM Plex Sans" pitchFamily="34" charset="-120"/>
-              </a:rPr>
-              <a:t>Развојни ток уз AI алате и завршна одбрана</a:t>
-            </a:r>
-            <a:endParaRPr lang="en-US" sz="1300" dirty="0"/>
-          </a:p>
-        </p:txBody>
-      </p:sp>
-      <p:sp>
-        <p:nvSpPr>
-          <p:cNvPr id="39" name="Text 37"/>
-          <p:cNvSpPr/>
-          <p:nvPr/>
-        </p:nvSpPr>
-        <p:spPr>
-          <a:xfrm>
-            <a:off x="10788650" y="3648571"/>
-            <a:ext cx="431800" cy="309860"/>
-          </a:xfrm>
-          <a:prstGeom prst="rect">
-            <a:avLst/>
-          </a:prstGeom>
-          <a:noFill/>
-          <a:ln/>
-        </p:spPr>
-        <p:txBody>
-          <a:bodyPr wrap="square" lIns="0" tIns="0" rIns="0" bIns="0" rtlCol="0" anchor="t">
-            <a:normAutofit/>
-          </a:bodyPr>
-          <a:lstStyle/>
-          <a:p>
-            <a:pPr algn="r" indent="0" marL="0">
-              <a:lnSpc>
-                <a:spcPts val="2240"/>
-              </a:lnSpc>
-              <a:buNone/>
-            </a:pPr>
-            <a:r>
-              <a:rPr lang="en-US" sz="1600" b="1" dirty="0">
-                <a:solidFill>
-                  <a:srgbClr val="0A5CA8"/>
-                </a:solidFill>
-                <a:latin typeface="IBM Plex Mono" pitchFamily="49" charset="0"/>
-                <a:ea typeface="IBM Plex Mono" pitchFamily="49" charset="-122"/>
-                <a:cs typeface="IBM Plex Mono" pitchFamily="49" charset="-120"/>
-              </a:rPr>
-              <a:t>8</a:t>
-            </a:r>
-            <a:endParaRPr lang="en-US" sz="1600" dirty="0"/>
-          </a:p>
-        </p:txBody>
-      </p:sp>
-      <p:sp>
-        <p:nvSpPr>
-          <p:cNvPr id="40" name="Shape 38"/>
-          <p:cNvSpPr/>
-          <p:nvPr/>
-        </p:nvSpPr>
-        <p:spPr>
-          <a:xfrm>
-            <a:off x="812800" y="4769941"/>
-            <a:ext cx="10566400" cy="548580"/>
-          </a:xfrm>
-          <a:prstGeom prst="roundRect">
-            <a:avLst>
-              <a:gd name="adj" fmla="val 16205"/>
-            </a:avLst>
-          </a:prstGeom>
-          <a:solidFill>
-            <a:srgbClr val="0A5CA8"/>
-          </a:solidFill>
-          <a:ln/>
-        </p:spPr>
-      </p:sp>
-      <p:sp>
-        <p:nvSpPr>
-          <p:cNvPr id="41" name="Text 39"/>
-          <p:cNvSpPr/>
-          <p:nvPr/>
-        </p:nvSpPr>
-        <p:spPr>
-          <a:xfrm>
-            <a:off x="1016000" y="4928691"/>
-            <a:ext cx="2950488" cy="256480"/>
-          </a:xfrm>
-          <a:prstGeom prst="rect">
-            <a:avLst/>
-          </a:prstGeom>
-          <a:noFill/>
-          <a:ln/>
-        </p:spPr>
-        <p:txBody>
-          <a:bodyPr wrap="square" lIns="0" tIns="0" rIns="0" bIns="0" rtlCol="0" anchor="t">
-            <a:normAutofit/>
-          </a:bodyPr>
-          <a:lstStyle/>
-          <a:p>
-            <a:pPr algn="l" indent="0" marL="0">
-              <a:lnSpc>
-                <a:spcPts val="1820"/>
-              </a:lnSpc>
-              <a:buNone/>
-            </a:pPr>
-            <a:r>
-              <a:rPr lang="en-US" sz="1300" b="1" spc="100" kern="0" dirty="0">
-                <a:solidFill>
-                  <a:srgbClr val="DCE8F4"/>
-                </a:solidFill>
-                <a:latin typeface="IBM Plex Mono" pitchFamily="49" charset="0"/>
-                <a:ea typeface="IBM Plex Mono" pitchFamily="49" charset="-122"/>
-                <a:cs typeface="IBM Plex Mono" pitchFamily="49" charset="-120"/>
-              </a:rPr>
-              <a:t>УКУПНО · ПРОЈЕКТНИ ДЕО</a:t>
-            </a:r>
-            <a:endParaRPr lang="en-US" sz="1300" dirty="0"/>
-          </a:p>
-        </p:txBody>
-      </p:sp>
-      <p:sp>
-        <p:nvSpPr>
-          <p:cNvPr id="42" name="Text 40"/>
-          <p:cNvSpPr/>
-          <p:nvPr/>
-        </p:nvSpPr>
-        <p:spPr>
-          <a:xfrm>
-            <a:off x="10023832" y="4884241"/>
-            <a:ext cx="1152168" cy="345380"/>
-          </a:xfrm>
-          <a:prstGeom prst="rect">
-            <a:avLst/>
-          </a:prstGeom>
-          <a:noFill/>
-          <a:ln/>
-        </p:spPr>
-        <p:txBody>
-          <a:bodyPr wrap="square" lIns="0" tIns="0" rIns="0" bIns="0" rtlCol="0" anchor="t">
-            <a:normAutofit/>
-          </a:bodyPr>
-          <a:lstStyle/>
-          <a:p>
-            <a:pPr algn="r" indent="0" marL="0">
-              <a:lnSpc>
-                <a:spcPts val="2520"/>
-              </a:lnSpc>
-              <a:buNone/>
-            </a:pPr>
-            <a:r>
-              <a:rPr lang="en-US" sz="1800" b="1" dirty="0">
-                <a:solidFill>
-                  <a:srgbClr val="FCFCFB"/>
-                </a:solidFill>
-                <a:latin typeface="IBM Plex Mono" pitchFamily="49" charset="0"/>
-                <a:ea typeface="IBM Plex Mono" pitchFamily="49" charset="-122"/>
-                <a:cs typeface="IBM Plex Mono" pitchFamily="49" charset="-120"/>
-              </a:rPr>
-              <a:t>71 поен</a:t>
-            </a:r>
-            <a:endParaRPr lang="en-US" sz="1800" dirty="0"/>
-          </a:p>
-        </p:txBody>
-      </p:sp>
-      <p:sp>
-        <p:nvSpPr>
-          <p:cNvPr id="43" name="Shape 41"/>
-          <p:cNvSpPr/>
-          <p:nvPr/>
-        </p:nvSpPr>
-        <p:spPr>
-          <a:xfrm>
-            <a:off x="812800" y="6209705"/>
-            <a:ext cx="10566400" cy="0"/>
-          </a:xfrm>
-          <a:prstGeom prst="line">
-            <a:avLst/>
-          </a:prstGeom>
-          <a:noFill/>
-          <a:ln w="6350">
-            <a:solidFill>
-              <a:srgbClr val="D3DAE1"/>
-            </a:solidFill>
-            <a:prstDash val="solid"/>
-          </a:ln>
-        </p:spPr>
-      </p:sp>
-      <p:sp>
-        <p:nvSpPr>
-          <p:cNvPr id="44" name="Text 42"/>
-          <p:cNvSpPr/>
-          <p:nvPr/>
-        </p:nvSpPr>
-        <p:spPr>
-          <a:xfrm>
+          <p:cNvPr id="44" name="Text 42">
+            <a:extLst xmlns:a="http://schemas.openxmlformats.org/drawingml/2006/main">
+              <a:ext uri="{FF2B5EF4-FFF2-40B4-BE49-F238E27FC236}">
+                <a16:creationId xmlns:a16="http://schemas.microsoft.com/office/drawing/2014/main" id="{95EFC772-B23D-46A2-9E73-5C5ED0B51D8E}"/>
+              </a:ext>
+            </a:extLst>
+          </p:cNvPr>
+          <p:cNvSpPr>
+            <a:spLocks xmlns:a="http://schemas.openxmlformats.org/drawingml/2006/main" noGrp="1"/>
+          </p:cNvSpPr>
+          <p:nvPr/>
+        </p:nvSpPr>
+        <p:spPr>
+          <a:xfrm xmlns:a="http://schemas.openxmlformats.org/drawingml/2006/main">
             <a:off x="812800" y="6314480"/>
             <a:ext cx="2390061" cy="238720"/>
           </a:xfrm>
-          <a:prstGeom prst="rect">
-            <a:avLst/>
-          </a:prstGeom>
-          <a:noFill/>
-          <a:ln/>
-        </p:spPr>
-        <p:txBody>
-          <a:bodyPr wrap="square" lIns="0" tIns="0" rIns="0" bIns="0" rtlCol="0" anchor="t">
-            <a:normAutofit/>
-          </a:bodyPr>
-          <a:lstStyle/>
-          <a:p>
-            <a:pPr algn="l" indent="0" marL="0">
+          <a:prstGeom xmlns:a="http://schemas.openxmlformats.org/drawingml/2006/main" prst="rect">
+            <a:avLst/>
+          </a:prstGeom>
+          <a:noFill xmlns:a="http://schemas.openxmlformats.org/drawingml/2006/main"/>
+        </p:spPr>
+        <p:txBody>
+          <a:bodyPr xmlns:a="http://schemas.openxmlformats.org/drawingml/2006/main" wrap="square" lIns="0" tIns="0" rIns="0" bIns="0" anchor="t">
+            <a:normAutofit/>
+          </a:bodyPr>
+          <a:lstStyle xmlns:a="http://schemas.openxmlformats.org/drawingml/2006/main"/>
+          <a:p xmlns:a="http://schemas.openxmlformats.org/drawingml/2006/main">
+            <a:pPr marL="0" indent="0" algn="l">
               <a:lnSpc>
                 <a:spcPts val="1680"/>
               </a:lnSpc>
               <a:buNone/>
             </a:pPr>
             <a:r>
-              <a:rPr lang="en-US" sz="1200" dirty="0">
+              <a:rPr sz="1200">
                 <a:solidFill>
                   <a:srgbClr val="5E6975"/>
                 </a:solidFill>
-                <a:latin typeface="IBM Plex Sans" pitchFamily="34" charset="0"/>
-                <a:ea typeface="IBM Plex Sans" pitchFamily="34" charset="-122"/>
-                <a:cs typeface="IBM Plex Sans" pitchFamily="34" charset="-120"/>
+                <a:latin typeface="IBM Plex Sans"/>
+                <a:ea typeface="IBM Plex Sans"/>
+                <a:cs typeface="IBM Plex Sans"/>
               </a:rPr>
               <a:t>Елементи развоја софтвера</a:t>
             </a:r>
-            <a:endParaRPr lang="en-US" sz="1200" dirty="0"/>
-          </a:p>
-        </p:txBody>
-      </p:sp>
-      <p:sp>
-        <p:nvSpPr>
-          <p:cNvPr id="45" name="Text 43"/>
-          <p:cNvSpPr/>
-          <p:nvPr/>
-        </p:nvSpPr>
-        <p:spPr>
-          <a:xfrm>
+            <a:endParaRPr sz="1200"/>
+          </a:p>
+        </p:txBody>
+      </p:sp>
+      <p:sp>
+        <p:nvSpPr>
+          <p:cNvPr id="45" name="Text 43">
+            <a:extLst xmlns:a="http://schemas.openxmlformats.org/drawingml/2006/main">
+              <a:ext uri="{FF2B5EF4-FFF2-40B4-BE49-F238E27FC236}">
+                <a16:creationId xmlns:a16="http://schemas.microsoft.com/office/drawing/2014/main" id="{5A535E40-A0C0-4258-8AF2-0FDDB0892BFA}"/>
+              </a:ext>
+            </a:extLst>
+          </p:cNvPr>
+          <p:cNvSpPr>
+            <a:spLocks xmlns:a="http://schemas.openxmlformats.org/drawingml/2006/main" noGrp="1"/>
+          </p:cNvSpPr>
+          <p:nvPr/>
+        </p:nvSpPr>
+        <p:spPr>
+          <a:xfrm xmlns:a="http://schemas.openxmlformats.org/drawingml/2006/main">
             <a:off x="11145441" y="6314480"/>
             <a:ext cx="233759" cy="238720"/>
           </a:xfrm>
-          <a:prstGeom prst="rect">
-            <a:avLst/>
-          </a:prstGeom>
-          <a:noFill/>
-          <a:ln/>
-        </p:spPr>
-        <p:txBody>
-          <a:bodyPr wrap="square" lIns="0" tIns="0" rIns="0" bIns="0" rtlCol="0" anchor="t">
-            <a:normAutofit/>
-          </a:bodyPr>
-          <a:lstStyle/>
-          <a:p>
-            <a:pPr algn="r" indent="0" marL="0">
+          <a:prstGeom xmlns:a="http://schemas.openxmlformats.org/drawingml/2006/main" prst="rect">
+            <a:avLst/>
+          </a:prstGeom>
+          <a:noFill xmlns:a="http://schemas.openxmlformats.org/drawingml/2006/main"/>
+        </p:spPr>
+        <p:txBody>
+          <a:bodyPr xmlns:a="http://schemas.openxmlformats.org/drawingml/2006/main" wrap="square" lIns="0" tIns="0" rIns="0" bIns="0" anchor="t">
+            <a:normAutofit/>
+          </a:bodyPr>
+          <a:lstStyle xmlns:a="http://schemas.openxmlformats.org/drawingml/2006/main"/>
+          <a:p xmlns:a="http://schemas.openxmlformats.org/drawingml/2006/main">
+            <a:pPr marL="0" indent="0" algn="r">
               <a:lnSpc>
                 <a:spcPts val="1680"/>
               </a:lnSpc>
               <a:buNone/>
             </a:pPr>
             <a:r>
-              <a:rPr lang="en-US" sz="1200" dirty="0">
+              <a:rPr sz="1200">
                 <a:solidFill>
                   <a:srgbClr val="5E6975"/>
                 </a:solidFill>
-                <a:latin typeface="IBM Plex Mono" pitchFamily="49" charset="0"/>
-                <a:ea typeface="IBM Plex Mono" pitchFamily="49" charset="-122"/>
-                <a:cs typeface="IBM Plex Mono" pitchFamily="49" charset="-120"/>
+                <a:latin typeface="IBM Plex Mono"/>
+                <a:ea typeface="IBM Plex Mono"/>
+                <a:cs typeface="IBM Plex Mono"/>
               </a:rPr>
               <a:t>04</a:t>
             </a:r>
-            <a:endParaRPr lang="en-US" sz="1200" dirty="0"/>
+            <a:endParaRPr sz="1200"/>
           </a:p>
         </p:txBody>
       </p:sp>
     </p:spTree>
+    <p:extLst>
+      <p:ext uri="{BB962C8B-B14F-4D97-AF65-F5344CB8AC3E}">
+        <p14:creationId xmlns:p14="http://schemas.microsoft.com/office/powerpoint/2010/main" val="1900495632"/>
+      </p:ext>
+    </p:extLst>
   </p:cSld>
-  <p:clrMapOvr>
-    <a:masterClrMapping/>
-  </p:clrMapOvr>
 </p:sld>
 </file>
 
 <file path=ppt/slides/slide5.xml><?xml version="1.0" encoding="utf-8"?>
-<p:sld xmlns:a="http://schemas.openxmlformats.org/drawingml/2006/main" xmlns:r="http://schemas.openxmlformats.org/officeDocument/2006/relationships" xmlns:p="http://schemas.openxmlformats.org/presentationml/2006/main">
-  <p:cSld name="Slide 5">
+<p:sld xmlns:p="http://schemas.openxmlformats.org/presentationml/2006/main">
+  <p:cSld>
     <p:bg>
       <p:bgPr>
-        <a:solidFill>
+        <a:solidFill xmlns:a="http://schemas.openxmlformats.org/drawingml/2006/main">
           <a:srgbClr val="F6F7F5"/>
         </a:solidFill>
       </p:bgPr>
@@ -11150,189 +11047,220 @@
         <p:nvPr/>
       </p:nvGrpSpPr>
       <p:grpSpPr>
-        <a:xfrm>
-          <a:off x="0" y="0"/>
-          <a:ext cx="0" cy="0"/>
-          <a:chOff x="0" y="0"/>
-          <a:chExt cx="0" cy="0"/>
-        </a:xfrm>
+        <a:xfrm xmlns:a="http://schemas.openxmlformats.org/drawingml/2006/main"/>
       </p:grpSpPr>
       <p:sp>
         <p:nvSpPr>
-          <p:cNvPr id="2" name="Shape 0"/>
-          <p:cNvSpPr/>
-          <p:nvPr/>
-        </p:nvSpPr>
-        <p:spPr>
-          <a:xfrm>
+          <p:cNvPr id="2" name="Shape 0">
+            <a:extLst xmlns:a="http://schemas.openxmlformats.org/drawingml/2006/main">
+              <a:ext uri="{FF2B5EF4-FFF2-40B4-BE49-F238E27FC236}">
+                <a16:creationId xmlns:a16="http://schemas.microsoft.com/office/drawing/2014/main" id="{2A7B96FB-02FB-46BF-850D-71055ADFF202}"/>
+              </a:ext>
+            </a:extLst>
+          </p:cNvPr>
+          <p:cNvSpPr>
+            <a:spLocks xmlns:a="http://schemas.openxmlformats.org/drawingml/2006/main" noGrp="1"/>
+          </p:cNvSpPr>
+          <p:nvPr/>
+        </p:nvSpPr>
+        <p:spPr>
+          <a:xfrm xmlns:a="http://schemas.openxmlformats.org/drawingml/2006/main">
             <a:off x="812800" y="457200"/>
             <a:ext cx="457200" cy="38100"/>
           </a:xfrm>
-          <a:prstGeom prst="roundRect">
+          <a:prstGeom xmlns:a="http://schemas.openxmlformats.org/drawingml/2006/main" prst="roundRect">
             <a:avLst>
               <a:gd name="adj" fmla="val 50000"/>
             </a:avLst>
           </a:prstGeom>
-          <a:solidFill>
+          <a:solidFill xmlns:a="http://schemas.openxmlformats.org/drawingml/2006/main">
             <a:srgbClr val="0A5CA8"/>
           </a:solidFill>
-          <a:ln/>
-        </p:spPr>
-      </p:sp>
-      <p:sp>
-        <p:nvSpPr>
-          <p:cNvPr id="3" name="Text 1"/>
-          <p:cNvSpPr/>
-          <p:nvPr/>
-        </p:nvSpPr>
-        <p:spPr>
-          <a:xfrm>
+        </p:spPr>
+      </p:sp>
+      <p:sp>
+        <p:nvSpPr>
+          <p:cNvPr id="3" name="Text 1">
+            <a:extLst xmlns:a="http://schemas.openxmlformats.org/drawingml/2006/main">
+              <a:ext uri="{FF2B5EF4-FFF2-40B4-BE49-F238E27FC236}">
+                <a16:creationId xmlns:a16="http://schemas.microsoft.com/office/drawing/2014/main" id="{FE56AC09-B066-4B99-8124-55121F939CB4}"/>
+              </a:ext>
+            </a:extLst>
+          </p:cNvPr>
+          <p:cNvSpPr>
+            <a:spLocks xmlns:a="http://schemas.openxmlformats.org/drawingml/2006/main" noGrp="1"/>
+          </p:cNvSpPr>
+          <p:nvPr/>
+        </p:nvSpPr>
+        <p:spPr>
+          <a:xfrm xmlns:a="http://schemas.openxmlformats.org/drawingml/2006/main">
             <a:off x="812800" y="711200"/>
             <a:ext cx="10883392" cy="238720"/>
           </a:xfrm>
-          <a:prstGeom prst="rect">
-            <a:avLst/>
-          </a:prstGeom>
-          <a:noFill/>
-          <a:ln/>
-        </p:spPr>
-        <p:txBody>
-          <a:bodyPr wrap="square" lIns="0" tIns="0" rIns="0" bIns="0" rtlCol="0" anchor="t">
-            <a:normAutofit/>
-          </a:bodyPr>
-          <a:lstStyle/>
-          <a:p>
-            <a:pPr algn="l" indent="0" marL="0">
+          <a:prstGeom xmlns:a="http://schemas.openxmlformats.org/drawingml/2006/main" prst="rect">
+            <a:avLst/>
+          </a:prstGeom>
+          <a:noFill xmlns:a="http://schemas.openxmlformats.org/drawingml/2006/main"/>
+        </p:spPr>
+        <p:txBody>
+          <a:bodyPr xmlns:a="http://schemas.openxmlformats.org/drawingml/2006/main" wrap="square" lIns="0" tIns="0" rIns="0" bIns="0" anchor="t">
+            <a:normAutofit/>
+          </a:bodyPr>
+          <a:lstStyle xmlns:a="http://schemas.openxmlformats.org/drawingml/2006/main"/>
+          <a:p xmlns:a="http://schemas.openxmlformats.org/drawingml/2006/main">
+            <a:pPr marL="0" indent="0" algn="l">
               <a:lnSpc>
                 <a:spcPts val="1680"/>
               </a:lnSpc>
               <a:buNone/>
             </a:pPr>
             <a:r>
-              <a:rPr lang="en-US" sz="1200" spc="100" kern="0" dirty="0">
+              <a:rPr sz="1200" spc="100">
                 <a:solidFill>
                   <a:srgbClr val="0A5CA8"/>
                 </a:solidFill>
-                <a:latin typeface="IBM Plex Mono" pitchFamily="49" charset="0"/>
-                <a:ea typeface="IBM Plex Mono" pitchFamily="49" charset="-122"/>
-                <a:cs typeface="IBM Plex Mono" pitchFamily="49" charset="-120"/>
+                <a:latin typeface="IBM Plex Mono"/>
+                <a:ea typeface="IBM Plex Mono"/>
+                <a:cs typeface="IBM Plex Mono"/>
               </a:rPr>
               <a:t>02 · ОЦЕЊИВАЊЕ</a:t>
             </a:r>
-            <a:endParaRPr lang="en-US" sz="1200" dirty="0"/>
-          </a:p>
-        </p:txBody>
-      </p:sp>
-      <p:sp>
-        <p:nvSpPr>
-          <p:cNvPr id="4" name="Text 2"/>
-          <p:cNvSpPr/>
+            <a:endParaRPr sz="1200"/>
+          </a:p>
+        </p:txBody>
+      </p:sp>
+      <p:sp>
+        <p:nvSpPr>
+          <p:cNvPr id="4" name="Text 2">
+            <a:extLst xmlns:a="http://schemas.openxmlformats.org/drawingml/2006/main">
+              <a:ext uri="{FF2B5EF4-FFF2-40B4-BE49-F238E27FC236}">
+                <a16:creationId xmlns:a16="http://schemas.microsoft.com/office/drawing/2014/main" id="{0149B63E-D9E6-4853-9BC0-7509CAAF4217}"/>
+              </a:ext>
+            </a:extLst>
+          </p:cNvPr>
+          <p:cNvSpPr>
+            <a:spLocks xmlns:a="http://schemas.openxmlformats.org/drawingml/2006/main" noGrp="1"/>
+          </p:cNvSpPr>
           <p:nvPr>
-            <p:ph type="title"/>
+            <p:ph type="title" idx="0"/>
           </p:nvPr>
         </p:nvSpPr>
         <p:spPr>
-          <a:xfrm>
+          <a:xfrm xmlns:a="http://schemas.openxmlformats.org/drawingml/2006/main">
             <a:off x="812800" y="1000720"/>
             <a:ext cx="10883392" cy="444500"/>
           </a:xfrm>
-          <a:prstGeom prst="rect">
-            <a:avLst/>
-          </a:prstGeom>
-          <a:noFill/>
-          <a:ln/>
-        </p:spPr>
-        <p:txBody>
-          <a:bodyPr wrap="square" lIns="0" tIns="0" rIns="0" bIns="0" rtlCol="0" anchor="t">
-            <a:normAutofit/>
-          </a:bodyPr>
-          <a:lstStyle/>
-          <a:p>
-            <a:pPr algn="l" indent="0" marL="0">
+          <a:prstGeom xmlns:a="http://schemas.openxmlformats.org/drawingml/2006/main" prst="rect">
+            <a:avLst/>
+          </a:prstGeom>
+          <a:noFill xmlns:a="http://schemas.openxmlformats.org/drawingml/2006/main"/>
+        </p:spPr>
+        <p:txBody>
+          <a:bodyPr xmlns:a="http://schemas.openxmlformats.org/drawingml/2006/main" wrap="square" lIns="0" tIns="0" rIns="0" bIns="0" anchor="t">
+            <a:normAutofit/>
+          </a:bodyPr>
+          <a:lstStyle xmlns:a="http://schemas.openxmlformats.org/drawingml/2006/main"/>
+          <a:p xmlns:a="http://schemas.openxmlformats.org/drawingml/2006/main">
+            <a:pPr marL="0" indent="0" algn="l">
               <a:lnSpc>
                 <a:spcPts val="3300"/>
               </a:lnSpc>
               <a:buNone/>
             </a:pPr>
             <a:r>
-              <a:rPr lang="en-US" sz="3000" b="1" i="0" spc="-50" kern="0" dirty="0">
+              <a:rPr sz="3000" b="1" i="0" spc="-50">
                 <a:solidFill>
                   <a:srgbClr val="13202D"/>
                 </a:solidFill>
-                <a:latin typeface="IBM Plex Sans" pitchFamily="34" charset="0"/>
-                <a:ea typeface="IBM Plex Sans" pitchFamily="34" charset="-122"/>
-                <a:cs typeface="IBM Plex Sans" pitchFamily="34" charset="-120"/>
+                <a:latin typeface="IBM Plex Sans"/>
+                <a:ea typeface="IBM Plex Sans"/>
+                <a:cs typeface="IBM Plex Sans"/>
               </a:rPr>
               <a:t>Контролне тачке</a:t>
             </a:r>
-            <a:endParaRPr lang="en-US" sz="3000" dirty="0"/>
-          </a:p>
-        </p:txBody>
-      </p:sp>
-      <p:sp>
-        <p:nvSpPr>
-          <p:cNvPr id="5" name="Text 3"/>
-          <p:cNvSpPr/>
-          <p:nvPr/>
-        </p:nvSpPr>
-        <p:spPr>
-          <a:xfrm>
+            <a:endParaRPr sz="3000"/>
+          </a:p>
+        </p:txBody>
+      </p:sp>
+      <p:sp>
+        <p:nvSpPr>
+          <p:cNvPr id="5" name="Text 3">
+            <a:extLst xmlns:a="http://schemas.openxmlformats.org/drawingml/2006/main">
+              <a:ext uri="{FF2B5EF4-FFF2-40B4-BE49-F238E27FC236}">
+                <a16:creationId xmlns:a16="http://schemas.microsoft.com/office/drawing/2014/main" id="{DD6E1C8E-1A77-47E1-BD8E-AC5AC1E9C326}"/>
+              </a:ext>
+            </a:extLst>
+          </p:cNvPr>
+          <p:cNvSpPr>
+            <a:spLocks xmlns:a="http://schemas.openxmlformats.org/drawingml/2006/main" noGrp="1"/>
+          </p:cNvSpPr>
+          <p:nvPr/>
+        </p:nvSpPr>
+        <p:spPr>
+          <a:xfrm xmlns:a="http://schemas.openxmlformats.org/drawingml/2006/main">
             <a:off x="812800" y="1673820"/>
             <a:ext cx="10883392" cy="274241"/>
           </a:xfrm>
-          <a:prstGeom prst="rect">
-            <a:avLst/>
-          </a:prstGeom>
-          <a:noFill/>
-          <a:ln/>
-        </p:spPr>
-        <p:txBody>
-          <a:bodyPr wrap="square" lIns="0" tIns="0" rIns="0" bIns="0" rtlCol="0" anchor="t">
-            <a:normAutofit/>
-          </a:bodyPr>
-          <a:lstStyle/>
-          <a:p>
-            <a:pPr algn="l" indent="0" marL="0">
+          <a:prstGeom xmlns:a="http://schemas.openxmlformats.org/drawingml/2006/main" prst="rect">
+            <a:avLst/>
+          </a:prstGeom>
+          <a:noFill xmlns:a="http://schemas.openxmlformats.org/drawingml/2006/main"/>
+        </p:spPr>
+        <p:txBody>
+          <a:bodyPr xmlns:a="http://schemas.openxmlformats.org/drawingml/2006/main" wrap="square" lIns="0" tIns="0" rIns="0" bIns="0" anchor="t">
+            <a:normAutofit fontScale="100000"/>
+          </a:bodyPr>
+          <a:lstStyle xmlns:a="http://schemas.openxmlformats.org/drawingml/2006/main"/>
+          <a:p xmlns:a="http://schemas.openxmlformats.org/drawingml/2006/main">
+            <a:pPr marL="0" indent="0" algn="l">
               <a:lnSpc>
                 <a:spcPts val="1960"/>
               </a:lnSpc>
               <a:buNone/>
             </a:pPr>
             <a:r>
-              <a:rPr lang="en-US" sz="1400" dirty="0">
+              <a:rPr sz="1400">
                 <a:solidFill>
                   <a:srgbClr val="44505D"/>
                 </a:solidFill>
-                <a:latin typeface="IBM Plex Sans" pitchFamily="34" charset="0"/>
-                <a:ea typeface="IBM Plex Sans" pitchFamily="34" charset="-122"/>
-                <a:cs typeface="IBM Plex Sans" pitchFamily="34" charset="-120"/>
-              </a:rPr>
-              <a:t>Четири контролне тачке проверавају напредак и разумевање пројектног решења.</a:t>
-            </a:r>
-            <a:endParaRPr lang="en-US" sz="1400" dirty="0"/>
-          </a:p>
-        </p:txBody>
-      </p:sp>
-      <p:sp>
-        <p:nvSpPr>
-          <p:cNvPr id="6" name="Shape 4"/>
-          <p:cNvSpPr/>
-          <p:nvPr/>
-        </p:nvSpPr>
-        <p:spPr>
-          <a:xfrm>
+                <a:latin typeface="IBM Plex Sans"/>
+                <a:ea typeface="IBM Plex Sans"/>
+                <a:cs typeface="IBM Plex Sans"/>
+              </a:rPr>
+              <a:t>Две контролне тачке проверавају напредак свих додељених целина у терминима 4. и 8. вежбе.</a:t>
+            </a:r>
+            <a:endParaRPr sz="1400"/>
+          </a:p>
+        </p:txBody>
+      </p:sp>
+      <p:sp>
+        <p:nvSpPr>
+          <p:cNvPr id="6" name="Shape 4">
+            <a:extLst xmlns:a="http://schemas.openxmlformats.org/drawingml/2006/main">
+              <a:ext uri="{FF2B5EF4-FFF2-40B4-BE49-F238E27FC236}">
+                <a16:creationId xmlns:a16="http://schemas.microsoft.com/office/drawing/2014/main" id="{D52E9126-0059-4116-9F7E-D7198857B25E}"/>
+              </a:ext>
+            </a:extLst>
+          </p:cNvPr>
+          <p:cNvSpPr>
+            <a:spLocks xmlns:a="http://schemas.openxmlformats.org/drawingml/2006/main" noGrp="1"/>
+          </p:cNvSpPr>
+          <p:nvPr/>
+        </p:nvSpPr>
+        <p:spPr>
+          <a:xfrm xmlns:a="http://schemas.openxmlformats.org/drawingml/2006/main">
             <a:off x="815975" y="2179836"/>
-            <a:ext cx="2311400" cy="1806972"/>
-          </a:xfrm>
-          <a:prstGeom prst="roundRect">
+            <a:ext cx="5060918" cy="1905000"/>
+          </a:xfrm>
+          <a:prstGeom xmlns:a="http://schemas.openxmlformats.org/drawingml/2006/main" prst="roundRect">
             <a:avLst>
               <a:gd name="adj" fmla="val 5447"/>
             </a:avLst>
           </a:prstGeom>
-          <a:solidFill>
+          <a:solidFill xmlns:a="http://schemas.openxmlformats.org/drawingml/2006/main">
             <a:srgbClr val="FCFCFB"/>
           </a:solidFill>
-          <a:ln w="6350">
+          <a:ln xmlns:a="http://schemas.openxmlformats.org/drawingml/2006/main" w="6350">
             <a:solidFill>
               <a:srgbClr val="D3DAE1"/>
             </a:solidFill>
@@ -11342,209 +11270,189 @@
       </p:sp>
       <p:sp>
         <p:nvSpPr>
-          <p:cNvPr id="7" name="Text 5"/>
-          <p:cNvSpPr/>
-          <p:nvPr/>
-        </p:nvSpPr>
-        <p:spPr>
-          <a:xfrm>
+          <p:cNvPr id="7" name="Text 5">
+            <a:extLst xmlns:a="http://schemas.openxmlformats.org/drawingml/2006/main">
+              <a:ext uri="{FF2B5EF4-FFF2-40B4-BE49-F238E27FC236}">
+                <a16:creationId xmlns:a16="http://schemas.microsoft.com/office/drawing/2014/main" id="{6FBC90F9-9B62-45F6-BE09-D9287AB381BF}"/>
+              </a:ext>
+            </a:extLst>
+          </p:cNvPr>
+          <p:cNvSpPr>
+            <a:spLocks xmlns:a="http://schemas.openxmlformats.org/drawingml/2006/main" noGrp="1"/>
+          </p:cNvSpPr>
+          <p:nvPr/>
+        </p:nvSpPr>
+        <p:spPr>
+          <a:xfrm xmlns:a="http://schemas.openxmlformats.org/drawingml/2006/main">
             <a:off x="996950" y="2348111"/>
-            <a:ext cx="2007933" cy="309860"/>
-          </a:xfrm>
-          <a:prstGeom prst="rect">
-            <a:avLst/>
-          </a:prstGeom>
-          <a:noFill/>
-          <a:ln/>
-        </p:spPr>
-        <p:txBody>
-          <a:bodyPr wrap="square" lIns="0" tIns="0" rIns="0" bIns="0" rtlCol="0" anchor="t">
-            <a:normAutofit/>
-          </a:bodyPr>
-          <a:lstStyle/>
-          <a:p>
-            <a:pPr algn="l" indent="0" marL="0">
+            <a:ext cx="4667250" cy="309860"/>
+          </a:xfrm>
+          <a:prstGeom xmlns:a="http://schemas.openxmlformats.org/drawingml/2006/main" prst="rect">
+            <a:avLst/>
+          </a:prstGeom>
+          <a:noFill xmlns:a="http://schemas.openxmlformats.org/drawingml/2006/main"/>
+        </p:spPr>
+        <p:txBody>
+          <a:bodyPr xmlns:a="http://schemas.openxmlformats.org/drawingml/2006/main" wrap="square" lIns="0" tIns="0" rIns="0" bIns="0" anchor="t">
+            <a:normAutofit fontScale="100000"/>
+          </a:bodyPr>
+          <a:lstStyle xmlns:a="http://schemas.openxmlformats.org/drawingml/2006/main"/>
+          <a:p xmlns:a="http://schemas.openxmlformats.org/drawingml/2006/main">
+            <a:pPr marL="0" indent="0" algn="l">
               <a:lnSpc>
                 <a:spcPts val="2240"/>
               </a:lnSpc>
               <a:buNone/>
             </a:pPr>
             <a:r>
-              <a:rPr lang="en-US" sz="1600" b="1" dirty="0">
+              <a:rPr sz="1600" b="1">
                 <a:solidFill>
                   <a:srgbClr val="0A5CA8"/>
                 </a:solidFill>
-                <a:latin typeface="IBM Plex Mono" pitchFamily="49" charset="0"/>
-                <a:ea typeface="IBM Plex Mono" pitchFamily="49" charset="-122"/>
-                <a:cs typeface="IBM Plex Mono" pitchFamily="49" charset="-120"/>
-              </a:rPr>
-              <a:t>КТ1</a:t>
-            </a:r>
-            <a:endParaRPr lang="en-US" sz="1600" dirty="0"/>
-          </a:p>
-        </p:txBody>
-      </p:sp>
-      <p:sp>
-        <p:nvSpPr>
-          <p:cNvPr id="8" name="Text 6"/>
-          <p:cNvSpPr/>
-          <p:nvPr/>
-        </p:nvSpPr>
-        <p:spPr>
-          <a:xfrm>
+                <a:latin typeface="IBM Plex Mono"/>
+                <a:ea typeface="IBM Plex Mono"/>
+                <a:cs typeface="IBM Plex Mono"/>
+              </a:rPr>
+              <a:t>КТ1 · 4. ВЕЖБА</a:t>
+            </a:r>
+            <a:endParaRPr sz="1600"/>
+          </a:p>
+        </p:txBody>
+      </p:sp>
+      <p:sp>
+        <p:nvSpPr>
+          <p:cNvPr id="8" name="Text 6">
+            <a:extLst xmlns:a="http://schemas.openxmlformats.org/drawingml/2006/main">
+              <a:ext uri="{FF2B5EF4-FFF2-40B4-BE49-F238E27FC236}">
+                <a16:creationId xmlns:a16="http://schemas.microsoft.com/office/drawing/2014/main" id="{5A10C5F9-331C-4053-8E2F-AE215A00D974}"/>
+              </a:ext>
+            </a:extLst>
+          </p:cNvPr>
+          <p:cNvSpPr>
+            <a:spLocks xmlns:a="http://schemas.openxmlformats.org/drawingml/2006/main" noGrp="1"/>
+          </p:cNvSpPr>
+          <p:nvPr/>
+        </p:nvSpPr>
+        <p:spPr>
+          <a:xfrm xmlns:a="http://schemas.openxmlformats.org/drawingml/2006/main">
             <a:off x="996950" y="2708771"/>
-            <a:ext cx="2007933" cy="487561"/>
-          </a:xfrm>
-          <a:prstGeom prst="rect">
-            <a:avLst/>
-          </a:prstGeom>
-          <a:noFill/>
-          <a:ln/>
-        </p:spPr>
-        <p:txBody>
-          <a:bodyPr wrap="square" lIns="0" tIns="0" rIns="0" bIns="0" rtlCol="0" anchor="t">
-            <a:normAutofit/>
-          </a:bodyPr>
-          <a:lstStyle/>
-          <a:p>
-            <a:pPr algn="l" indent="0" marL="0">
+            <a:ext cx="4667250" cy="285750"/>
+          </a:xfrm>
+          <a:prstGeom xmlns:a="http://schemas.openxmlformats.org/drawingml/2006/main" prst="rect">
+            <a:avLst/>
+          </a:prstGeom>
+          <a:noFill xmlns:a="http://schemas.openxmlformats.org/drawingml/2006/main"/>
+        </p:spPr>
+        <p:txBody>
+          <a:bodyPr xmlns:a="http://schemas.openxmlformats.org/drawingml/2006/main" wrap="square" lIns="0" tIns="0" rIns="0" bIns="0" anchor="t">
+            <a:normAutofit fontScale="100000"/>
+          </a:bodyPr>
+          <a:lstStyle xmlns:a="http://schemas.openxmlformats.org/drawingml/2006/main"/>
+          <a:p xmlns:a="http://schemas.openxmlformats.org/drawingml/2006/main">
+            <a:pPr marL="0" indent="0" algn="l">
               <a:lnSpc>
                 <a:spcPts val="1820"/>
               </a:lnSpc>
               <a:buNone/>
             </a:pPr>
             <a:r>
-              <a:rPr lang="en-US" sz="1400" b="1" dirty="0">
+              <a:rPr sz="1400" b="1">
                 <a:solidFill>
                   <a:srgbClr val="13202D"/>
                 </a:solidFill>
-                <a:latin typeface="IBM Plex Sans" pitchFamily="34" charset="0"/>
-                <a:ea typeface="IBM Plex Sans" pitchFamily="34" charset="-122"/>
-                <a:cs typeface="IBM Plex Sans" pitchFamily="34" charset="-120"/>
-              </a:rPr>
-              <a:t>Проблем, backlog и развојни ток</a:t>
-            </a:r>
-            <a:endParaRPr lang="en-US" sz="1400" dirty="0"/>
-          </a:p>
-        </p:txBody>
-      </p:sp>
-      <p:sp>
-        <p:nvSpPr>
-          <p:cNvPr id="9" name="Text 7"/>
-          <p:cNvSpPr/>
-          <p:nvPr/>
-        </p:nvSpPr>
-        <p:spPr>
-          <a:xfrm>
-            <a:off x="996950" y="3554413"/>
-            <a:ext cx="817959" cy="264120"/>
-          </a:xfrm>
-          <a:custGeom>
-            <a:avLst/>
-            <a:gdLst/>
-            <a:ahLst/>
-            <a:cxnLst/>
-            <a:rect l="l" t="t" r="r" b="b"/>
-            <a:pathLst>
-              <a:path w="817959" h="264120">
-                <a:moveTo>
-                  <a:pt x="132060" y="0"/>
-                </a:moveTo>
-                <a:lnTo>
-                  <a:pt x="685899" y="0"/>
-                </a:lnTo>
-                <a:arcTo hR="132060" wR="132060" stAng="16200000" swAng="5400000"/>
-                <a:lnTo>
-                  <a:pt x="817959" y="132060"/>
-                </a:lnTo>
-                <a:arcTo hR="132060" wR="132060" stAng="0" swAng="5400000"/>
-                <a:lnTo>
-                  <a:pt x="132060" y="264120"/>
-                </a:lnTo>
-                <a:arcTo hR="132060" wR="132060" stAng="5400000" swAng="5400000"/>
-                <a:lnTo>
-                  <a:pt x="0" y="132060"/>
-                </a:lnTo>
-                <a:arcTo hR="132060" wR="132060" stAng="10800000" swAng="5400000"/>
-                <a:close/>
-              </a:path>
-            </a:pathLst>
-          </a:custGeom>
-          <a:solidFill>
+                <a:latin typeface="IBM Plex Sans"/>
+                <a:ea typeface="IBM Plex Sans"/>
+                <a:cs typeface="IBM Plex Sans"/>
+              </a:rPr>
+              <a:t>Основна имплементација</a:t>
+            </a:r>
+            <a:endParaRPr sz="1400"/>
+          </a:p>
+        </p:txBody>
+      </p:sp>
+      <p:sp>
+        <p:nvSpPr>
+          <p:cNvPr id="9" name="Text 7">
+            <a:extLst xmlns:a="http://schemas.openxmlformats.org/drawingml/2006/main">
+              <a:ext uri="{FF2B5EF4-FFF2-40B4-BE49-F238E27FC236}">
+                <a16:creationId xmlns:a16="http://schemas.microsoft.com/office/drawing/2014/main" id="{A88B5F44-D7C8-4D25-9329-35C6AAF0596B}"/>
+              </a:ext>
+            </a:extLst>
+          </p:cNvPr>
+          <p:cNvSpPr>
+            <a:spLocks xmlns:a="http://schemas.openxmlformats.org/drawingml/2006/main" noGrp="1"/>
+          </p:cNvSpPr>
+          <p:nvPr/>
+        </p:nvSpPr>
+        <p:spPr>
+          <a:xfrm xmlns:a="http://schemas.openxmlformats.org/drawingml/2006/main">
+            <a:off x="996982" y="3676650"/>
+            <a:ext cx="1028700" cy="264128"/>
+          </a:xfrm>
+          <a:prstGeom xmlns:a="http://schemas.openxmlformats.org/drawingml/2006/main" prst="roundRect">
+            <a:avLst>
+              <a:gd name="adj" fmla="val 50000"/>
+            </a:avLst>
+          </a:prstGeom>
+          <a:solidFill xmlns:a="http://schemas.openxmlformats.org/drawingml/2006/main">
             <a:srgbClr val="DCE8F4"/>
           </a:solidFill>
-          <a:ln/>
-        </p:spPr>
-        <p:txBody>
-          <a:bodyPr wrap="none" lIns="0" tIns="0" rIns="0" bIns="0" rtlCol="0" anchor="ctr">
-            <a:normAutofit/>
-          </a:bodyPr>
-          <a:lstStyle/>
-          <a:p>
-            <a:pPr algn="ctr" indent="0" marL="0">
+        </p:spPr>
+        <p:txBody>
+          <a:bodyPr xmlns:a="http://schemas.openxmlformats.org/drawingml/2006/main" wrap="none" lIns="0" tIns="0" rIns="0" bIns="0" anchor="ctr">
+            <a:normAutofit fontScale="100000"/>
+          </a:bodyPr>
+          <a:lstStyle xmlns:a="http://schemas.openxmlformats.org/drawingml/2006/main"/>
+          <a:p xmlns:a="http://schemas.openxmlformats.org/drawingml/2006/main">
+            <a:pPr marL="0" indent="0" algn="ctr">
               <a:lnSpc>
                 <a:spcPts val="1680"/>
               </a:lnSpc>
               <a:buNone/>
             </a:pPr>
             <a:r>
-              <a:rPr lang="en-US" sz="1200" b="1" dirty="0">
+              <a:rPr sz="1200" b="1">
                 <a:solidFill>
                   <a:srgbClr val="0A5CA8"/>
                 </a:solidFill>
-                <a:latin typeface="IBM Plex Mono" pitchFamily="49" charset="0"/>
-                <a:ea typeface="IBM Plex Mono" pitchFamily="49" charset="-122"/>
-                <a:cs typeface="IBM Plex Mono" pitchFamily="49" charset="-120"/>
-              </a:rPr>
-              <a:t>3 поена</a:t>
-            </a:r>
-            <a:endParaRPr lang="en-US" sz="1200" dirty="0"/>
-          </a:p>
-        </p:txBody>
-      </p:sp>
-      <p:pic>
-        <p:nvPicPr>
-          <p:cNvPr id="10" name="Image 0" descr="arrow-right">    </p:cNvPr>
-          <p:cNvPicPr>
-            <a:picLocks noChangeAspect="1"/>
-          </p:cNvPicPr>
-          <p:nvPr/>
-        </p:nvPicPr>
-        <p:blipFill>
-          <a:blip r:embed="rId1"/>
-          <a:srcRect l="0" r="0" t="0" b="0"/>
-          <a:stretch/>
-        </p:blipFill>
-        <p:spPr>
-          <a:xfrm>
-            <a:off x="3232150" y="3026172"/>
-            <a:ext cx="228600" cy="114300"/>
-          </a:xfrm>
-          <a:prstGeom prst="rect">
-            <a:avLst/>
-          </a:prstGeom>
-        </p:spPr>
-      </p:pic>
-      <p:sp>
-        <p:nvSpPr>
-          <p:cNvPr id="11" name="Shape 8"/>
-          <p:cNvSpPr/>
-          <p:nvPr/>
-        </p:nvSpPr>
-        <p:spPr>
-          <a:xfrm>
-            <a:off x="3565525" y="2179836"/>
-            <a:ext cx="2311400" cy="1806972"/>
-          </a:xfrm>
-          <a:prstGeom prst="roundRect">
+                <a:latin typeface="IBM Plex Mono"/>
+                <a:ea typeface="IBM Plex Mono"/>
+                <a:cs typeface="IBM Plex Mono"/>
+              </a:rPr>
+              <a:t>10 поена</a:t>
+            </a:r>
+            <a:endParaRPr sz="1200"/>
+          </a:p>
+        </p:txBody>
+      </p:sp>
+      <p:sp>
+        <p:nvSpPr>
+          <p:cNvPr id="11" name="Shape 8">
+            <a:extLst xmlns:a="http://schemas.openxmlformats.org/drawingml/2006/main">
+              <a:ext uri="{FF2B5EF4-FFF2-40B4-BE49-F238E27FC236}">
+                <a16:creationId xmlns:a16="http://schemas.microsoft.com/office/drawing/2014/main" id="{D794E748-DE8F-401D-A739-1CCDE11FA82E}"/>
+              </a:ext>
+            </a:extLst>
+          </p:cNvPr>
+          <p:cNvSpPr>
+            <a:spLocks xmlns:a="http://schemas.openxmlformats.org/drawingml/2006/main" noGrp="1"/>
+          </p:cNvSpPr>
+          <p:nvPr/>
+        </p:nvSpPr>
+        <p:spPr>
+          <a:xfrm xmlns:a="http://schemas.openxmlformats.org/drawingml/2006/main">
+            <a:off x="6315075" y="2179836"/>
+            <a:ext cx="5060918" cy="1905000"/>
+          </a:xfrm>
+          <a:prstGeom xmlns:a="http://schemas.openxmlformats.org/drawingml/2006/main" prst="roundRect">
             <a:avLst>
               <a:gd name="adj" fmla="val 5447"/>
             </a:avLst>
           </a:prstGeom>
-          <a:solidFill>
+          <a:solidFill xmlns:a="http://schemas.openxmlformats.org/drawingml/2006/main">
             <a:srgbClr val="FCFCFB"/>
           </a:solidFill>
-          <a:ln w="6350">
+          <a:ln xmlns:a="http://schemas.openxmlformats.org/drawingml/2006/main" w="6350">
             <a:solidFill>
               <a:srgbClr val="D3DAE1"/>
             </a:solidFill>
@@ -11554,209 +11462,482 @@
       </p:sp>
       <p:sp>
         <p:nvSpPr>
-          <p:cNvPr id="12" name="Text 9"/>
-          <p:cNvSpPr/>
-          <p:nvPr/>
-        </p:nvSpPr>
-        <p:spPr>
-          <a:xfrm>
-            <a:off x="3746500" y="2348111"/>
-            <a:ext cx="2007933" cy="309860"/>
-          </a:xfrm>
-          <a:prstGeom prst="rect">
-            <a:avLst/>
-          </a:prstGeom>
-          <a:noFill/>
-          <a:ln/>
-        </p:spPr>
-        <p:txBody>
-          <a:bodyPr wrap="square" lIns="0" tIns="0" rIns="0" bIns="0" rtlCol="0" anchor="t">
-            <a:normAutofit/>
-          </a:bodyPr>
-          <a:lstStyle/>
-          <a:p>
-            <a:pPr algn="l" indent="0" marL="0">
+          <p:cNvPr id="12" name="Text 9">
+            <a:extLst xmlns:a="http://schemas.openxmlformats.org/drawingml/2006/main">
+              <a:ext uri="{FF2B5EF4-FFF2-40B4-BE49-F238E27FC236}">
+                <a16:creationId xmlns:a16="http://schemas.microsoft.com/office/drawing/2014/main" id="{595F99E8-28C4-47B0-832A-A639AC7F7C88}"/>
+              </a:ext>
+            </a:extLst>
+          </p:cNvPr>
+          <p:cNvSpPr>
+            <a:spLocks xmlns:a="http://schemas.openxmlformats.org/drawingml/2006/main" noGrp="1"/>
+          </p:cNvSpPr>
+          <p:nvPr/>
+        </p:nvSpPr>
+        <p:spPr>
+          <a:xfrm xmlns:a="http://schemas.openxmlformats.org/drawingml/2006/main">
+            <a:off x="6496050" y="2348111"/>
+            <a:ext cx="4667250" cy="309860"/>
+          </a:xfrm>
+          <a:prstGeom xmlns:a="http://schemas.openxmlformats.org/drawingml/2006/main" prst="rect">
+            <a:avLst/>
+          </a:prstGeom>
+          <a:noFill xmlns:a="http://schemas.openxmlformats.org/drawingml/2006/main"/>
+        </p:spPr>
+        <p:txBody>
+          <a:bodyPr xmlns:a="http://schemas.openxmlformats.org/drawingml/2006/main" wrap="square" lIns="0" tIns="0" rIns="0" bIns="0" anchor="t">
+            <a:normAutofit fontScale="100000"/>
+          </a:bodyPr>
+          <a:lstStyle xmlns:a="http://schemas.openxmlformats.org/drawingml/2006/main"/>
+          <a:p xmlns:a="http://schemas.openxmlformats.org/drawingml/2006/main">
+            <a:pPr marL="0" indent="0" algn="l">
               <a:lnSpc>
                 <a:spcPts val="2240"/>
               </a:lnSpc>
               <a:buNone/>
             </a:pPr>
             <a:r>
-              <a:rPr lang="en-US" sz="1600" b="1" dirty="0">
+              <a:rPr sz="1600" b="1">
                 <a:solidFill>
                   <a:srgbClr val="0A5CA8"/>
                 </a:solidFill>
-                <a:latin typeface="IBM Plex Mono" pitchFamily="49" charset="0"/>
-                <a:ea typeface="IBM Plex Mono" pitchFamily="49" charset="-122"/>
-                <a:cs typeface="IBM Plex Mono" pitchFamily="49" charset="-120"/>
-              </a:rPr>
-              <a:t>КТ2</a:t>
-            </a:r>
-            <a:endParaRPr lang="en-US" sz="1600" dirty="0"/>
-          </a:p>
-        </p:txBody>
-      </p:sp>
-      <p:sp>
-        <p:nvSpPr>
-          <p:cNvPr id="13" name="Text 10"/>
-          <p:cNvSpPr/>
-          <p:nvPr/>
-        </p:nvSpPr>
-        <p:spPr>
-          <a:xfrm>
-            <a:off x="3746500" y="2708771"/>
-            <a:ext cx="2007933" cy="487561"/>
-          </a:xfrm>
-          <a:prstGeom prst="rect">
-            <a:avLst/>
-          </a:prstGeom>
-          <a:noFill/>
-          <a:ln/>
-        </p:spPr>
-        <p:txBody>
-          <a:bodyPr wrap="square" lIns="0" tIns="0" rIns="0" bIns="0" rtlCol="0" anchor="t">
-            <a:normAutofit/>
-          </a:bodyPr>
-          <a:lstStyle/>
-          <a:p>
-            <a:pPr algn="l" indent="0" marL="0">
+                <a:latin typeface="IBM Plex Mono"/>
+                <a:ea typeface="IBM Plex Mono"/>
+                <a:cs typeface="IBM Plex Mono"/>
+              </a:rPr>
+              <a:t>КТ2 · 8. ВЕЖБА</a:t>
+            </a:r>
+            <a:endParaRPr sz="1600"/>
+          </a:p>
+        </p:txBody>
+      </p:sp>
+      <p:sp>
+        <p:nvSpPr>
+          <p:cNvPr id="13" name="Text 10">
+            <a:extLst xmlns:a="http://schemas.openxmlformats.org/drawingml/2006/main">
+              <a:ext uri="{FF2B5EF4-FFF2-40B4-BE49-F238E27FC236}">
+                <a16:creationId xmlns:a16="http://schemas.microsoft.com/office/drawing/2014/main" id="{2903FC0B-A433-42C3-8B79-E165DF973C91}"/>
+              </a:ext>
+            </a:extLst>
+          </p:cNvPr>
+          <p:cNvSpPr>
+            <a:spLocks xmlns:a="http://schemas.openxmlformats.org/drawingml/2006/main" noGrp="1"/>
+          </p:cNvSpPr>
+          <p:nvPr/>
+        </p:nvSpPr>
+        <p:spPr>
+          <a:xfrm xmlns:a="http://schemas.openxmlformats.org/drawingml/2006/main">
+            <a:off x="6496050" y="2708771"/>
+            <a:ext cx="4667250" cy="285750"/>
+          </a:xfrm>
+          <a:prstGeom xmlns:a="http://schemas.openxmlformats.org/drawingml/2006/main" prst="rect">
+            <a:avLst/>
+          </a:prstGeom>
+          <a:noFill xmlns:a="http://schemas.openxmlformats.org/drawingml/2006/main"/>
+        </p:spPr>
+        <p:txBody>
+          <a:bodyPr xmlns:a="http://schemas.openxmlformats.org/drawingml/2006/main" wrap="square" lIns="0" tIns="0" rIns="0" bIns="0" anchor="t">
+            <a:normAutofit fontScale="100000"/>
+          </a:bodyPr>
+          <a:lstStyle xmlns:a="http://schemas.openxmlformats.org/drawingml/2006/main"/>
+          <a:p xmlns:a="http://schemas.openxmlformats.org/drawingml/2006/main">
+            <a:pPr marL="0" indent="0" algn="l">
               <a:lnSpc>
                 <a:spcPts val="1820"/>
               </a:lnSpc>
               <a:buNone/>
             </a:pPr>
             <a:r>
-              <a:rPr lang="en-US" sz="1400" b="1" dirty="0">
+              <a:rPr sz="1400" b="1">
                 <a:solidFill>
                   <a:srgbClr val="13202D"/>
                 </a:solidFill>
-                <a:latin typeface="IBM Plex Sans" pitchFamily="34" charset="0"/>
-                <a:ea typeface="IBM Plex Sans" pitchFamily="34" charset="-122"/>
-                <a:cs typeface="IBM Plex Sans" pitchFamily="34" charset="-120"/>
-              </a:rPr>
-              <a:t>Архитектура и функционално језгро</a:t>
-            </a:r>
-            <a:endParaRPr lang="en-US" sz="1400" dirty="0"/>
-          </a:p>
-        </p:txBody>
-      </p:sp>
-      <p:sp>
-        <p:nvSpPr>
-          <p:cNvPr id="14" name="Text 11"/>
-          <p:cNvSpPr/>
-          <p:nvPr/>
-        </p:nvSpPr>
-        <p:spPr>
-          <a:xfrm>
-            <a:off x="3746500" y="3554413"/>
-            <a:ext cx="817959" cy="264120"/>
-          </a:xfrm>
-          <a:custGeom>
-            <a:avLst/>
-            <a:gdLst/>
-            <a:ahLst/>
-            <a:cxnLst/>
-            <a:rect l="l" t="t" r="r" b="b"/>
-            <a:pathLst>
-              <a:path w="817959" h="264120">
-                <a:moveTo>
-                  <a:pt x="132060" y="0"/>
-                </a:moveTo>
-                <a:lnTo>
-                  <a:pt x="685899" y="0"/>
-                </a:lnTo>
-                <a:arcTo hR="132060" wR="132060" stAng="16200000" swAng="5400000"/>
-                <a:lnTo>
-                  <a:pt x="817959" y="132060"/>
-                </a:lnTo>
-                <a:arcTo hR="132060" wR="132060" stAng="0" swAng="5400000"/>
-                <a:lnTo>
-                  <a:pt x="132060" y="264120"/>
-                </a:lnTo>
-                <a:arcTo hR="132060" wR="132060" stAng="5400000" swAng="5400000"/>
-                <a:lnTo>
-                  <a:pt x="0" y="132060"/>
-                </a:lnTo>
-                <a:arcTo hR="132060" wR="132060" stAng="10800000" swAng="5400000"/>
-                <a:close/>
-              </a:path>
-            </a:pathLst>
-          </a:custGeom>
-          <a:solidFill>
+                <a:latin typeface="IBM Plex Sans"/>
+                <a:ea typeface="IBM Plex Sans"/>
+                <a:cs typeface="IBM Plex Sans"/>
+              </a:rPr>
+              <a:t>Завршна демонстрација</a:t>
+            </a:r>
+            <a:endParaRPr sz="1400"/>
+          </a:p>
+        </p:txBody>
+      </p:sp>
+      <p:sp>
+        <p:nvSpPr>
+          <p:cNvPr id="14" name="Text 11">
+            <a:extLst xmlns:a="http://schemas.openxmlformats.org/drawingml/2006/main">
+              <a:ext uri="{FF2B5EF4-FFF2-40B4-BE49-F238E27FC236}">
+                <a16:creationId xmlns:a16="http://schemas.microsoft.com/office/drawing/2014/main" id="{B2018830-065E-4114-8922-FDED7D198BF7}"/>
+              </a:ext>
+            </a:extLst>
+          </p:cNvPr>
+          <p:cNvSpPr>
+            <a:spLocks xmlns:a="http://schemas.openxmlformats.org/drawingml/2006/main" noGrp="1"/>
+          </p:cNvSpPr>
+          <p:nvPr/>
+        </p:nvSpPr>
+        <p:spPr>
+          <a:xfrm xmlns:a="http://schemas.openxmlformats.org/drawingml/2006/main">
+            <a:off x="6496050" y="3676650"/>
+            <a:ext cx="1028700" cy="264128"/>
+          </a:xfrm>
+          <a:prstGeom xmlns:a="http://schemas.openxmlformats.org/drawingml/2006/main" prst="roundRect">
+            <a:avLst>
+              <a:gd name="adj" fmla="val 50000"/>
+            </a:avLst>
+          </a:prstGeom>
+          <a:solidFill xmlns:a="http://schemas.openxmlformats.org/drawingml/2006/main">
             <a:srgbClr val="DCE8F4"/>
           </a:solidFill>
-          <a:ln/>
-        </p:spPr>
-        <p:txBody>
-          <a:bodyPr wrap="none" lIns="0" tIns="0" rIns="0" bIns="0" rtlCol="0" anchor="ctr">
-            <a:normAutofit/>
-          </a:bodyPr>
-          <a:lstStyle/>
-          <a:p>
-            <a:pPr algn="ctr" indent="0" marL="0">
+        </p:spPr>
+        <p:txBody>
+          <a:bodyPr xmlns:a="http://schemas.openxmlformats.org/drawingml/2006/main" wrap="none" lIns="0" tIns="0" rIns="0" bIns="0" anchor="ctr">
+            <a:normAutofit fontScale="100000"/>
+          </a:bodyPr>
+          <a:lstStyle xmlns:a="http://schemas.openxmlformats.org/drawingml/2006/main"/>
+          <a:p xmlns:a="http://schemas.openxmlformats.org/drawingml/2006/main">
+            <a:pPr marL="0" indent="0" algn="ctr">
               <a:lnSpc>
                 <a:spcPts val="1680"/>
               </a:lnSpc>
               <a:buNone/>
             </a:pPr>
             <a:r>
-              <a:rPr lang="en-US" sz="1200" b="1" dirty="0">
+              <a:rPr sz="1200" b="1">
                 <a:solidFill>
                   <a:srgbClr val="0A5CA8"/>
                 </a:solidFill>
-                <a:latin typeface="IBM Plex Mono" pitchFamily="49" charset="0"/>
-                <a:ea typeface="IBM Plex Mono" pitchFamily="49" charset="-122"/>
-                <a:cs typeface="IBM Plex Mono" pitchFamily="49" charset="-120"/>
-              </a:rPr>
-              <a:t>3 поена</a:t>
-            </a:r>
-            <a:endParaRPr lang="en-US" sz="1200" dirty="0"/>
+                <a:latin typeface="IBM Plex Mono"/>
+                <a:ea typeface="IBM Plex Mono"/>
+                <a:cs typeface="IBM Plex Mono"/>
+              </a:rPr>
+              <a:t>10 поена</a:t>
+            </a:r>
+            <a:endParaRPr sz="1200"/>
           </a:p>
         </p:txBody>
       </p:sp>
       <p:pic>
         <p:nvPicPr>
-          <p:cNvPr id="15" name="Image 1" descr="arrow-right">    </p:cNvPr>
+          <p:cNvPr id="15" name="Image 1">
+            <a:extLst xmlns:a="http://schemas.openxmlformats.org/drawingml/2006/main">
+              <a:ext uri="{FF2B5EF4-FFF2-40B4-BE49-F238E27FC236}">
+                <a16:creationId xmlns:a16="http://schemas.microsoft.com/office/drawing/2014/main" id="{665EFB76-78AD-4DCA-A6C6-3BDCA2A17111}"/>
+              </a:ext>
+            </a:extLst>
+          </p:cNvPr>
           <p:cNvPicPr>
-            <a:picLocks noChangeAspect="1"/>
+            <a:picLocks xmlns:a="http://schemas.openxmlformats.org/drawingml/2006/main" noChangeAspect="1"/>
           </p:cNvPicPr>
           <p:nvPr/>
         </p:nvPicPr>
         <p:blipFill>
-          <a:blip r:embed="rId2"/>
-          <a:srcRect l="0" r="0" t="0" b="0"/>
-          <a:stretch/>
+          <a:blip xmlns:r="http://schemas.openxmlformats.org/officeDocument/2006/relationships" xmlns:a="http://schemas.openxmlformats.org/drawingml/2006/main" r:embed="R10b785b3b4944f92"/>
+          <a:srcRect xmlns:a="http://schemas.openxmlformats.org/drawingml/2006/main" l="0" t="0" r="0" b="0"/>
+          <a:stretch xmlns:a="http://schemas.openxmlformats.org/drawingml/2006/main"/>
         </p:blipFill>
         <p:spPr>
-          <a:xfrm>
+          <a:xfrm xmlns:a="http://schemas.openxmlformats.org/drawingml/2006/main">
             <a:off x="5981700" y="3026172"/>
             <a:ext cx="228600" cy="114300"/>
           </a:xfrm>
-          <a:prstGeom prst="rect">
+          <a:prstGeom xmlns:a="http://schemas.openxmlformats.org/drawingml/2006/main" prst="rect">
             <a:avLst/>
           </a:prstGeom>
         </p:spPr>
       </p:pic>
       <p:sp>
         <p:nvSpPr>
-          <p:cNvPr id="16" name="Shape 12"/>
-          <p:cNvSpPr/>
-          <p:nvPr/>
-        </p:nvSpPr>
-        <p:spPr>
-          <a:xfrm>
-            <a:off x="6315075" y="2179836"/>
-            <a:ext cx="2311400" cy="1806972"/>
-          </a:xfrm>
-          <a:prstGeom prst="roundRect">
+          <p:cNvPr id="25" name="Shape 20">
+            <a:extLst xmlns:a="http://schemas.openxmlformats.org/drawingml/2006/main">
+              <a:ext uri="{FF2B5EF4-FFF2-40B4-BE49-F238E27FC236}">
+                <a16:creationId xmlns:a16="http://schemas.microsoft.com/office/drawing/2014/main" id="{41A3CE54-FD9E-4E65-B5E1-D3D80C952EA0}"/>
+              </a:ext>
+            </a:extLst>
+          </p:cNvPr>
+          <p:cNvSpPr>
+            <a:spLocks xmlns:a="http://schemas.openxmlformats.org/drawingml/2006/main" noGrp="1"/>
+          </p:cNvSpPr>
+          <p:nvPr/>
+        </p:nvSpPr>
+        <p:spPr>
+          <a:xfrm xmlns:a="http://schemas.openxmlformats.org/drawingml/2006/main">
+            <a:off x="812800" y="4243983"/>
+            <a:ext cx="3302000" cy="1005681"/>
+          </a:xfrm>
+          <a:prstGeom xmlns:a="http://schemas.openxmlformats.org/drawingml/2006/main" prst="roundRect">
             <a:avLst>
-              <a:gd name="adj" fmla="val 5447"/>
+              <a:gd name="adj" fmla="val 10103"/>
             </a:avLst>
           </a:prstGeom>
-          <a:solidFill>
-            <a:srgbClr val="FCFCFB"/>
+          <a:solidFill xmlns:a="http://schemas.openxmlformats.org/drawingml/2006/main">
+            <a:srgbClr val="EBF0F5"/>
           </a:solidFill>
-          <a:ln w="6350">
+        </p:spPr>
+      </p:sp>
+      <p:sp>
+        <p:nvSpPr>
+          <p:cNvPr id="26" name="Text 21">
+            <a:extLst xmlns:a="http://schemas.openxmlformats.org/drawingml/2006/main">
+              <a:ext uri="{FF2B5EF4-FFF2-40B4-BE49-F238E27FC236}">
+                <a16:creationId xmlns:a16="http://schemas.microsoft.com/office/drawing/2014/main" id="{8CA1D047-7C62-4D8A-862F-6F9C46CA1385}"/>
+              </a:ext>
+            </a:extLst>
+          </p:cNvPr>
+          <p:cNvSpPr>
+            <a:spLocks xmlns:a="http://schemas.openxmlformats.org/drawingml/2006/main" noGrp="1"/>
+          </p:cNvSpPr>
+          <p:nvPr/>
+        </p:nvSpPr>
+        <p:spPr>
+          <a:xfrm xmlns:a="http://schemas.openxmlformats.org/drawingml/2006/main">
+            <a:off x="1016000" y="4543623"/>
+            <a:ext cx="585311" cy="431800"/>
+          </a:xfrm>
+          <a:prstGeom xmlns:a="http://schemas.openxmlformats.org/drawingml/2006/main" prst="rect">
+            <a:avLst/>
+          </a:prstGeom>
+          <a:noFill xmlns:a="http://schemas.openxmlformats.org/drawingml/2006/main"/>
+        </p:spPr>
+        <p:txBody>
+          <a:bodyPr xmlns:a="http://schemas.openxmlformats.org/drawingml/2006/main" wrap="square" lIns="0" tIns="0" rIns="0" bIns="0" anchor="t">
+            <a:normAutofit/>
+          </a:bodyPr>
+          <a:lstStyle xmlns:a="http://schemas.openxmlformats.org/drawingml/2006/main"/>
+          <a:p xmlns:a="http://schemas.openxmlformats.org/drawingml/2006/main">
+            <a:pPr marL="0" indent="0" algn="l">
+              <a:lnSpc>
+                <a:spcPts val="3200"/>
+              </a:lnSpc>
+              <a:buNone/>
+            </a:pPr>
+            <a:r>
+              <a:rPr sz="3200">
+                <a:solidFill>
+                  <a:srgbClr val="0A5CA8"/>
+                </a:solidFill>
+                <a:latin typeface="IBM Plex Mono"/>
+                <a:ea typeface="IBM Plex Mono"/>
+                <a:cs typeface="IBM Plex Mono"/>
+              </a:rPr>
+              <a:t>20</a:t>
+            </a:r>
+            <a:endParaRPr sz="3200"/>
+          </a:p>
+        </p:txBody>
+      </p:sp>
+      <p:sp>
+        <p:nvSpPr>
+          <p:cNvPr id="27" name="Text 22">
+            <a:extLst xmlns:a="http://schemas.openxmlformats.org/drawingml/2006/main">
+              <a:ext uri="{FF2B5EF4-FFF2-40B4-BE49-F238E27FC236}">
+                <a16:creationId xmlns:a16="http://schemas.microsoft.com/office/drawing/2014/main" id="{79F7195F-F2C0-4CCF-A3B7-4BB13EE60255}"/>
+              </a:ext>
+            </a:extLst>
+          </p:cNvPr>
+          <p:cNvSpPr>
+            <a:spLocks xmlns:a="http://schemas.openxmlformats.org/drawingml/2006/main" noGrp="1"/>
+          </p:cNvSpPr>
+          <p:nvPr/>
+        </p:nvSpPr>
+        <p:spPr>
+          <a:xfrm xmlns:a="http://schemas.openxmlformats.org/drawingml/2006/main">
+            <a:off x="1656159" y="4426843"/>
+            <a:ext cx="2323104" cy="665361"/>
+          </a:xfrm>
+          <a:prstGeom xmlns:a="http://schemas.openxmlformats.org/drawingml/2006/main" prst="rect">
+            <a:avLst/>
+          </a:prstGeom>
+          <a:noFill xmlns:a="http://schemas.openxmlformats.org/drawingml/2006/main"/>
+        </p:spPr>
+        <p:txBody>
+          <a:bodyPr xmlns:a="http://schemas.openxmlformats.org/drawingml/2006/main" wrap="square" lIns="0" tIns="0" rIns="0" bIns="0" anchor="t">
+            <a:normAutofit/>
+          </a:bodyPr>
+          <a:lstStyle xmlns:a="http://schemas.openxmlformats.org/drawingml/2006/main"/>
+          <a:p xmlns:a="http://schemas.openxmlformats.org/drawingml/2006/main">
+            <a:pPr marL="0" indent="0" algn="l">
+              <a:lnSpc>
+                <a:spcPts val="1680"/>
+              </a:lnSpc>
+              <a:buNone/>
+            </a:pPr>
+            <a:r>
+              <a:rPr sz="1200">
+                <a:solidFill>
+                  <a:srgbClr val="44505D"/>
+                </a:solidFill>
+                <a:latin typeface="IBM Plex Sans"/>
+                <a:ea typeface="IBM Plex Sans"/>
+                <a:cs typeface="IBM Plex Sans"/>
+              </a:rPr>
+              <a:t>поена укупно на контролним тачкама, у оквиру 71 пројектног поена</a:t>
+            </a:r>
+            <a:endParaRPr sz="1200"/>
+          </a:p>
+        </p:txBody>
+      </p:sp>
+      <p:sp>
+        <p:nvSpPr>
+          <p:cNvPr id="28" name="Shape 23">
+            <a:extLst xmlns:a="http://schemas.openxmlformats.org/drawingml/2006/main">
+              <a:ext uri="{FF2B5EF4-FFF2-40B4-BE49-F238E27FC236}">
+                <a16:creationId xmlns:a16="http://schemas.microsoft.com/office/drawing/2014/main" id="{683F5DA6-3BD8-445A-B808-D3FB63DDC01D}"/>
+              </a:ext>
+            </a:extLst>
+          </p:cNvPr>
+          <p:cNvSpPr>
+            <a:spLocks xmlns:a="http://schemas.openxmlformats.org/drawingml/2006/main" noGrp="1"/>
+          </p:cNvSpPr>
+          <p:nvPr/>
+        </p:nvSpPr>
+        <p:spPr>
+          <a:xfrm xmlns:a="http://schemas.openxmlformats.org/drawingml/2006/main">
+            <a:off x="4270375" y="4247158"/>
+            <a:ext cx="7105650" cy="999331"/>
+          </a:xfrm>
+          <a:prstGeom xmlns:a="http://schemas.openxmlformats.org/drawingml/2006/main" prst="roundRect">
+            <a:avLst>
+              <a:gd name="adj" fmla="val 9849"/>
+            </a:avLst>
+          </a:prstGeom>
+          <a:solidFill xmlns:a="http://schemas.openxmlformats.org/drawingml/2006/main">
+            <a:srgbClr val="FBF1E6"/>
+          </a:solidFill>
+          <a:ln xmlns:a="http://schemas.openxmlformats.org/drawingml/2006/main" w="6350">
+            <a:solidFill>
+              <a:srgbClr val="E9B98C"/>
+            </a:solidFill>
+            <a:prstDash val="solid"/>
+          </a:ln>
+        </p:spPr>
+      </p:sp>
+      <p:sp>
+        <p:nvSpPr>
+          <p:cNvPr id="29" name="Text 24">
+            <a:extLst xmlns:a="http://schemas.openxmlformats.org/drawingml/2006/main">
+              <a:ext uri="{FF2B5EF4-FFF2-40B4-BE49-F238E27FC236}">
+                <a16:creationId xmlns:a16="http://schemas.microsoft.com/office/drawing/2014/main" id="{104124A3-0A63-426C-A3C6-4E5C7FD5082E}"/>
+              </a:ext>
+            </a:extLst>
+          </p:cNvPr>
+          <p:cNvSpPr>
+            <a:spLocks xmlns:a="http://schemas.openxmlformats.org/drawingml/2006/main" noGrp="1"/>
+          </p:cNvSpPr>
+          <p:nvPr/>
+        </p:nvSpPr>
+        <p:spPr>
+          <a:xfrm xmlns:a="http://schemas.openxmlformats.org/drawingml/2006/main">
+            <a:off x="4476750" y="4390033"/>
+            <a:ext cx="6893687" cy="238720"/>
+          </a:xfrm>
+          <a:prstGeom xmlns:a="http://schemas.openxmlformats.org/drawingml/2006/main" prst="rect">
+            <a:avLst/>
+          </a:prstGeom>
+          <a:noFill xmlns:a="http://schemas.openxmlformats.org/drawingml/2006/main"/>
+        </p:spPr>
+        <p:txBody>
+          <a:bodyPr xmlns:a="http://schemas.openxmlformats.org/drawingml/2006/main" wrap="square" lIns="0" tIns="0" rIns="0" bIns="0" anchor="t">
+            <a:normAutofit/>
+          </a:bodyPr>
+          <a:lstStyle xmlns:a="http://schemas.openxmlformats.org/drawingml/2006/main"/>
+          <a:p xmlns:a="http://schemas.openxmlformats.org/drawingml/2006/main">
+            <a:pPr marL="0" indent="0" algn="l">
+              <a:lnSpc>
+                <a:spcPts val="1680"/>
+              </a:lnSpc>
+              <a:buNone/>
+            </a:pPr>
+            <a:r>
+              <a:rPr sz="1200" b="1" spc="100">
+                <a:solidFill>
+                  <a:srgbClr val="A8520A"/>
+                </a:solidFill>
+                <a:latin typeface="IBM Plex Mono"/>
+                <a:ea typeface="IBM Plex Mono"/>
+                <a:cs typeface="IBM Plex Mono"/>
+              </a:rPr>
+              <a:t>ДОДАТНИ ПОЕНИ</a:t>
+            </a:r>
+            <a:endParaRPr sz="1200"/>
+          </a:p>
+        </p:txBody>
+      </p:sp>
+      <p:sp>
+        <p:nvSpPr>
+          <p:cNvPr id="30" name="Text 25">
+            <a:extLst xmlns:a="http://schemas.openxmlformats.org/drawingml/2006/main">
+              <a:ext uri="{FF2B5EF4-FFF2-40B4-BE49-F238E27FC236}">
+                <a16:creationId xmlns:a16="http://schemas.microsoft.com/office/drawing/2014/main" id="{C11B94E6-8096-4AB2-AA12-E0C107B531DE}"/>
+              </a:ext>
+            </a:extLst>
+          </p:cNvPr>
+          <p:cNvSpPr>
+            <a:spLocks xmlns:a="http://schemas.openxmlformats.org/drawingml/2006/main" noGrp="1"/>
+          </p:cNvSpPr>
+          <p:nvPr/>
+        </p:nvSpPr>
+        <p:spPr>
+          <a:xfrm xmlns:a="http://schemas.openxmlformats.org/drawingml/2006/main">
+            <a:off x="4476750" y="4641453"/>
+            <a:ext cx="6893687" cy="487561"/>
+          </a:xfrm>
+          <a:prstGeom xmlns:a="http://schemas.openxmlformats.org/drawingml/2006/main" prst="rect">
+            <a:avLst/>
+          </a:prstGeom>
+          <a:noFill xmlns:a="http://schemas.openxmlformats.org/drawingml/2006/main"/>
+        </p:spPr>
+        <p:txBody>
+          <a:bodyPr xmlns:a="http://schemas.openxmlformats.org/drawingml/2006/main" wrap="square" lIns="0" tIns="0" rIns="0" bIns="0" anchor="t">
+            <a:normAutofit/>
+          </a:bodyPr>
+          <a:lstStyle xmlns:a="http://schemas.openxmlformats.org/drawingml/2006/main"/>
+          <a:p xmlns:a="http://schemas.openxmlformats.org/drawingml/2006/main">
+            <a:pPr marL="0" indent="0" algn="l">
+              <a:lnSpc>
+                <a:spcPts val="1820"/>
+              </a:lnSpc>
+              <a:buNone/>
+            </a:pPr>
+            <a:r>
+              <a:rPr sz="1300">
+                <a:solidFill>
+                  <a:srgbClr val="13202D"/>
+                </a:solidFill>
+                <a:latin typeface="IBM Plex Sans"/>
+                <a:ea typeface="IBM Plex Sans"/>
+                <a:cs typeface="IBM Plex Sans"/>
+              </a:rPr>
+              <a:t>Студент може остварити до 5 додатних поена за активност и ангажовање на настави. Додатни поени допуњују пројектни резултат највише до 71 поена.</a:t>
+            </a:r>
+            <a:endParaRPr sz="1300"/>
+          </a:p>
+        </p:txBody>
+      </p:sp>
+      <p:sp>
+        <p:nvSpPr>
+          <p:cNvPr id="31" name="Shape 26">
+            <a:extLst xmlns:a="http://schemas.openxmlformats.org/drawingml/2006/main">
+              <a:ext uri="{FF2B5EF4-FFF2-40B4-BE49-F238E27FC236}">
+                <a16:creationId xmlns:a16="http://schemas.microsoft.com/office/drawing/2014/main" id="{B37FB643-D5A6-4E47-B7A8-B784D6BA914C}"/>
+              </a:ext>
+            </a:extLst>
+          </p:cNvPr>
+          <p:cNvSpPr>
+            <a:spLocks xmlns:a="http://schemas.openxmlformats.org/drawingml/2006/main" noGrp="1"/>
+          </p:cNvSpPr>
+          <p:nvPr/>
+        </p:nvSpPr>
+        <p:spPr>
+          <a:xfrm xmlns:a="http://schemas.openxmlformats.org/drawingml/2006/main">
+            <a:off x="812800" y="6209705"/>
+            <a:ext cx="10566400" cy="0"/>
+          </a:xfrm>
+          <a:prstGeom xmlns:a="http://schemas.openxmlformats.org/drawingml/2006/main" prst="line">
+            <a:avLst/>
+          </a:prstGeom>
+          <a:noFill xmlns:a="http://schemas.openxmlformats.org/drawingml/2006/main"/>
+          <a:ln xmlns:a="http://schemas.openxmlformats.org/drawingml/2006/main" w="6350">
             <a:solidFill>
               <a:srgbClr val="D3DAE1"/>
             </a:solidFill>
@@ -11766,719 +11947,627 @@
       </p:sp>
       <p:sp>
         <p:nvSpPr>
-          <p:cNvPr id="17" name="Text 13"/>
-          <p:cNvSpPr/>
-          <p:nvPr/>
-        </p:nvSpPr>
-        <p:spPr>
-          <a:xfrm>
-            <a:off x="6496050" y="2348111"/>
-            <a:ext cx="2007933" cy="309860"/>
-          </a:xfrm>
-          <a:prstGeom prst="rect">
-            <a:avLst/>
-          </a:prstGeom>
-          <a:noFill/>
-          <a:ln/>
-        </p:spPr>
-        <p:txBody>
-          <a:bodyPr wrap="square" lIns="0" tIns="0" rIns="0" bIns="0" rtlCol="0" anchor="t">
-            <a:normAutofit/>
-          </a:bodyPr>
-          <a:lstStyle/>
-          <a:p>
-            <a:pPr algn="l" indent="0" marL="0">
-              <a:lnSpc>
-                <a:spcPts val="2240"/>
-              </a:lnSpc>
-              <a:buNone/>
-            </a:pPr>
-            <a:r>
-              <a:rPr lang="en-US" sz="1600" b="1" dirty="0">
-                <a:solidFill>
-                  <a:srgbClr val="0A5CA8"/>
-                </a:solidFill>
-                <a:latin typeface="IBM Plex Mono" pitchFamily="49" charset="0"/>
-                <a:ea typeface="IBM Plex Mono" pitchFamily="49" charset="-122"/>
-                <a:cs typeface="IBM Plex Mono" pitchFamily="49" charset="-120"/>
-              </a:rPr>
-              <a:t>КТ3</a:t>
-            </a:r>
-            <a:endParaRPr lang="en-US" sz="1600" dirty="0"/>
-          </a:p>
-        </p:txBody>
-      </p:sp>
-      <p:sp>
-        <p:nvSpPr>
-          <p:cNvPr id="18" name="Text 14"/>
-          <p:cNvSpPr/>
-          <p:nvPr/>
-        </p:nvSpPr>
-        <p:spPr>
-          <a:xfrm>
-            <a:off x="6496050" y="2708771"/>
-            <a:ext cx="2007933" cy="718641"/>
-          </a:xfrm>
-          <a:prstGeom prst="rect">
-            <a:avLst/>
-          </a:prstGeom>
-          <a:noFill/>
-          <a:ln/>
-        </p:spPr>
-        <p:txBody>
-          <a:bodyPr wrap="square" lIns="0" tIns="0" rIns="0" bIns="0" rtlCol="0" anchor="t">
-            <a:normAutofit/>
-          </a:bodyPr>
-          <a:lstStyle/>
-          <a:p>
-            <a:pPr algn="l" indent="0" marL="0">
-              <a:lnSpc>
-                <a:spcPts val="1820"/>
-              </a:lnSpc>
-              <a:buNone/>
-            </a:pPr>
-            <a:r>
-              <a:rPr lang="en-US" sz="1400" b="1" dirty="0">
-                <a:solidFill>
-                  <a:srgbClr val="13202D"/>
-                </a:solidFill>
-                <a:latin typeface="IBM Plex Sans" pitchFamily="34" charset="0"/>
-                <a:ea typeface="IBM Plex Sans" pitchFamily="34" charset="-122"/>
-                <a:cs typeface="IBM Plex Sans" pitchFamily="34" charset="-120"/>
-              </a:rPr>
-              <a:t>Тестирање и стабилна верзија функционалног језгра</a:t>
-            </a:r>
-            <a:endParaRPr lang="en-US" sz="1400" dirty="0"/>
-          </a:p>
-        </p:txBody>
-      </p:sp>
-      <p:sp>
-        <p:nvSpPr>
-          <p:cNvPr id="19" name="Text 15"/>
-          <p:cNvSpPr/>
-          <p:nvPr/>
-        </p:nvSpPr>
-        <p:spPr>
-          <a:xfrm>
-            <a:off x="6496050" y="3554413"/>
-            <a:ext cx="817959" cy="264120"/>
-          </a:xfrm>
-          <a:custGeom>
-            <a:avLst/>
-            <a:gdLst/>
-            <a:ahLst/>
-            <a:cxnLst/>
-            <a:rect l="l" t="t" r="r" b="b"/>
-            <a:pathLst>
-              <a:path w="817959" h="264120">
-                <a:moveTo>
-                  <a:pt x="132060" y="0"/>
-                </a:moveTo>
-                <a:lnTo>
-                  <a:pt x="685899" y="0"/>
-                </a:lnTo>
-                <a:arcTo hR="132060" wR="132060" stAng="16200000" swAng="5400000"/>
-                <a:lnTo>
-                  <a:pt x="817959" y="132060"/>
-                </a:lnTo>
-                <a:arcTo hR="132060" wR="132060" stAng="0" swAng="5400000"/>
-                <a:lnTo>
-                  <a:pt x="132060" y="264120"/>
-                </a:lnTo>
-                <a:arcTo hR="132060" wR="132060" stAng="5400000" swAng="5400000"/>
-                <a:lnTo>
-                  <a:pt x="0" y="132060"/>
-                </a:lnTo>
-                <a:arcTo hR="132060" wR="132060" stAng="10800000" swAng="5400000"/>
-                <a:close/>
-              </a:path>
-            </a:pathLst>
-          </a:custGeom>
-          <a:solidFill>
-            <a:srgbClr val="DCE8F4"/>
-          </a:solidFill>
-          <a:ln/>
-        </p:spPr>
-        <p:txBody>
-          <a:bodyPr wrap="none" lIns="0" tIns="0" rIns="0" bIns="0" rtlCol="0" anchor="ctr">
-            <a:normAutofit/>
-          </a:bodyPr>
-          <a:lstStyle/>
-          <a:p>
-            <a:pPr algn="ctr" indent="0" marL="0">
-              <a:lnSpc>
-                <a:spcPts val="1680"/>
-              </a:lnSpc>
-              <a:buNone/>
-            </a:pPr>
-            <a:r>
-              <a:rPr lang="en-US" sz="1200" b="1" dirty="0">
-                <a:solidFill>
-                  <a:srgbClr val="0A5CA8"/>
-                </a:solidFill>
-                <a:latin typeface="IBM Plex Mono" pitchFamily="49" charset="0"/>
-                <a:ea typeface="IBM Plex Mono" pitchFamily="49" charset="-122"/>
-                <a:cs typeface="IBM Plex Mono" pitchFamily="49" charset="-120"/>
-              </a:rPr>
-              <a:t>6 поена</a:t>
-            </a:r>
-            <a:endParaRPr lang="en-US" sz="1200" dirty="0"/>
-          </a:p>
-        </p:txBody>
-      </p:sp>
-      <p:pic>
-        <p:nvPicPr>
-          <p:cNvPr id="20" name="Image 2" descr="arrow-right">    </p:cNvPr>
-          <p:cNvPicPr>
-            <a:picLocks noChangeAspect="1"/>
-          </p:cNvPicPr>
-          <p:nvPr/>
-        </p:nvPicPr>
-        <p:blipFill>
-          <a:blip r:embed="rId3"/>
-          <a:srcRect l="0" r="0" t="0" b="0"/>
-          <a:stretch/>
-        </p:blipFill>
-        <p:spPr>
-          <a:xfrm>
-            <a:off x="8731250" y="3026172"/>
-            <a:ext cx="228600" cy="114300"/>
-          </a:xfrm>
-          <a:prstGeom prst="rect">
-            <a:avLst/>
-          </a:prstGeom>
-        </p:spPr>
-      </p:pic>
-      <p:sp>
-        <p:nvSpPr>
-          <p:cNvPr id="21" name="Shape 16"/>
-          <p:cNvSpPr/>
-          <p:nvPr/>
-        </p:nvSpPr>
-        <p:spPr>
-          <a:xfrm>
-            <a:off x="9064625" y="2179836"/>
-            <a:ext cx="2311400" cy="1806972"/>
-          </a:xfrm>
-          <a:prstGeom prst="roundRect">
-            <a:avLst>
-              <a:gd name="adj" fmla="val 5447"/>
-            </a:avLst>
-          </a:prstGeom>
-          <a:solidFill>
-            <a:srgbClr val="FCFCFB"/>
-          </a:solidFill>
-          <a:ln w="6350">
-            <a:solidFill>
-              <a:srgbClr val="D3DAE1"/>
-            </a:solidFill>
-            <a:prstDash val="solid"/>
-          </a:ln>
-        </p:spPr>
-      </p:sp>
-      <p:sp>
-        <p:nvSpPr>
-          <p:cNvPr id="22" name="Text 17"/>
-          <p:cNvSpPr/>
-          <p:nvPr/>
-        </p:nvSpPr>
-        <p:spPr>
-          <a:xfrm>
-            <a:off x="9245600" y="2348111"/>
-            <a:ext cx="2007933" cy="309860"/>
-          </a:xfrm>
-          <a:prstGeom prst="rect">
-            <a:avLst/>
-          </a:prstGeom>
-          <a:noFill/>
-          <a:ln/>
-        </p:spPr>
-        <p:txBody>
-          <a:bodyPr wrap="square" lIns="0" tIns="0" rIns="0" bIns="0" rtlCol="0" anchor="t">
-            <a:normAutofit/>
-          </a:bodyPr>
-          <a:lstStyle/>
-          <a:p>
-            <a:pPr algn="l" indent="0" marL="0">
-              <a:lnSpc>
-                <a:spcPts val="2240"/>
-              </a:lnSpc>
-              <a:buNone/>
-            </a:pPr>
-            <a:r>
-              <a:rPr lang="en-US" sz="1600" b="1" dirty="0">
-                <a:solidFill>
-                  <a:srgbClr val="0A5CA8"/>
-                </a:solidFill>
-                <a:latin typeface="IBM Plex Mono" pitchFamily="49" charset="0"/>
-                <a:ea typeface="IBM Plex Mono" pitchFamily="49" charset="-122"/>
-                <a:cs typeface="IBM Plex Mono" pitchFamily="49" charset="-120"/>
-              </a:rPr>
-              <a:t>КТ4</a:t>
-            </a:r>
-            <a:endParaRPr lang="en-US" sz="1600" dirty="0"/>
-          </a:p>
-        </p:txBody>
-      </p:sp>
-      <p:sp>
-        <p:nvSpPr>
-          <p:cNvPr id="23" name="Text 18"/>
-          <p:cNvSpPr/>
-          <p:nvPr/>
-        </p:nvSpPr>
-        <p:spPr>
-          <a:xfrm>
-            <a:off x="9245600" y="2708771"/>
-            <a:ext cx="2007933" cy="718641"/>
-          </a:xfrm>
-          <a:prstGeom prst="rect">
-            <a:avLst/>
-          </a:prstGeom>
-          <a:noFill/>
-          <a:ln/>
-        </p:spPr>
-        <p:txBody>
-          <a:bodyPr wrap="square" lIns="0" tIns="0" rIns="0" bIns="0" rtlCol="0" anchor="t">
-            <a:normAutofit/>
-          </a:bodyPr>
-          <a:lstStyle/>
-          <a:p>
-            <a:pPr algn="l" indent="0" marL="0">
-              <a:lnSpc>
-                <a:spcPts val="1820"/>
-              </a:lnSpc>
-              <a:buNone/>
-            </a:pPr>
-            <a:r>
-              <a:rPr lang="en-US" sz="1400" b="1" dirty="0">
-                <a:solidFill>
-                  <a:srgbClr val="13202D"/>
-                </a:solidFill>
-                <a:latin typeface="IBM Plex Sans" pitchFamily="34" charset="0"/>
-                <a:ea typeface="IBM Plex Sans" pitchFamily="34" charset="-122"/>
-                <a:cs typeface="IBM Plex Sans" pitchFamily="34" charset="-120"/>
-              </a:rPr>
-              <a:t>Развојни ток уз AI алате и завршна одбрана</a:t>
-            </a:r>
-            <a:endParaRPr lang="en-US" sz="1400" dirty="0"/>
-          </a:p>
-        </p:txBody>
-      </p:sp>
-      <p:sp>
-        <p:nvSpPr>
-          <p:cNvPr id="24" name="Text 19"/>
-          <p:cNvSpPr/>
-          <p:nvPr/>
-        </p:nvSpPr>
-        <p:spPr>
-          <a:xfrm>
-            <a:off x="9245600" y="3554413"/>
-            <a:ext cx="817959" cy="264120"/>
-          </a:xfrm>
-          <a:custGeom>
-            <a:avLst/>
-            <a:gdLst/>
-            <a:ahLst/>
-            <a:cxnLst/>
-            <a:rect l="l" t="t" r="r" b="b"/>
-            <a:pathLst>
-              <a:path w="817959" h="264120">
-                <a:moveTo>
-                  <a:pt x="132060" y="0"/>
-                </a:moveTo>
-                <a:lnTo>
-                  <a:pt x="685899" y="0"/>
-                </a:lnTo>
-                <a:arcTo hR="132060" wR="132060" stAng="16200000" swAng="5400000"/>
-                <a:lnTo>
-                  <a:pt x="817959" y="132060"/>
-                </a:lnTo>
-                <a:arcTo hR="132060" wR="132060" stAng="0" swAng="5400000"/>
-                <a:lnTo>
-                  <a:pt x="132060" y="264120"/>
-                </a:lnTo>
-                <a:arcTo hR="132060" wR="132060" stAng="5400000" swAng="5400000"/>
-                <a:lnTo>
-                  <a:pt x="0" y="132060"/>
-                </a:lnTo>
-                <a:arcTo hR="132060" wR="132060" stAng="10800000" swAng="5400000"/>
-                <a:close/>
-              </a:path>
-            </a:pathLst>
-          </a:custGeom>
-          <a:solidFill>
-            <a:srgbClr val="DCE8F4"/>
-          </a:solidFill>
-          <a:ln/>
-        </p:spPr>
-        <p:txBody>
-          <a:bodyPr wrap="none" lIns="0" tIns="0" rIns="0" bIns="0" rtlCol="0" anchor="ctr">
-            <a:normAutofit/>
-          </a:bodyPr>
-          <a:lstStyle/>
-          <a:p>
-            <a:pPr algn="ctr" indent="0" marL="0">
-              <a:lnSpc>
-                <a:spcPts val="1680"/>
-              </a:lnSpc>
-              <a:buNone/>
-            </a:pPr>
-            <a:r>
-              <a:rPr lang="en-US" sz="1200" b="1" dirty="0">
-                <a:solidFill>
-                  <a:srgbClr val="0A5CA8"/>
-                </a:solidFill>
-                <a:latin typeface="IBM Plex Mono" pitchFamily="49" charset="0"/>
-                <a:ea typeface="IBM Plex Mono" pitchFamily="49" charset="-122"/>
-                <a:cs typeface="IBM Plex Mono" pitchFamily="49" charset="-120"/>
-              </a:rPr>
-              <a:t>8 поена</a:t>
-            </a:r>
-            <a:endParaRPr lang="en-US" sz="1200" dirty="0"/>
-          </a:p>
-        </p:txBody>
-      </p:sp>
-      <p:sp>
-        <p:nvSpPr>
-          <p:cNvPr id="25" name="Shape 20"/>
-          <p:cNvSpPr/>
-          <p:nvPr/>
-        </p:nvSpPr>
-        <p:spPr>
-          <a:xfrm>
-            <a:off x="812800" y="4243983"/>
-            <a:ext cx="3302000" cy="1005681"/>
-          </a:xfrm>
-          <a:prstGeom prst="roundRect">
-            <a:avLst>
-              <a:gd name="adj" fmla="val 10103"/>
-            </a:avLst>
-          </a:prstGeom>
-          <a:solidFill>
-            <a:srgbClr val="EBF0F5"/>
-          </a:solidFill>
-          <a:ln/>
-        </p:spPr>
-      </p:sp>
-      <p:sp>
-        <p:nvSpPr>
-          <p:cNvPr id="26" name="Text 21"/>
-          <p:cNvSpPr/>
-          <p:nvPr/>
-        </p:nvSpPr>
-        <p:spPr>
-          <a:xfrm>
-            <a:off x="1016000" y="4543623"/>
-            <a:ext cx="585311" cy="431800"/>
-          </a:xfrm>
-          <a:prstGeom prst="rect">
-            <a:avLst/>
-          </a:prstGeom>
-          <a:noFill/>
-          <a:ln/>
-        </p:spPr>
-        <p:txBody>
-          <a:bodyPr wrap="square" lIns="0" tIns="0" rIns="0" bIns="0" rtlCol="0" anchor="t">
-            <a:normAutofit/>
-          </a:bodyPr>
-          <a:lstStyle/>
-          <a:p>
-            <a:pPr algn="l" indent="0" marL="0">
-              <a:lnSpc>
-                <a:spcPts val="3200"/>
-              </a:lnSpc>
-              <a:buNone/>
-            </a:pPr>
-            <a:r>
-              <a:rPr lang="en-US" sz="3200" dirty="0">
-                <a:solidFill>
-                  <a:srgbClr val="0A5CA8"/>
-                </a:solidFill>
-                <a:latin typeface="IBM Plex Mono" pitchFamily="49" charset="0"/>
-                <a:ea typeface="IBM Plex Mono" pitchFamily="49" charset="-122"/>
-                <a:cs typeface="IBM Plex Mono" pitchFamily="49" charset="-120"/>
-              </a:rPr>
-              <a:t>20</a:t>
-            </a:r>
-            <a:endParaRPr lang="en-US" sz="3200" dirty="0"/>
-          </a:p>
-        </p:txBody>
-      </p:sp>
-      <p:sp>
-        <p:nvSpPr>
-          <p:cNvPr id="27" name="Text 22"/>
-          <p:cNvSpPr/>
-          <p:nvPr/>
-        </p:nvSpPr>
-        <p:spPr>
-          <a:xfrm>
-            <a:off x="1656159" y="4426843"/>
-            <a:ext cx="2323104" cy="665361"/>
-          </a:xfrm>
-          <a:prstGeom prst="rect">
-            <a:avLst/>
-          </a:prstGeom>
-          <a:noFill/>
-          <a:ln/>
-        </p:spPr>
-        <p:txBody>
-          <a:bodyPr wrap="square" lIns="0" tIns="0" rIns="0" bIns="0" rtlCol="0" anchor="t">
-            <a:normAutofit/>
-          </a:bodyPr>
-          <a:lstStyle/>
-          <a:p>
-            <a:pPr algn="l" indent="0" marL="0">
-              <a:lnSpc>
-                <a:spcPts val="1680"/>
-              </a:lnSpc>
-              <a:buNone/>
-            </a:pPr>
-            <a:r>
-              <a:rPr lang="en-US" sz="1200" dirty="0">
-                <a:solidFill>
-                  <a:srgbClr val="44505D"/>
-                </a:solidFill>
-                <a:latin typeface="IBM Plex Sans" pitchFamily="34" charset="0"/>
-                <a:ea typeface="IBM Plex Sans" pitchFamily="34" charset="-122"/>
-                <a:cs typeface="IBM Plex Sans" pitchFamily="34" charset="-120"/>
-              </a:rPr>
-              <a:t>поена укупно на контролним тачкама, у оквиру 71 пројектног поена</a:t>
-            </a:r>
-            <a:endParaRPr lang="en-US" sz="1200" dirty="0"/>
-          </a:p>
-        </p:txBody>
-      </p:sp>
-      <p:sp>
-        <p:nvSpPr>
-          <p:cNvPr id="28" name="Shape 23"/>
-          <p:cNvSpPr/>
-          <p:nvPr/>
-        </p:nvSpPr>
-        <p:spPr>
-          <a:xfrm>
-            <a:off x="4270375" y="4247158"/>
-            <a:ext cx="7105650" cy="999331"/>
-          </a:xfrm>
-          <a:prstGeom prst="roundRect">
-            <a:avLst>
-              <a:gd name="adj" fmla="val 9849"/>
-            </a:avLst>
-          </a:prstGeom>
-          <a:solidFill>
-            <a:srgbClr val="FBF1E6"/>
-          </a:solidFill>
-          <a:ln w="6350">
-            <a:solidFill>
-              <a:srgbClr val="E9B98C"/>
-            </a:solidFill>
-            <a:prstDash val="solid"/>
-          </a:ln>
-        </p:spPr>
-      </p:sp>
-      <p:sp>
-        <p:nvSpPr>
-          <p:cNvPr id="29" name="Text 24"/>
-          <p:cNvSpPr/>
-          <p:nvPr/>
-        </p:nvSpPr>
-        <p:spPr>
-          <a:xfrm>
-            <a:off x="4476750" y="4390033"/>
-            <a:ext cx="6893687" cy="238720"/>
-          </a:xfrm>
-          <a:prstGeom prst="rect">
-            <a:avLst/>
-          </a:prstGeom>
-          <a:noFill/>
-          <a:ln/>
-        </p:spPr>
-        <p:txBody>
-          <a:bodyPr wrap="square" lIns="0" tIns="0" rIns="0" bIns="0" rtlCol="0" anchor="t">
-            <a:normAutofit/>
-          </a:bodyPr>
-          <a:lstStyle/>
-          <a:p>
-            <a:pPr algn="l" indent="0" marL="0">
-              <a:lnSpc>
-                <a:spcPts val="1680"/>
-              </a:lnSpc>
-              <a:buNone/>
-            </a:pPr>
-            <a:r>
-              <a:rPr lang="en-US" sz="1200" b="1" spc="100" kern="0" dirty="0">
-                <a:solidFill>
-                  <a:srgbClr val="A8520A"/>
-                </a:solidFill>
-                <a:latin typeface="IBM Plex Mono" pitchFamily="49" charset="0"/>
-                <a:ea typeface="IBM Plex Mono" pitchFamily="49" charset="-122"/>
-                <a:cs typeface="IBM Plex Mono" pitchFamily="49" charset="-120"/>
-              </a:rPr>
-              <a:t>ДОДАТНИ ПОЕНИ</a:t>
-            </a:r>
-            <a:endParaRPr lang="en-US" sz="1200" dirty="0"/>
-          </a:p>
-        </p:txBody>
-      </p:sp>
-      <p:sp>
-        <p:nvSpPr>
-          <p:cNvPr id="30" name="Text 25"/>
-          <p:cNvSpPr/>
-          <p:nvPr/>
-        </p:nvSpPr>
-        <p:spPr>
-          <a:xfrm>
-            <a:off x="4476750" y="4641453"/>
-            <a:ext cx="6893687" cy="487561"/>
-          </a:xfrm>
-          <a:prstGeom prst="rect">
-            <a:avLst/>
-          </a:prstGeom>
-          <a:noFill/>
-          <a:ln/>
-        </p:spPr>
-        <p:txBody>
-          <a:bodyPr wrap="square" lIns="0" tIns="0" rIns="0" bIns="0" rtlCol="0" anchor="t">
-            <a:normAutofit/>
-          </a:bodyPr>
-          <a:lstStyle/>
-          <a:p>
-            <a:pPr algn="l" indent="0" marL="0">
-              <a:lnSpc>
-                <a:spcPts val="1820"/>
-              </a:lnSpc>
-              <a:buNone/>
-            </a:pPr>
-            <a:r>
-              <a:rPr lang="en-US" sz="1300" dirty="0">
-                <a:solidFill>
-                  <a:srgbClr val="13202D"/>
-                </a:solidFill>
-                <a:latin typeface="IBM Plex Sans" pitchFamily="34" charset="0"/>
-                <a:ea typeface="IBM Plex Sans" pitchFamily="34" charset="-122"/>
-                <a:cs typeface="IBM Plex Sans" pitchFamily="34" charset="-120"/>
-              </a:rPr>
-              <a:t>Студент може остварити до 5 додатних поена за активност и ангажовање на настави. Додатни поени допуњују пројектни резултат највише до 71 поена.</a:t>
-            </a:r>
-            <a:endParaRPr lang="en-US" sz="1300" dirty="0"/>
-          </a:p>
-        </p:txBody>
-      </p:sp>
-      <p:sp>
-        <p:nvSpPr>
-          <p:cNvPr id="31" name="Shape 26"/>
-          <p:cNvSpPr/>
-          <p:nvPr/>
-        </p:nvSpPr>
-        <p:spPr>
-          <a:xfrm>
-            <a:off x="812800" y="6209705"/>
-            <a:ext cx="10566400" cy="0"/>
-          </a:xfrm>
-          <a:prstGeom prst="line">
-            <a:avLst/>
-          </a:prstGeom>
-          <a:noFill/>
-          <a:ln w="6350">
-            <a:solidFill>
-              <a:srgbClr val="D3DAE1"/>
-            </a:solidFill>
-            <a:prstDash val="solid"/>
-          </a:ln>
-        </p:spPr>
-      </p:sp>
-      <p:sp>
-        <p:nvSpPr>
-          <p:cNvPr id="32" name="Text 27"/>
-          <p:cNvSpPr/>
-          <p:nvPr/>
-        </p:nvSpPr>
-        <p:spPr>
-          <a:xfrm>
+          <p:cNvPr id="32" name="Text 27">
+            <a:extLst xmlns:a="http://schemas.openxmlformats.org/drawingml/2006/main">
+              <a:ext uri="{FF2B5EF4-FFF2-40B4-BE49-F238E27FC236}">
+                <a16:creationId xmlns:a16="http://schemas.microsoft.com/office/drawing/2014/main" id="{0E36C5CE-5C8D-4C9F-8CC6-52ABD28BE37E}"/>
+              </a:ext>
+            </a:extLst>
+          </p:cNvPr>
+          <p:cNvSpPr>
+            <a:spLocks xmlns:a="http://schemas.openxmlformats.org/drawingml/2006/main" noGrp="1"/>
+          </p:cNvSpPr>
+          <p:nvPr/>
+        </p:nvSpPr>
+        <p:spPr>
+          <a:xfrm xmlns:a="http://schemas.openxmlformats.org/drawingml/2006/main">
             <a:off x="812800" y="6314480"/>
             <a:ext cx="2390061" cy="238720"/>
           </a:xfrm>
-          <a:prstGeom prst="rect">
-            <a:avLst/>
-          </a:prstGeom>
-          <a:noFill/>
-          <a:ln/>
-        </p:spPr>
-        <p:txBody>
-          <a:bodyPr wrap="square" lIns="0" tIns="0" rIns="0" bIns="0" rtlCol="0" anchor="t">
-            <a:normAutofit/>
-          </a:bodyPr>
-          <a:lstStyle/>
-          <a:p>
-            <a:pPr algn="l" indent="0" marL="0">
+          <a:prstGeom xmlns:a="http://schemas.openxmlformats.org/drawingml/2006/main" prst="rect">
+            <a:avLst/>
+          </a:prstGeom>
+          <a:noFill xmlns:a="http://schemas.openxmlformats.org/drawingml/2006/main"/>
+        </p:spPr>
+        <p:txBody>
+          <a:bodyPr xmlns:a="http://schemas.openxmlformats.org/drawingml/2006/main" wrap="square" lIns="0" tIns="0" rIns="0" bIns="0" anchor="t">
+            <a:normAutofit/>
+          </a:bodyPr>
+          <a:lstStyle xmlns:a="http://schemas.openxmlformats.org/drawingml/2006/main"/>
+          <a:p xmlns:a="http://schemas.openxmlformats.org/drawingml/2006/main">
+            <a:pPr marL="0" indent="0" algn="l">
               <a:lnSpc>
                 <a:spcPts val="1680"/>
               </a:lnSpc>
               <a:buNone/>
             </a:pPr>
             <a:r>
-              <a:rPr lang="en-US" sz="1200" dirty="0">
+              <a:rPr sz="1200">
                 <a:solidFill>
                   <a:srgbClr val="5E6975"/>
                 </a:solidFill>
-                <a:latin typeface="IBM Plex Sans" pitchFamily="34" charset="0"/>
-                <a:ea typeface="IBM Plex Sans" pitchFamily="34" charset="-122"/>
-                <a:cs typeface="IBM Plex Sans" pitchFamily="34" charset="-120"/>
+                <a:latin typeface="IBM Plex Sans"/>
+                <a:ea typeface="IBM Plex Sans"/>
+                <a:cs typeface="IBM Plex Sans"/>
               </a:rPr>
               <a:t>Елементи развоја софтвера</a:t>
             </a:r>
-            <a:endParaRPr lang="en-US" sz="1200" dirty="0"/>
-          </a:p>
-        </p:txBody>
-      </p:sp>
-      <p:sp>
-        <p:nvSpPr>
-          <p:cNvPr id="33" name="Text 28"/>
-          <p:cNvSpPr/>
-          <p:nvPr/>
-        </p:nvSpPr>
-        <p:spPr>
-          <a:xfrm>
+            <a:endParaRPr sz="1200"/>
+          </a:p>
+        </p:txBody>
+      </p:sp>
+      <p:sp>
+        <p:nvSpPr>
+          <p:cNvPr id="33" name="Text 28">
+            <a:extLst xmlns:a="http://schemas.openxmlformats.org/drawingml/2006/main">
+              <a:ext uri="{FF2B5EF4-FFF2-40B4-BE49-F238E27FC236}">
+                <a16:creationId xmlns:a16="http://schemas.microsoft.com/office/drawing/2014/main" id="{39D734E4-33E3-47AF-B222-B3FAC05F5DDB}"/>
+              </a:ext>
+            </a:extLst>
+          </p:cNvPr>
+          <p:cNvSpPr>
+            <a:spLocks xmlns:a="http://schemas.openxmlformats.org/drawingml/2006/main" noGrp="1"/>
+          </p:cNvSpPr>
+          <p:nvPr/>
+        </p:nvSpPr>
+        <p:spPr>
+          <a:xfrm xmlns:a="http://schemas.openxmlformats.org/drawingml/2006/main">
             <a:off x="11145441" y="6314480"/>
             <a:ext cx="233759" cy="238720"/>
           </a:xfrm>
-          <a:prstGeom prst="rect">
-            <a:avLst/>
-          </a:prstGeom>
-          <a:noFill/>
-          <a:ln/>
-        </p:spPr>
-        <p:txBody>
-          <a:bodyPr wrap="square" lIns="0" tIns="0" rIns="0" bIns="0" rtlCol="0" anchor="t">
-            <a:normAutofit/>
-          </a:bodyPr>
-          <a:lstStyle/>
-          <a:p>
-            <a:pPr algn="r" indent="0" marL="0">
+          <a:prstGeom xmlns:a="http://schemas.openxmlformats.org/drawingml/2006/main" prst="rect">
+            <a:avLst/>
+          </a:prstGeom>
+          <a:noFill xmlns:a="http://schemas.openxmlformats.org/drawingml/2006/main"/>
+        </p:spPr>
+        <p:txBody>
+          <a:bodyPr xmlns:a="http://schemas.openxmlformats.org/drawingml/2006/main" wrap="square" lIns="0" tIns="0" rIns="0" bIns="0" anchor="t">
+            <a:normAutofit/>
+          </a:bodyPr>
+          <a:lstStyle xmlns:a="http://schemas.openxmlformats.org/drawingml/2006/main"/>
+          <a:p xmlns:a="http://schemas.openxmlformats.org/drawingml/2006/main">
+            <a:pPr marL="0" indent="0" algn="r">
               <a:lnSpc>
                 <a:spcPts val="1680"/>
               </a:lnSpc>
               <a:buNone/>
             </a:pPr>
             <a:r>
-              <a:rPr lang="en-US" sz="1200" dirty="0">
+              <a:rPr sz="1200">
                 <a:solidFill>
                   <a:srgbClr val="5E6975"/>
                 </a:solidFill>
-                <a:latin typeface="IBM Plex Mono" pitchFamily="49" charset="0"/>
-                <a:ea typeface="IBM Plex Mono" pitchFamily="49" charset="-122"/>
-                <a:cs typeface="IBM Plex Mono" pitchFamily="49" charset="-120"/>
+                <a:latin typeface="IBM Plex Mono"/>
+                <a:ea typeface="IBM Plex Mono"/>
+                <a:cs typeface="IBM Plex Mono"/>
               </a:rPr>
               <a:t>05</a:t>
             </a:r>
-            <a:endParaRPr lang="en-US" sz="1200" dirty="0"/>
+            <a:endParaRPr sz="1200"/>
+          </a:p>
+        </p:txBody>
+      </p:sp>
+      <p:sp>
+        <p:nvSpPr>
+          <p:cNvPr id="34" name="">
+            <a:extLst xmlns:a="http://schemas.openxmlformats.org/drawingml/2006/main">
+              <a:ext uri="{FF2B5EF4-FFF2-40B4-BE49-F238E27FC236}">
+                <a16:creationId xmlns:a16="http://schemas.microsoft.com/office/drawing/2014/main" id="{C5A02FC6-1616-4D32-894B-64A63380E9FE}"/>
+              </a:ext>
+            </a:extLst>
+          </p:cNvPr>
+          <p:cNvSpPr>
+            <a:spLocks xmlns:a="http://schemas.openxmlformats.org/drawingml/2006/main" noGrp="1"/>
+          </p:cNvSpPr>
+          <p:nvPr/>
+        </p:nvSpPr>
+        <p:spPr>
+          <a:xfrm xmlns:a="http://schemas.openxmlformats.org/drawingml/2006/main">
+            <a:off x="996982" y="3067050"/>
+            <a:ext cx="4667250" cy="495300"/>
+          </a:xfrm>
+          <a:prstGeom xmlns:a="http://schemas.openxmlformats.org/drawingml/2006/main" prst="rect">
+            <a:avLst/>
+          </a:prstGeom>
+          <a:noFill xmlns:a="http://schemas.openxmlformats.org/drawingml/2006/main"/>
+          <a:ln xmlns:a="http://schemas.openxmlformats.org/drawingml/2006/main" w="0">
+            <a:noFill/>
+          </a:ln>
+        </p:spPr>
+        <p:txBody>
+          <a:bodyPr xmlns:a="http://schemas.openxmlformats.org/drawingml/2006/main" lIns="0" tIns="0" rIns="0" bIns="0"/>
+          <a:lstStyle xmlns:a="http://schemas.openxmlformats.org/drawingml/2006/main">
+            <a:defPPr>
+              <a:defRPr sz="1300">
+                <a:solidFill>
+                  <a:srgbClr val="44505D"/>
+                </a:solidFill>
+                <a:latin typeface="IBM Plex Sans"/>
+                <a:ea typeface="IBM Plex Sans"/>
+                <a:cs typeface="IBM Plex Sans"/>
+              </a:defRPr>
+            </a:defPPr>
+            <a:lvl1pPr>
+              <a:defRPr sz="1300">
+                <a:solidFill>
+                  <a:srgbClr val="44505D"/>
+                </a:solidFill>
+                <a:latin typeface="IBM Plex Sans"/>
+                <a:ea typeface="IBM Plex Sans"/>
+                <a:cs typeface="IBM Plex Sans"/>
+              </a:defRPr>
+            </a:lvl1pPr>
+            <a:lvl2pPr>
+              <a:defRPr sz="1300">
+                <a:solidFill>
+                  <a:srgbClr val="44505D"/>
+                </a:solidFill>
+                <a:latin typeface="IBM Plex Sans"/>
+                <a:ea typeface="IBM Plex Sans"/>
+                <a:cs typeface="IBM Plex Sans"/>
+              </a:defRPr>
+            </a:lvl2pPr>
+            <a:lvl3pPr>
+              <a:defRPr sz="1300">
+                <a:solidFill>
+                  <a:srgbClr val="44505D"/>
+                </a:solidFill>
+                <a:latin typeface="IBM Plex Sans"/>
+                <a:ea typeface="IBM Plex Sans"/>
+                <a:cs typeface="IBM Plex Sans"/>
+              </a:defRPr>
+            </a:lvl3pPr>
+            <a:lvl4pPr>
+              <a:defRPr sz="1300">
+                <a:solidFill>
+                  <a:srgbClr val="44505D"/>
+                </a:solidFill>
+                <a:latin typeface="IBM Plex Sans"/>
+                <a:ea typeface="IBM Plex Sans"/>
+                <a:cs typeface="IBM Plex Sans"/>
+              </a:defRPr>
+            </a:lvl4pPr>
+            <a:lvl5pPr>
+              <a:defRPr sz="1300">
+                <a:solidFill>
+                  <a:srgbClr val="44505D"/>
+                </a:solidFill>
+                <a:latin typeface="IBM Plex Sans"/>
+                <a:ea typeface="IBM Plex Sans"/>
+                <a:cs typeface="IBM Plex Sans"/>
+              </a:defRPr>
+            </a:lvl5pPr>
+            <a:lvl6pPr>
+              <a:defRPr sz="1300">
+                <a:solidFill>
+                  <a:srgbClr val="44505D"/>
+                </a:solidFill>
+                <a:latin typeface="IBM Plex Sans"/>
+                <a:ea typeface="IBM Plex Sans"/>
+                <a:cs typeface="IBM Plex Sans"/>
+              </a:defRPr>
+            </a:lvl6pPr>
+            <a:lvl7pPr>
+              <a:defRPr sz="1300">
+                <a:solidFill>
+                  <a:srgbClr val="44505D"/>
+                </a:solidFill>
+                <a:latin typeface="IBM Plex Sans"/>
+                <a:ea typeface="IBM Plex Sans"/>
+                <a:cs typeface="IBM Plex Sans"/>
+              </a:defRPr>
+            </a:lvl7pPr>
+            <a:lvl8pPr>
+              <a:defRPr sz="1300">
+                <a:solidFill>
+                  <a:srgbClr val="44505D"/>
+                </a:solidFill>
+                <a:latin typeface="IBM Plex Sans"/>
+                <a:ea typeface="IBM Plex Sans"/>
+                <a:cs typeface="IBM Plex Sans"/>
+              </a:defRPr>
+            </a:lvl8pPr>
+            <a:lvl9pPr>
+              <a:defRPr sz="1300">
+                <a:solidFill>
+                  <a:srgbClr val="44505D"/>
+                </a:solidFill>
+                <a:latin typeface="IBM Plex Sans"/>
+                <a:ea typeface="IBM Plex Sans"/>
+                <a:cs typeface="IBM Plex Sans"/>
+              </a:defRPr>
+            </a:lvl9pPr>
+          </a:lstStyle>
+          <a:p xmlns:a="http://schemas.openxmlformats.org/drawingml/2006/main">
+            <a:pPr>
+              <a:defRPr sz="1300">
+                <a:solidFill>
+                  <a:srgbClr val="44505D"/>
+                </a:solidFill>
+                <a:latin typeface="IBM Plex Sans"/>
+                <a:ea typeface="IBM Plex Sans"/>
+                <a:cs typeface="IBM Plex Sans"/>
+              </a:defRPr>
+            </a:pPr>
+            <a:r>
+              <a:rPr sz="1300">
+                <a:solidFill>
+                  <a:srgbClr val="44505D"/>
+                </a:solidFill>
+                <a:latin typeface="IBM Plex Sans"/>
+                <a:ea typeface="IBM Plex Sans"/>
+                <a:cs typeface="IBM Plex Sans"/>
+              </a:rPr>
+              <a:t>Доменски модел, извршив ток и тест</a:t>
+            </a:r>
+          </a:p>
+          <a:p xmlns:a="http://schemas.openxmlformats.org/drawingml/2006/main">
+            <a:pPr>
+              <a:defRPr sz="1300">
+                <a:solidFill>
+                  <a:srgbClr val="44505D"/>
+                </a:solidFill>
+                <a:latin typeface="IBM Plex Sans"/>
+                <a:ea typeface="IBM Plex Sans"/>
+                <a:cs typeface="IBM Plex Sans"/>
+              </a:defRPr>
+            </a:pPr>
+            <a:r>
+              <a:rPr sz="1300">
+                <a:solidFill>
+                  <a:srgbClr val="44505D"/>
+                </a:solidFill>
+                <a:latin typeface="IBM Plex Sans"/>
+                <a:ea typeface="IBM Plex Sans"/>
+                <a:cs typeface="IBM Plex Sans"/>
+              </a:rPr>
+              <a:t>Уговори и договор са зависним тимовима</a:t>
+            </a:r>
+          </a:p>
+        </p:txBody>
+      </p:sp>
+      <p:sp>
+        <p:nvSpPr>
+          <p:cNvPr id="35" name="">
+            <a:extLst xmlns:a="http://schemas.openxmlformats.org/drawingml/2006/main">
+              <a:ext uri="{FF2B5EF4-FFF2-40B4-BE49-F238E27FC236}">
+                <a16:creationId xmlns:a16="http://schemas.microsoft.com/office/drawing/2014/main" id="{801456F4-5B65-477C-A408-D2F1D5E91D27}"/>
+              </a:ext>
+            </a:extLst>
+          </p:cNvPr>
+          <p:cNvSpPr>
+            <a:spLocks xmlns:a="http://schemas.openxmlformats.org/drawingml/2006/main" noGrp="1"/>
+          </p:cNvSpPr>
+          <p:nvPr/>
+        </p:nvSpPr>
+        <p:spPr>
+          <a:xfrm xmlns:a="http://schemas.openxmlformats.org/drawingml/2006/main">
+            <a:off x="6496050" y="3067050"/>
+            <a:ext cx="4667250" cy="495300"/>
+          </a:xfrm>
+          <a:prstGeom xmlns:a="http://schemas.openxmlformats.org/drawingml/2006/main" prst="rect">
+            <a:avLst/>
+          </a:prstGeom>
+          <a:noFill xmlns:a="http://schemas.openxmlformats.org/drawingml/2006/main"/>
+          <a:ln xmlns:a="http://schemas.openxmlformats.org/drawingml/2006/main" w="0">
+            <a:noFill/>
+          </a:ln>
+        </p:spPr>
+        <p:txBody>
+          <a:bodyPr xmlns:a="http://schemas.openxmlformats.org/drawingml/2006/main" lIns="0" tIns="0" rIns="0" bIns="0"/>
+          <a:lstStyle xmlns:a="http://schemas.openxmlformats.org/drawingml/2006/main">
+            <a:defPPr>
+              <a:defRPr sz="1300">
+                <a:solidFill>
+                  <a:srgbClr val="44505D"/>
+                </a:solidFill>
+                <a:latin typeface="IBM Plex Sans"/>
+                <a:ea typeface="IBM Plex Sans"/>
+                <a:cs typeface="IBM Plex Sans"/>
+              </a:defRPr>
+            </a:defPPr>
+            <a:lvl1pPr>
+              <a:defRPr sz="1300">
+                <a:solidFill>
+                  <a:srgbClr val="44505D"/>
+                </a:solidFill>
+                <a:latin typeface="IBM Plex Sans"/>
+                <a:ea typeface="IBM Plex Sans"/>
+                <a:cs typeface="IBM Plex Sans"/>
+              </a:defRPr>
+            </a:lvl1pPr>
+            <a:lvl2pPr>
+              <a:defRPr sz="1300">
+                <a:solidFill>
+                  <a:srgbClr val="44505D"/>
+                </a:solidFill>
+                <a:latin typeface="IBM Plex Sans"/>
+                <a:ea typeface="IBM Plex Sans"/>
+                <a:cs typeface="IBM Plex Sans"/>
+              </a:defRPr>
+            </a:lvl2pPr>
+            <a:lvl3pPr>
+              <a:defRPr sz="1300">
+                <a:solidFill>
+                  <a:srgbClr val="44505D"/>
+                </a:solidFill>
+                <a:latin typeface="IBM Plex Sans"/>
+                <a:ea typeface="IBM Plex Sans"/>
+                <a:cs typeface="IBM Plex Sans"/>
+              </a:defRPr>
+            </a:lvl3pPr>
+            <a:lvl4pPr>
+              <a:defRPr sz="1300">
+                <a:solidFill>
+                  <a:srgbClr val="44505D"/>
+                </a:solidFill>
+                <a:latin typeface="IBM Plex Sans"/>
+                <a:ea typeface="IBM Plex Sans"/>
+                <a:cs typeface="IBM Plex Sans"/>
+              </a:defRPr>
+            </a:lvl4pPr>
+            <a:lvl5pPr>
+              <a:defRPr sz="1300">
+                <a:solidFill>
+                  <a:srgbClr val="44505D"/>
+                </a:solidFill>
+                <a:latin typeface="IBM Plex Sans"/>
+                <a:ea typeface="IBM Plex Sans"/>
+                <a:cs typeface="IBM Plex Sans"/>
+              </a:defRPr>
+            </a:lvl5pPr>
+            <a:lvl6pPr>
+              <a:defRPr sz="1300">
+                <a:solidFill>
+                  <a:srgbClr val="44505D"/>
+                </a:solidFill>
+                <a:latin typeface="IBM Plex Sans"/>
+                <a:ea typeface="IBM Plex Sans"/>
+                <a:cs typeface="IBM Plex Sans"/>
+              </a:defRPr>
+            </a:lvl6pPr>
+            <a:lvl7pPr>
+              <a:defRPr sz="1300">
+                <a:solidFill>
+                  <a:srgbClr val="44505D"/>
+                </a:solidFill>
+                <a:latin typeface="IBM Plex Sans"/>
+                <a:ea typeface="IBM Plex Sans"/>
+                <a:cs typeface="IBM Plex Sans"/>
+              </a:defRPr>
+            </a:lvl7pPr>
+            <a:lvl8pPr>
+              <a:defRPr sz="1300">
+                <a:solidFill>
+                  <a:srgbClr val="44505D"/>
+                </a:solidFill>
+                <a:latin typeface="IBM Plex Sans"/>
+                <a:ea typeface="IBM Plex Sans"/>
+                <a:cs typeface="IBM Plex Sans"/>
+              </a:defRPr>
+            </a:lvl8pPr>
+            <a:lvl9pPr>
+              <a:defRPr sz="1300">
+                <a:solidFill>
+                  <a:srgbClr val="44505D"/>
+                </a:solidFill>
+                <a:latin typeface="IBM Plex Sans"/>
+                <a:ea typeface="IBM Plex Sans"/>
+                <a:cs typeface="IBM Plex Sans"/>
+              </a:defRPr>
+            </a:lvl9pPr>
+          </a:lstStyle>
+          <a:p xmlns:a="http://schemas.openxmlformats.org/drawingml/2006/main">
+            <a:pPr>
+              <a:defRPr sz="1300">
+                <a:solidFill>
+                  <a:srgbClr val="44505D"/>
+                </a:solidFill>
+                <a:latin typeface="IBM Plex Sans"/>
+                <a:ea typeface="IBM Plex Sans"/>
+                <a:cs typeface="IBM Plex Sans"/>
+              </a:defRPr>
+            </a:pPr>
+            <a:r>
+              <a:rPr sz="1300">
+                <a:solidFill>
+                  <a:srgbClr val="44505D"/>
+                </a:solidFill>
+                <a:latin typeface="IBM Plex Sans"/>
+                <a:ea typeface="IBM Plex Sans"/>
+                <a:cs typeface="IBM Plex Sans"/>
+              </a:rPr>
+              <a:t>Обавезни случајеви употребе, тестови и интеграција</a:t>
+            </a:r>
+          </a:p>
+          <a:p xmlns:a="http://schemas.openxmlformats.org/drawingml/2006/main">
+            <a:pPr>
+              <a:defRPr sz="1300">
+                <a:solidFill>
+                  <a:srgbClr val="44505D"/>
+                </a:solidFill>
+                <a:latin typeface="IBM Plex Sans"/>
+                <a:ea typeface="IBM Plex Sans"/>
+                <a:cs typeface="IBM Plex Sans"/>
+              </a:defRPr>
+            </a:pPr>
+            <a:r>
+              <a:rPr sz="1300">
+                <a:solidFill>
+                  <a:srgbClr val="44505D"/>
+                </a:solidFill>
+                <a:latin typeface="IBM Plex Sans"/>
+                <a:ea typeface="IBM Plex Sans"/>
+                <a:cs typeface="IBM Plex Sans"/>
+              </a:rPr>
+              <a:t>Поновљив demo, build/CI и прегледани PR-ови</a:t>
+            </a:r>
+          </a:p>
+        </p:txBody>
+      </p:sp>
+      <p:sp>
+        <p:nvSpPr>
+          <p:cNvPr id="36" name="">
+            <a:extLst xmlns:a="http://schemas.openxmlformats.org/drawingml/2006/main">
+              <a:ext uri="{FF2B5EF4-FFF2-40B4-BE49-F238E27FC236}">
+                <a16:creationId xmlns:a16="http://schemas.microsoft.com/office/drawing/2014/main" id="{F1E75634-1924-4F15-BB6A-0F8255F72790}"/>
+              </a:ext>
+            </a:extLst>
+          </p:cNvPr>
+          <p:cNvSpPr>
+            <a:spLocks xmlns:a="http://schemas.openxmlformats.org/drawingml/2006/main" noGrp="1"/>
+          </p:cNvSpPr>
+          <p:nvPr/>
+        </p:nvSpPr>
+        <p:spPr>
+          <a:xfrm xmlns:a="http://schemas.openxmlformats.org/drawingml/2006/main">
+            <a:off x="812768" y="5486400"/>
+            <a:ext cx="10566368" cy="438150"/>
+          </a:xfrm>
+          <a:prstGeom xmlns:a="http://schemas.openxmlformats.org/drawingml/2006/main" prst="rect">
+            <a:avLst/>
+          </a:prstGeom>
+          <a:noFill xmlns:a="http://schemas.openxmlformats.org/drawingml/2006/main"/>
+          <a:ln xmlns:a="http://schemas.openxmlformats.org/drawingml/2006/main" w="0">
+            <a:noFill/>
+          </a:ln>
+        </p:spPr>
+        <p:txBody>
+          <a:bodyPr xmlns:a="http://schemas.openxmlformats.org/drawingml/2006/main" lIns="0" tIns="0" rIns="0" bIns="0"/>
+          <a:lstStyle xmlns:a="http://schemas.openxmlformats.org/drawingml/2006/main">
+            <a:defPPr>
+              <a:defRPr sz="1400">
+                <a:solidFill>
+                  <a:srgbClr val="44505D"/>
+                </a:solidFill>
+                <a:latin typeface="IBM Plex Sans"/>
+                <a:ea typeface="IBM Plex Sans"/>
+                <a:cs typeface="IBM Plex Sans"/>
+              </a:defRPr>
+            </a:defPPr>
+            <a:lvl1pPr>
+              <a:defRPr sz="1400">
+                <a:solidFill>
+                  <a:srgbClr val="44505D"/>
+                </a:solidFill>
+                <a:latin typeface="IBM Plex Sans"/>
+                <a:ea typeface="IBM Plex Sans"/>
+                <a:cs typeface="IBM Plex Sans"/>
+              </a:defRPr>
+            </a:lvl1pPr>
+            <a:lvl2pPr>
+              <a:defRPr sz="1400">
+                <a:solidFill>
+                  <a:srgbClr val="44505D"/>
+                </a:solidFill>
+                <a:latin typeface="IBM Plex Sans"/>
+                <a:ea typeface="IBM Plex Sans"/>
+                <a:cs typeface="IBM Plex Sans"/>
+              </a:defRPr>
+            </a:lvl2pPr>
+            <a:lvl3pPr>
+              <a:defRPr sz="1400">
+                <a:solidFill>
+                  <a:srgbClr val="44505D"/>
+                </a:solidFill>
+                <a:latin typeface="IBM Plex Sans"/>
+                <a:ea typeface="IBM Plex Sans"/>
+                <a:cs typeface="IBM Plex Sans"/>
+              </a:defRPr>
+            </a:lvl3pPr>
+            <a:lvl4pPr>
+              <a:defRPr sz="1400">
+                <a:solidFill>
+                  <a:srgbClr val="44505D"/>
+                </a:solidFill>
+                <a:latin typeface="IBM Plex Sans"/>
+                <a:ea typeface="IBM Plex Sans"/>
+                <a:cs typeface="IBM Plex Sans"/>
+              </a:defRPr>
+            </a:lvl4pPr>
+            <a:lvl5pPr>
+              <a:defRPr sz="1400">
+                <a:solidFill>
+                  <a:srgbClr val="44505D"/>
+                </a:solidFill>
+                <a:latin typeface="IBM Plex Sans"/>
+                <a:ea typeface="IBM Plex Sans"/>
+                <a:cs typeface="IBM Plex Sans"/>
+              </a:defRPr>
+            </a:lvl5pPr>
+            <a:lvl6pPr>
+              <a:defRPr sz="1400">
+                <a:solidFill>
+                  <a:srgbClr val="44505D"/>
+                </a:solidFill>
+                <a:latin typeface="IBM Plex Sans"/>
+                <a:ea typeface="IBM Plex Sans"/>
+                <a:cs typeface="IBM Plex Sans"/>
+              </a:defRPr>
+            </a:lvl6pPr>
+            <a:lvl7pPr>
+              <a:defRPr sz="1400">
+                <a:solidFill>
+                  <a:srgbClr val="44505D"/>
+                </a:solidFill>
+                <a:latin typeface="IBM Plex Sans"/>
+                <a:ea typeface="IBM Plex Sans"/>
+                <a:cs typeface="IBM Plex Sans"/>
+              </a:defRPr>
+            </a:lvl7pPr>
+            <a:lvl8pPr>
+              <a:defRPr sz="1400">
+                <a:solidFill>
+                  <a:srgbClr val="44505D"/>
+                </a:solidFill>
+                <a:latin typeface="IBM Plex Sans"/>
+                <a:ea typeface="IBM Plex Sans"/>
+                <a:cs typeface="IBM Plex Sans"/>
+              </a:defRPr>
+            </a:lvl8pPr>
+            <a:lvl9pPr>
+              <a:defRPr sz="1400">
+                <a:solidFill>
+                  <a:srgbClr val="44505D"/>
+                </a:solidFill>
+                <a:latin typeface="IBM Plex Sans"/>
+                <a:ea typeface="IBM Plex Sans"/>
+                <a:cs typeface="IBM Plex Sans"/>
+              </a:defRPr>
+            </a:lvl9pPr>
+          </a:lstStyle>
+          <a:p xmlns:a="http://schemas.openxmlformats.org/drawingml/2006/main">
+            <a:pPr>
+              <a:defRPr sz="1400">
+                <a:solidFill>
+                  <a:srgbClr val="44505D"/>
+                </a:solidFill>
+                <a:latin typeface="IBM Plex Sans"/>
+                <a:ea typeface="IBM Plex Sans"/>
+                <a:cs typeface="IBM Plex Sans"/>
+              </a:defRPr>
+            </a:pPr>
+            <a:r>
+              <a:rPr sz="1400">
+                <a:solidFill>
+                  <a:srgbClr val="44505D"/>
+                </a:solidFill>
+                <a:latin typeface="IBM Plex Sans"/>
+                <a:ea typeface="IBM Plex Sans"/>
+                <a:cs typeface="IBM Plex Sans"/>
+              </a:rPr>
+              <a:t>Контролне тачке и термини одбране пројекта су одвојене обавезе.</a:t>
+            </a:r>
           </a:p>
         </p:txBody>
       </p:sp>
     </p:spTree>
+    <p:extLst>
+      <p:ext uri="{BB962C8B-B14F-4D97-AF65-F5344CB8AC3E}">
+        <p14:creationId xmlns:p14="http://schemas.microsoft.com/office/powerpoint/2010/main" val="1763741716"/>
+      </p:ext>
+    </p:extLst>
   </p:cSld>
-  <p:clrMapOvr>
-    <a:masterClrMapping/>
-  </p:clrMapOvr>
 </p:sld>
 </file>
 
